--- a/docs/language-learner-agent-lightning-talk.pptx
+++ b/docs/language-learner-agent-lightning-talk.pptx
@@ -4,20 +4,23 @@
   <p:sldMasterIdLst>
     <p:sldMasterId id="2147483648" r:id="rId1"/>
   </p:sldMasterIdLst>
+  <p:notesMasterIdLst>
+    <p:notesMasterId r:id="rId13"/>
+  </p:notesMasterIdLst>
   <p:sldIdLst>
-    <p:sldId id="256" r:id="rId7"/>
-    <p:sldId id="257" r:id="rId9"/>
-    <p:sldId id="258" r:id="rId10"/>
-    <p:sldId id="259" r:id="rId11"/>
-    <p:sldId id="260" r:id="rId12"/>
-    <p:sldId id="261" r:id="rId13"/>
-    <p:sldId id="262" r:id="rId14"/>
-    <p:sldId id="263" r:id="rId15"/>
-    <p:sldId id="264" r:id="rId16"/>
-    <p:sldId id="265" r:id="rId17"/>
-    <p:sldId id="266" r:id="rId18"/>
+    <p:sldId id="256" r:id="rId2"/>
+    <p:sldId id="257" r:id="rId3"/>
+    <p:sldId id="258" r:id="rId4"/>
+    <p:sldId id="259" r:id="rId5"/>
+    <p:sldId id="260" r:id="rId6"/>
+    <p:sldId id="261" r:id="rId7"/>
+    <p:sldId id="262" r:id="rId8"/>
+    <p:sldId id="263" r:id="rId9"/>
+    <p:sldId id="264" r:id="rId10"/>
+    <p:sldId id="265" r:id="rId11"/>
+    <p:sldId id="266" r:id="rId12"/>
   </p:sldIdLst>
-  <p:sldSz cx="12188952" cy="6858000" type="screen4x3"/>
+  <p:sldSz cx="12188825" cy="6858000"/>
   <p:notesSz cx="6858000" cy="9144000"/>
   <p:defaultTextStyle>
     <a:defPPr>
@@ -114,11 +117,27 @@
       </a:defRPr>
     </a:lvl9pPr>
   </p:defaultTextStyle>
+  <p:extLst>
+    <p:ext uri="{EFAFB233-063F-42B5-8137-9DF3F51BA10A}">
+      <p15:sldGuideLst xmlns:p15="http://schemas.microsoft.com/office/powerpoint/2012/main">
+        <p15:guide id="1" orient="horz" pos="2160">
+          <p15:clr>
+            <a:srgbClr val="A4A3A4"/>
+          </p15:clr>
+        </p15:guide>
+        <p15:guide id="2" pos="2880">
+          <p15:clr>
+            <a:srgbClr val="A4A3A4"/>
+          </p15:clr>
+        </p15:guide>
+      </p15:sldGuideLst>
+    </p:ext>
+  </p:extLst>
 </p:presentation>
 </file>
 
 <file path=ppt/notesMasters/notesMaster1.xml><?xml version="1.0" encoding="utf-8"?>
-<p:notesMaster xmlns:a="http://schemas.openxmlformats.org/drawingml/2006/main" xmlns:p="http://schemas.openxmlformats.org/presentationml/2006/main" xmlns:r="http://schemas.openxmlformats.org/officeDocument/2006/relationships">
+<p:notesMaster xmlns:a="http://schemas.openxmlformats.org/drawingml/2006/main" xmlns:r="http://schemas.openxmlformats.org/officeDocument/2006/relationships" xmlns:p="http://schemas.openxmlformats.org/presentationml/2006/main">
   <p:cSld>
     <p:bg>
       <p:bgRef idx="1001">
@@ -139,241 +158,16 @@
           <a:chExt cx="0" cy="0"/>
         </a:xfrm>
       </p:grpSpPr>
-      <p:sp>
-        <p:nvSpPr>
-          <p:cNvPr id="2" name="Header Placeholder 1"/>
-          <p:cNvSpPr>
-            <a:spLocks noGrp="1"/>
-          </p:cNvSpPr>
-          <p:nvPr>
-            <p:ph type="hdr" sz="quarter"/>
-          </p:nvPr>
-        </p:nvSpPr>
-        <p:spPr>
-          <a:xfrm>
-            <a:off x="0" y="0"/>
-            <a:ext cx="2971800" cy="457200"/>
-          </a:xfrm>
-          <a:prstGeom prst="rect">
-            <a:avLst/>
-          </a:prstGeom>
-        </p:spPr>
-        <p:txBody>
-          <a:bodyPr vert="horz" lIns="91440" tIns="45720" rIns="91440" bIns="45720" rtlCol="0"/>
-          <a:lstStyle>
-            <a:lvl1pPr algn="l">
-              <a:defRPr sz="1200"/>
-            </a:lvl1pPr>
-          </a:lstStyle>
-          <a:p>
-            <a:endParaRPr lang="en-US"/>
-          </a:p>
-        </p:txBody>
-      </p:sp>
-      <p:sp>
-        <p:nvSpPr>
-          <p:cNvPr id="3" name="Date Placeholder 2"/>
-          <p:cNvSpPr>
-            <a:spLocks noGrp="1"/>
-          </p:cNvSpPr>
-          <p:nvPr>
-            <p:ph type="dt" idx="1"/>
-          </p:nvPr>
-        </p:nvSpPr>
-        <p:spPr>
-          <a:xfrm>
-            <a:off x="3884613" y="0"/>
-            <a:ext cx="2971800" cy="457200"/>
-          </a:xfrm>
-          <a:prstGeom prst="rect">
-            <a:avLst/>
-          </a:prstGeom>
-        </p:spPr>
-        <p:txBody>
-          <a:bodyPr vert="horz" lIns="91440" tIns="45720" rIns="91440" bIns="45720" rtlCol="0"/>
-          <a:lstStyle>
-            <a:lvl1pPr algn="r">
-              <a:defRPr sz="1200"/>
-            </a:lvl1pPr>
-          </a:lstStyle>
-          <a:p>
-            <a:fld id="{0F89C1C7-3DCD-1040-A9CF-14679D8B5DDD}" type="datetimeFigureOut">
-              <a:rPr lang="en-US" smtClean="0"/>
-              <a:t>10/17/16</a:t>
-            </a:fld>
-            <a:endParaRPr lang="en-US"/>
-          </a:p>
-        </p:txBody>
-      </p:sp>
-      <p:sp>
-        <p:nvSpPr>
-          <p:cNvPr id="4" name="Slide Image Placeholder 3"/>
-          <p:cNvSpPr>
-            <a:spLocks noGrp="1" noRot="1" noChangeAspect="1"/>
-          </p:cNvSpPr>
-          <p:nvPr>
-            <p:ph type="sldImg" idx="2"/>
-          </p:nvPr>
-        </p:nvSpPr>
-        <p:spPr>
-          <a:xfrm>
-            <a:off x="1143000" y="685800"/>
-            <a:ext cx="4572000" cy="3429000"/>
-          </a:xfrm>
-          <a:prstGeom prst="rect">
-            <a:avLst/>
-          </a:prstGeom>
-          <a:noFill/>
-          <a:ln w="12700">
-            <a:solidFill>
-              <a:prstClr val="black"/>
-            </a:solidFill>
-          </a:ln>
-        </p:spPr>
-        <p:txBody>
-          <a:bodyPr vert="horz" lIns="91440" tIns="45720" rIns="91440" bIns="45720" rtlCol="0" anchor="ctr"/>
-          <a:lstStyle/>
-          <a:p>
-            <a:endParaRPr lang="en-US"/>
-          </a:p>
-        </p:txBody>
-      </p:sp>
-      <p:sp>
-        <p:nvSpPr>
-          <p:cNvPr id="5" name="Notes Placeholder 4"/>
-          <p:cNvSpPr>
-            <a:spLocks noGrp="1"/>
-          </p:cNvSpPr>
-          <p:nvPr>
-            <p:ph type="body" sz="quarter" idx="3"/>
-          </p:nvPr>
-        </p:nvSpPr>
-        <p:spPr>
-          <a:xfrm>
-            <a:off x="685800" y="4343400"/>
-            <a:ext cx="5486400" cy="4114800"/>
-          </a:xfrm>
-          <a:prstGeom prst="rect">
-            <a:avLst/>
-          </a:prstGeom>
-        </p:spPr>
-        <p:txBody>
-          <a:bodyPr vert="horz" lIns="91440" tIns="45720" rIns="91440" bIns="45720" rtlCol="0"/>
-          <a:lstStyle/>
-          <a:p>
-            <a:pPr lvl="0"/>
-            <a:r>
-              <a:rPr lang="en-US" smtClean="0"/>
-              <a:t>Click to edit Master text styles</a:t>
-            </a:r>
-          </a:p>
-          <a:p>
-            <a:pPr lvl="1"/>
-            <a:r>
-              <a:rPr lang="en-US" smtClean="0"/>
-              <a:t>Second level</a:t>
-            </a:r>
-          </a:p>
-          <a:p>
-            <a:pPr lvl="2"/>
-            <a:r>
-              <a:rPr lang="en-US" smtClean="0"/>
-              <a:t>Third level</a:t>
-            </a:r>
-          </a:p>
-          <a:p>
-            <a:pPr lvl="3"/>
-            <a:r>
-              <a:rPr lang="en-US" smtClean="0"/>
-              <a:t>Fourth level</a:t>
-            </a:r>
-          </a:p>
-          <a:p>
-            <a:pPr lvl="4"/>
-            <a:r>
-              <a:rPr lang="en-US" smtClean="0"/>
-              <a:t>Fifth level</a:t>
-            </a:r>
-            <a:endParaRPr lang="en-US"/>
-          </a:p>
-        </p:txBody>
-      </p:sp>
-      <p:sp>
-        <p:nvSpPr>
-          <p:cNvPr id="6" name="Footer Placeholder 5"/>
-          <p:cNvSpPr>
-            <a:spLocks noGrp="1"/>
-          </p:cNvSpPr>
-          <p:nvPr>
-            <p:ph type="ftr" sz="quarter" idx="4"/>
-          </p:nvPr>
-        </p:nvSpPr>
-        <p:spPr>
-          <a:xfrm>
-            <a:off x="0" y="8685213"/>
-            <a:ext cx="2971800" cy="457200"/>
-          </a:xfrm>
-          <a:prstGeom prst="rect">
-            <a:avLst/>
-          </a:prstGeom>
-        </p:spPr>
-        <p:txBody>
-          <a:bodyPr vert="horz" lIns="91440" tIns="45720" rIns="91440" bIns="45720" rtlCol="0" anchor="b"/>
-          <a:lstStyle>
-            <a:lvl1pPr algn="l">
-              <a:defRPr sz="1200"/>
-            </a:lvl1pPr>
-          </a:lstStyle>
-          <a:p>
-            <a:endParaRPr lang="en-US"/>
-          </a:p>
-        </p:txBody>
-      </p:sp>
-      <p:sp>
-        <p:nvSpPr>
-          <p:cNvPr id="7" name="Slide Number Placeholder 6"/>
-          <p:cNvSpPr>
-            <a:spLocks noGrp="1"/>
-          </p:cNvSpPr>
-          <p:nvPr>
-            <p:ph type="sldNum" sz="quarter" idx="5"/>
-          </p:nvPr>
-        </p:nvSpPr>
-        <p:spPr>
-          <a:xfrm>
-            <a:off x="3884613" y="8685213"/>
-            <a:ext cx="2971800" cy="457200"/>
-          </a:xfrm>
-          <a:prstGeom prst="rect">
-            <a:avLst/>
-          </a:prstGeom>
-        </p:spPr>
-        <p:txBody>
-          <a:bodyPr vert="horz" lIns="91440" tIns="45720" rIns="91440" bIns="45720" rtlCol="0" anchor="b"/>
-          <a:lstStyle>
-            <a:lvl1pPr algn="r">
-              <a:defRPr sz="1200"/>
-            </a:lvl1pPr>
-          </a:lstStyle>
-          <a:p>
-            <a:fld id="{BB5E49A5-4136-284D-997B-48E1D791AD67}" type="slidenum">
-              <a:rPr lang="en-US" smtClean="0"/>
-              <a:t>‹#›</a:t>
-            </a:fld>
-            <a:endParaRPr lang="en-US"/>
-          </a:p>
-        </p:txBody>
-      </p:sp>
     </p:spTree>
     <p:extLst>
       <p:ext uri="{BB962C8B-B14F-4D97-AF65-F5344CB8AC3E}">
-        <p14:creationId xmlns:p14="http://schemas.microsoft.com/office/powerpoint/2010/main" val="2623252185"/>
+        <p14:creationId xmlns:p14="http://schemas.microsoft.com/office/powerpoint/2010/main" val="214492815"/>
       </p:ext>
     </p:extLst>
   </p:cSld>
   <p:clrMap bg1="lt1" tx1="dk1" bg2="lt2" tx2="dk2" accent1="accent1" accent2="accent2" accent3="accent3" accent4="accent4" accent5="accent5" accent6="accent6" hlink="hlink" folHlink="folHlink"/>
   <p:notesStyle>
-    <a:lvl1pPr marL="0" algn="l" defTabSz="457200" rtl="0" eaLnBrk="1" latinLnBrk="0" hangingPunct="1">
+    <a:lvl1pPr marL="0" algn="l" defTabSz="914400" rtl="0" eaLnBrk="1" latinLnBrk="0" hangingPunct="1">
       <a:defRPr sz="1200" kern="1200">
         <a:solidFill>
           <a:schemeClr val="tx1"/>
@@ -383,7 +177,7 @@
         <a:cs typeface="+mn-cs"/>
       </a:defRPr>
     </a:lvl1pPr>
-    <a:lvl2pPr marL="457200" algn="l" defTabSz="457200" rtl="0" eaLnBrk="1" latinLnBrk="0" hangingPunct="1">
+    <a:lvl2pPr marL="457200" algn="l" defTabSz="914400" rtl="0" eaLnBrk="1" latinLnBrk="0" hangingPunct="1">
       <a:defRPr sz="1200" kern="1200">
         <a:solidFill>
           <a:schemeClr val="tx1"/>
@@ -393,7 +187,7 @@
         <a:cs typeface="+mn-cs"/>
       </a:defRPr>
     </a:lvl2pPr>
-    <a:lvl3pPr marL="914400" algn="l" defTabSz="457200" rtl="0" eaLnBrk="1" latinLnBrk="0" hangingPunct="1">
+    <a:lvl3pPr marL="914400" algn="l" defTabSz="914400" rtl="0" eaLnBrk="1" latinLnBrk="0" hangingPunct="1">
       <a:defRPr sz="1200" kern="1200">
         <a:solidFill>
           <a:schemeClr val="tx1"/>
@@ -403,7 +197,7 @@
         <a:cs typeface="+mn-cs"/>
       </a:defRPr>
     </a:lvl3pPr>
-    <a:lvl4pPr marL="1371600" algn="l" defTabSz="457200" rtl="0" eaLnBrk="1" latinLnBrk="0" hangingPunct="1">
+    <a:lvl4pPr marL="1371600" algn="l" defTabSz="914400" rtl="0" eaLnBrk="1" latinLnBrk="0" hangingPunct="1">
       <a:defRPr sz="1200" kern="1200">
         <a:solidFill>
           <a:schemeClr val="tx1"/>
@@ -413,7 +207,7 @@
         <a:cs typeface="+mn-cs"/>
       </a:defRPr>
     </a:lvl4pPr>
-    <a:lvl5pPr marL="1828800" algn="l" defTabSz="457200" rtl="0" eaLnBrk="1" latinLnBrk="0" hangingPunct="1">
+    <a:lvl5pPr marL="1828800" algn="l" defTabSz="914400" rtl="0" eaLnBrk="1" latinLnBrk="0" hangingPunct="1">
       <a:defRPr sz="1200" kern="1200">
         <a:solidFill>
           <a:schemeClr val="tx1"/>
@@ -423,7 +217,7 @@
         <a:cs typeface="+mn-cs"/>
       </a:defRPr>
     </a:lvl5pPr>
-    <a:lvl6pPr marL="2286000" algn="l" defTabSz="457200" rtl="0" eaLnBrk="1" latinLnBrk="0" hangingPunct="1">
+    <a:lvl6pPr marL="2286000" algn="l" defTabSz="914400" rtl="0" eaLnBrk="1" latinLnBrk="0" hangingPunct="1">
       <a:defRPr sz="1200" kern="1200">
         <a:solidFill>
           <a:schemeClr val="tx1"/>
@@ -433,7 +227,7 @@
         <a:cs typeface="+mn-cs"/>
       </a:defRPr>
     </a:lvl6pPr>
-    <a:lvl7pPr marL="2743200" algn="l" defTabSz="457200" rtl="0" eaLnBrk="1" latinLnBrk="0" hangingPunct="1">
+    <a:lvl7pPr marL="2743200" algn="l" defTabSz="914400" rtl="0" eaLnBrk="1" latinLnBrk="0" hangingPunct="1">
       <a:defRPr sz="1200" kern="1200">
         <a:solidFill>
           <a:schemeClr val="tx1"/>
@@ -443,7 +237,7 @@
         <a:cs typeface="+mn-cs"/>
       </a:defRPr>
     </a:lvl7pPr>
-    <a:lvl8pPr marL="3200400" algn="l" defTabSz="457200" rtl="0" eaLnBrk="1" latinLnBrk="0" hangingPunct="1">
+    <a:lvl8pPr marL="3200400" algn="l" defTabSz="914400" rtl="0" eaLnBrk="1" latinLnBrk="0" hangingPunct="1">
       <a:defRPr sz="1200" kern="1200">
         <a:solidFill>
           <a:schemeClr val="tx1"/>
@@ -453,7 +247,7 @@
         <a:cs typeface="+mn-cs"/>
       </a:defRPr>
     </a:lvl8pPr>
-    <a:lvl9pPr marL="3657600" algn="l" defTabSz="457200" rtl="0" eaLnBrk="1" latinLnBrk="0" hangingPunct="1">
+    <a:lvl9pPr marL="3657600" algn="l" defTabSz="914400" rtl="0" eaLnBrk="1" latinLnBrk="0" hangingPunct="1">
       <a:defRPr sz="1200" kern="1200">
         <a:solidFill>
           <a:schemeClr val="tx1"/>
@@ -468,7 +262,7 @@
 </file>
 
 <file path=ppt/notesSlides/notesSlide1.xml><?xml version="1.0" encoding="utf-8"?>
-<p:notes xmlns:a="http://schemas.openxmlformats.org/drawingml/2006/main" xmlns:p="http://schemas.openxmlformats.org/presentationml/2006/main" xmlns:r="http://schemas.openxmlformats.org/officeDocument/2006/relationships">
+<p:notes xmlns:a="http://schemas.openxmlformats.org/drawingml/2006/main" xmlns:r="http://schemas.openxmlformats.org/officeDocument/2006/relationships" xmlns:p="http://schemas.openxmlformats.org/presentationml/2006/main">
   <p:cSld>
     <p:spTree>
       <p:nvGrpSpPr>
@@ -488,7 +282,7 @@
         <p:nvSpPr>
           <p:cNvPr id="2" name="Slide Image Placeholder 1"/>
           <p:cNvSpPr>
-            <a:spLocks noGrp="1"/>
+            <a:spLocks noGrp="1" noRot="1" noChangeAspect="1"/>
           </p:cNvSpPr>
           <p:nvPr>
             <p:ph type="sldImg" idx="2"/>
@@ -503,7 +297,7 @@
             <a:spLocks noGrp="1"/>
           </p:cNvSpPr>
           <p:nvPr>
-            <p:ph type="body" idx="3" sz="quarter"/>
+            <p:ph type="body" sz="quarter" idx="3"/>
           </p:nvPr>
         </p:nvSpPr>
         <p:spPr/>
@@ -515,25 +309,33 @@
               <a:t>SPEAKER: Preston · 0:15</a:t>
             </a:r>
           </a:p>
-          <a:p/>
+          <a:p>
+            <a:endParaRPr/>
+          </a:p>
           <a:p>
             <a:r>
               <a:t>[AUNT HOOK — told to the room before clicking forward]</a:t>
             </a:r>
           </a:p>
-          <a:p/>
+          <a:p>
+            <a:endParaRPr/>
+          </a:p>
           <a:p>
             <a:r>
               <a:t>"My aunt kept a Duolingo streak for three years. Italian, every day. Last summer she finally went to Italy. She stood in front of her own family. And she couldn't speak to them. Three years of correct answers. No conversation. That gap, right there, is our project."</a:t>
             </a:r>
           </a:p>
-          <a:p/>
+          <a:p>
+            <a:endParaRPr/>
+          </a:p>
           <a:p>
             <a:r>
               <a:t>[Click to slide 2]</a:t>
             </a:r>
           </a:p>
-          <a:p/>
+          <a:p>
+            <a:endParaRPr/>
+          </a:p>
         </p:txBody>
       </p:sp>
       <p:sp>
@@ -543,7 +345,7 @@
             <a:spLocks noGrp="1"/>
           </p:cNvSpPr>
           <p:nvPr>
-            <p:ph type="sldNum" idx="5" sz="quarter"/>
+            <p:ph type="sldNum" sz="quarter" idx="5"/>
           </p:nvPr>
         </p:nvSpPr>
         <p:spPr/>
@@ -557,7 +359,7 @@
 </file>
 
 <file path=ppt/notesSlides/notesSlide10.xml><?xml version="1.0" encoding="utf-8"?>
-<p:notes xmlns:a="http://schemas.openxmlformats.org/drawingml/2006/main" xmlns:p="http://schemas.openxmlformats.org/presentationml/2006/main" xmlns:r="http://schemas.openxmlformats.org/officeDocument/2006/relationships">
+<p:notes xmlns:a="http://schemas.openxmlformats.org/drawingml/2006/main" xmlns:r="http://schemas.openxmlformats.org/officeDocument/2006/relationships" xmlns:p="http://schemas.openxmlformats.org/presentationml/2006/main">
   <p:cSld>
     <p:spTree>
       <p:nvGrpSpPr>
@@ -577,7 +379,7 @@
         <p:nvSpPr>
           <p:cNvPr id="2" name="Slide Image Placeholder 1"/>
           <p:cNvSpPr>
-            <a:spLocks noGrp="1"/>
+            <a:spLocks noGrp="1" noRot="1" noChangeAspect="1"/>
           </p:cNvSpPr>
           <p:nvPr>
             <p:ph type="sldImg" idx="2"/>
@@ -592,7 +394,7 @@
             <a:spLocks noGrp="1"/>
           </p:cNvSpPr>
           <p:nvPr>
-            <p:ph type="body" idx="3" sz="quarter"/>
+            <p:ph type="body" sz="quarter" idx="3"/>
           </p:nvPr>
         </p:nvSpPr>
         <p:spPr/>
@@ -604,31 +406,41 @@
               <a:t>SPEAKER: Aneesh · 0:55</a:t>
             </a:r>
           </a:p>
-          <a:p/>
+          <a:p>
+            <a:endParaRPr/>
+          </a:p>
           <a:p>
             <a:r>
               <a:t>"Here's the system map. Before, Duolingo's loop runs learner to item to XP, and the loop closes on the wrong variable. After, the agent sits in the middle, dialogue scaffolds context, and feedback is about production — speaking — not recognition.</a:t>
             </a:r>
           </a:p>
-          <a:p/>
+          <a:p>
+            <a:endParaRPr/>
+          </a:p>
           <a:p>
             <a:r>
               <a:t>Three honest gaps. No primary data. No A/B comparing dialect-specific to generic agents. And Wang 2024 — the closest adult-learner GenAI chatbot study — moved willingness to communicate over twelve weeks, but it did not move measured speaking performance.</a:t>
             </a:r>
           </a:p>
-          <a:p/>
+          <a:p>
+            <a:endParaRPr/>
+          </a:p>
           <a:p>
             <a:r>
               <a:t>A proof-of-concept is proof of plausibility, not proof of effect. Our next step is an eye-tracking study at UT's IX Lab to turn the Level 1 attention claim from conceptual to measurable."</a:t>
             </a:r>
           </a:p>
-          <a:p/>
+          <a:p>
+            <a:endParaRPr/>
+          </a:p>
           <a:p>
             <a:r>
               <a:t>[~55 seconds. Hand back to Preston for close.]</a:t>
             </a:r>
           </a:p>
-          <a:p/>
+          <a:p>
+            <a:endParaRPr/>
+          </a:p>
         </p:txBody>
       </p:sp>
       <p:sp>
@@ -638,7 +450,7 @@
             <a:spLocks noGrp="1"/>
           </p:cNvSpPr>
           <p:nvPr>
-            <p:ph type="sldNum" idx="5" sz="quarter"/>
+            <p:ph type="sldNum" sz="quarter" idx="5"/>
           </p:nvPr>
         </p:nvSpPr>
         <p:spPr/>
@@ -652,7 +464,7 @@
 </file>
 
 <file path=ppt/notesSlides/notesSlide11.xml><?xml version="1.0" encoding="utf-8"?>
-<p:notes xmlns:a="http://schemas.openxmlformats.org/drawingml/2006/main" xmlns:p="http://schemas.openxmlformats.org/presentationml/2006/main" xmlns:r="http://schemas.openxmlformats.org/officeDocument/2006/relationships">
+<p:notes xmlns:a="http://schemas.openxmlformats.org/drawingml/2006/main" xmlns:r="http://schemas.openxmlformats.org/officeDocument/2006/relationships" xmlns:p="http://schemas.openxmlformats.org/presentationml/2006/main">
   <p:cSld>
     <p:spTree>
       <p:nvGrpSpPr>
@@ -672,7 +484,7 @@
         <p:nvSpPr>
           <p:cNvPr id="2" name="Slide Image Placeholder 1"/>
           <p:cNvSpPr>
-            <a:spLocks noGrp="1"/>
+            <a:spLocks noGrp="1" noRot="1" noChangeAspect="1"/>
           </p:cNvSpPr>
           <p:nvPr>
             <p:ph type="sldImg" idx="2"/>
@@ -687,7 +499,7 @@
             <a:spLocks noGrp="1"/>
           </p:cNvSpPr>
           <p:nvPr>
-            <p:ph type="body" idx="3" sz="quarter"/>
+            <p:ph type="body" sz="quarter" idx="3"/>
           </p:nvPr>
         </p:nvSpPr>
         <p:spPr/>
@@ -699,31 +511,41 @@
               <a:t>SPEAKER: Preston · 0:25</a:t>
             </a:r>
           </a:p>
-          <a:p/>
+          <a:p>
+            <a:endParaRPr/>
+          </a:p>
           <a:p>
             <a:r>
               <a:t>"The course taught us one tenet above all: error is a system property, not a human shortcoming.</a:t>
             </a:r>
           </a:p>
-          <a:p/>
+          <a:p>
+            <a:endParaRPr/>
+          </a:p>
           <a:p>
             <a:r>
               <a:t>Duolingo's learners aren't failing. The system is measuring the wrong thing, so it's teaching the wrong thing.</a:t>
             </a:r>
           </a:p>
-          <a:p/>
+          <a:p>
+            <a:endParaRPr/>
+          </a:p>
           <a:p>
             <a:r>
               <a:t>We built a piece that measures what matters. Thank you."</a:t>
             </a:r>
           </a:p>
-          <a:p/>
+          <a:p>
+            <a:endParaRPr/>
+          </a:p>
           <a:p>
             <a:r>
               <a:t>[~25 seconds. End at 8:00.]</a:t>
             </a:r>
           </a:p>
-          <a:p/>
+          <a:p>
+            <a:endParaRPr/>
+          </a:p>
         </p:txBody>
       </p:sp>
       <p:sp>
@@ -733,7 +555,7 @@
             <a:spLocks noGrp="1"/>
           </p:cNvSpPr>
           <p:nvPr>
-            <p:ph type="sldNum" idx="5" sz="quarter"/>
+            <p:ph type="sldNum" sz="quarter" idx="5"/>
           </p:nvPr>
         </p:nvSpPr>
         <p:spPr/>
@@ -747,7 +569,7 @@
 </file>
 
 <file path=ppt/notesSlides/notesSlide2.xml><?xml version="1.0" encoding="utf-8"?>
-<p:notes xmlns:a="http://schemas.openxmlformats.org/drawingml/2006/main" xmlns:p="http://schemas.openxmlformats.org/presentationml/2006/main" xmlns:r="http://schemas.openxmlformats.org/officeDocument/2006/relationships">
+<p:notes xmlns:a="http://schemas.openxmlformats.org/drawingml/2006/main" xmlns:r="http://schemas.openxmlformats.org/officeDocument/2006/relationships" xmlns:p="http://schemas.openxmlformats.org/presentationml/2006/main">
   <p:cSld>
     <p:spTree>
       <p:nvGrpSpPr>
@@ -767,7 +589,7 @@
         <p:nvSpPr>
           <p:cNvPr id="2" name="Slide Image Placeholder 1"/>
           <p:cNvSpPr>
-            <a:spLocks noGrp="1"/>
+            <a:spLocks noGrp="1" noRot="1" noChangeAspect="1"/>
           </p:cNvSpPr>
           <p:nvPr>
             <p:ph type="sldImg" idx="2"/>
@@ -782,7 +604,7 @@
             <a:spLocks noGrp="1"/>
           </p:cNvSpPr>
           <p:nvPr>
-            <p:ph type="body" idx="3" sz="quarter"/>
+            <p:ph type="body" sz="quarter" idx="3"/>
           </p:nvPr>
         </p:nvSpPr>
         <p:spPr/>
@@ -794,37 +616,49 @@
               <a:t>SPEAKER: Preston · 0:50</a:t>
             </a:r>
           </a:p>
-          <a:p/>
+          <a:p>
+            <a:endParaRPr/>
+          </a:p>
           <a:p>
             <a:r>
               <a:t>"Duolingo is a human-machine system with over 500 million monthly active users. From Week 1 of class, every system sits under three kinds of stressors.</a:t>
             </a:r>
           </a:p>
-          <a:p/>
+          <a:p>
+            <a:endParaRPr/>
+          </a:p>
           <a:p>
             <a:r>
               <a:t>Internal: cognitive load, and the illusion that seeing a word again means you know it.</a:t>
             </a:r>
           </a:p>
-          <a:p/>
+          <a:p>
+            <a:endParaRPr/>
+          </a:p>
           <a:p>
             <a:r>
               <a:t>External: streaks, XP, the stuff the app makes you feel bad about when you miss a day.</a:t>
             </a:r>
           </a:p>
-          <a:p/>
+          <a:p>
+            <a:endParaRPr/>
+          </a:p>
           <a:p>
             <a:r>
               <a:t>Organizational: Duolingo's business rewards daily active users. Christensen's Innovator's Dilemma — they can't rebuild around real conversation without breaking the metric paying the bills."</a:t>
             </a:r>
           </a:p>
-          <a:p/>
+          <a:p>
+            <a:endParaRPr/>
+          </a:p>
           <a:p>
             <a:r>
               <a:t>[~50 seconds. Hand off to Aneesh.]</a:t>
             </a:r>
           </a:p>
-          <a:p/>
+          <a:p>
+            <a:endParaRPr/>
+          </a:p>
         </p:txBody>
       </p:sp>
       <p:sp>
@@ -834,7 +668,7 @@
             <a:spLocks noGrp="1"/>
           </p:cNvSpPr>
           <p:nvPr>
-            <p:ph type="sldNum" idx="5" sz="quarter"/>
+            <p:ph type="sldNum" sz="quarter" idx="5"/>
           </p:nvPr>
         </p:nvSpPr>
         <p:spPr/>
@@ -848,7 +682,7 @@
 </file>
 
 <file path=ppt/notesSlides/notesSlide3.xml><?xml version="1.0" encoding="utf-8"?>
-<p:notes xmlns:a="http://schemas.openxmlformats.org/drawingml/2006/main" xmlns:p="http://schemas.openxmlformats.org/presentationml/2006/main" xmlns:r="http://schemas.openxmlformats.org/officeDocument/2006/relationships">
+<p:notes xmlns:a="http://schemas.openxmlformats.org/drawingml/2006/main" xmlns:r="http://schemas.openxmlformats.org/officeDocument/2006/relationships" xmlns:p="http://schemas.openxmlformats.org/presentationml/2006/main">
   <p:cSld>
     <p:spTree>
       <p:nvGrpSpPr>
@@ -868,7 +702,7 @@
         <p:nvSpPr>
           <p:cNvPr id="2" name="Slide Image Placeholder 1"/>
           <p:cNvSpPr>
-            <a:spLocks noGrp="1"/>
+            <a:spLocks noGrp="1" noRot="1" noChangeAspect="1"/>
           </p:cNvSpPr>
           <p:nvPr>
             <p:ph type="sldImg" idx="2"/>
@@ -883,7 +717,7 @@
             <a:spLocks noGrp="1"/>
           </p:cNvSpPr>
           <p:nvPr>
-            <p:ph type="body" idx="3" sz="quarter"/>
+            <p:ph type="body" sz="quarter" idx="3"/>
           </p:nvPr>
         </p:nvSpPr>
         <p:spPr/>
@@ -895,31 +729,41 @@
               <a:t>SPEAKER: Aneesh · 0:50</a:t>
             </a:r>
           </a:p>
-          <a:p/>
+          <a:p>
+            <a:endParaRPr/>
+          </a:p>
           <a:p>
             <a:r>
               <a:t>"Jiang, Rollinson, and Plonsky put Duolingo learners through the ACTFL proficiency scale. Reading topped out at Intermediate Low. Listening at Novice High. Speaking — speaking was never tested.</a:t>
             </a:r>
           </a:p>
-          <a:p/>
+          <a:p>
+            <a:endParaRPr/>
+          </a:p>
           <a:p>
             <a:r>
               <a:t>In the peer-reviewed outcome research we surveyed, the paper itself says: 'no other skills were assessed.'</a:t>
             </a:r>
           </a:p>
-          <a:p/>
+          <a:p>
+            <a:endParaRPr/>
+          </a:p>
           <a:p>
             <a:r>
               <a:t>So the ceiling is real, it's measurable, and the productive skills, the ones that let you actually have a conversation, are invisible to the system that claims to be teaching you."</a:t>
             </a:r>
           </a:p>
-          <a:p/>
+          <a:p>
+            <a:endParaRPr/>
+          </a:p>
           <a:p>
             <a:r>
               <a:t>[~50 seconds.]</a:t>
             </a:r>
           </a:p>
-          <a:p/>
+          <a:p>
+            <a:endParaRPr/>
+          </a:p>
         </p:txBody>
       </p:sp>
       <p:sp>
@@ -929,7 +773,7 @@
             <a:spLocks noGrp="1"/>
           </p:cNvSpPr>
           <p:nvPr>
-            <p:ph type="sldNum" idx="5" sz="quarter"/>
+            <p:ph type="sldNum" sz="quarter" idx="5"/>
           </p:nvPr>
         </p:nvSpPr>
         <p:spPr/>
@@ -943,7 +787,7 @@
 </file>
 
 <file path=ppt/notesSlides/notesSlide4.xml><?xml version="1.0" encoding="utf-8"?>
-<p:notes xmlns:a="http://schemas.openxmlformats.org/drawingml/2006/main" xmlns:p="http://schemas.openxmlformats.org/presentationml/2006/main" xmlns:r="http://schemas.openxmlformats.org/officeDocument/2006/relationships">
+<p:notes xmlns:a="http://schemas.openxmlformats.org/drawingml/2006/main" xmlns:r="http://schemas.openxmlformats.org/officeDocument/2006/relationships" xmlns:p="http://schemas.openxmlformats.org/presentationml/2006/main">
   <p:cSld>
     <p:spTree>
       <p:nvGrpSpPr>
@@ -963,7 +807,7 @@
         <p:nvSpPr>
           <p:cNvPr id="2" name="Slide Image Placeholder 1"/>
           <p:cNvSpPr>
-            <a:spLocks noGrp="1"/>
+            <a:spLocks noGrp="1" noRot="1" noChangeAspect="1"/>
           </p:cNvSpPr>
           <p:nvPr>
             <p:ph type="sldImg" idx="2"/>
@@ -978,7 +822,7 @@
             <a:spLocks noGrp="1"/>
           </p:cNvSpPr>
           <p:nvPr>
-            <p:ph type="body" idx="3" sz="quarter"/>
+            <p:ph type="body" sz="quarter" idx="3"/>
           </p:nvPr>
         </p:nvSpPr>
         <p:spPr/>
@@ -990,49 +834,65 @@
               <a:t>SPEAKER: Aneesh · 0:45</a:t>
             </a:r>
           </a:p>
-          <a:p/>
+          <a:p>
+            <a:endParaRPr/>
+          </a:p>
           <a:p>
             <a:r>
               <a:t>"We ran the four HF demand lenses from class.</a:t>
             </a:r>
           </a:p>
-          <a:p/>
+          <a:p>
+            <a:endParaRPr/>
+          </a:p>
           <a:p>
             <a:r>
               <a:t>Attention: the learner's gaze and mental budget go to XP bars and streaks, not to language.</a:t>
             </a:r>
           </a:p>
-          <a:p/>
+          <a:p>
+            <a:endParaRPr/>
+          </a:p>
           <a:p>
             <a:r>
               <a:t>Memory: Duolingo exercises Baddeley's Phonological Loop — verbal rehearsal — but never the Episodic Buffer, the part of working memory that binds words to context.</a:t>
             </a:r>
           </a:p>
-          <a:p/>
+          <a:p>
+            <a:endParaRPr/>
+          </a:p>
           <a:p>
             <a:r>
               <a:t>Workload: over-loaded on gamification. Under-loaded on speech production.</a:t>
             </a:r>
           </a:p>
-          <a:p/>
+          <a:p>
+            <a:endParaRPr/>
+          </a:p>
           <a:p>
             <a:r>
               <a:t>Cognition: the real-world knowledge you need for actual conversation is never built.</a:t>
             </a:r>
           </a:p>
-          <a:p/>
+          <a:p>
+            <a:endParaRPr/>
+          </a:p>
           <a:p>
             <a:r>
               <a:t>The recognition task succeeds. The production task fails."</a:t>
             </a:r>
           </a:p>
-          <a:p/>
+          <a:p>
+            <a:endParaRPr/>
+          </a:p>
           <a:p>
             <a:r>
               <a:t>[~45 seconds.]</a:t>
             </a:r>
           </a:p>
-          <a:p/>
+          <a:p>
+            <a:endParaRPr/>
+          </a:p>
         </p:txBody>
       </p:sp>
       <p:sp>
@@ -1042,7 +902,7 @@
             <a:spLocks noGrp="1"/>
           </p:cNvSpPr>
           <p:nvPr>
-            <p:ph type="sldNum" idx="5" sz="quarter"/>
+            <p:ph type="sldNum" sz="quarter" idx="5"/>
           </p:nvPr>
         </p:nvSpPr>
         <p:spPr/>
@@ -1056,7 +916,7 @@
 </file>
 
 <file path=ppt/notesSlides/notesSlide5.xml><?xml version="1.0" encoding="utf-8"?>
-<p:notes xmlns:a="http://schemas.openxmlformats.org/drawingml/2006/main" xmlns:p="http://schemas.openxmlformats.org/presentationml/2006/main" xmlns:r="http://schemas.openxmlformats.org/officeDocument/2006/relationships">
+<p:notes xmlns:a="http://schemas.openxmlformats.org/drawingml/2006/main" xmlns:r="http://schemas.openxmlformats.org/officeDocument/2006/relationships" xmlns:p="http://schemas.openxmlformats.org/presentationml/2006/main">
   <p:cSld>
     <p:spTree>
       <p:nvGrpSpPr>
@@ -1076,7 +936,7 @@
         <p:nvSpPr>
           <p:cNvPr id="2" name="Slide Image Placeholder 1"/>
           <p:cNvSpPr>
-            <a:spLocks noGrp="1"/>
+            <a:spLocks noGrp="1" noRot="1" noChangeAspect="1"/>
           </p:cNvSpPr>
           <p:nvPr>
             <p:ph type="sldImg" idx="2"/>
@@ -1091,7 +951,7 @@
             <a:spLocks noGrp="1"/>
           </p:cNvSpPr>
           <p:nvPr>
-            <p:ph type="body" idx="3" sz="quarter"/>
+            <p:ph type="body" sz="quarter" idx="3"/>
           </p:nvPr>
         </p:nvSpPr>
         <p:spPr/>
@@ -1103,31 +963,41 @@
               <a:t>SPEAKER: Preston · 0:40</a:t>
             </a:r>
           </a:p>
-          <a:p/>
+          <a:p>
+            <a:endParaRPr/>
+          </a:p>
           <a:p>
             <a:r>
               <a:t>"Two-week timeline, so we are upfront: the biggest threat to validity is no primary data.</a:t>
             </a:r>
           </a:p>
-          <a:p/>
+          <a:p>
+            <a:endParaRPr/>
+          </a:p>
           <a:p>
             <a:r>
               <a:t>Our approach is research-and-build. Fifteen peer-reviewed sources. Two meta-analyses carrying the effect-size claims: Bibauw at d = 0.58 for dialogue-based learning, Mayer at d = 1.3 for personalized agents.</a:t>
             </a:r>
           </a:p>
-          <a:p/>
+          <a:p>
+            <a:endParaRPr/>
+          </a:p>
           <a:p>
             <a:r>
               <a:t>For causal evidence, we propose a 24-week randomized controlled trial that extends Wang's 2024 design, with dialect-matched conditions and speaking performance as the dependent measure."</a:t>
             </a:r>
           </a:p>
-          <a:p/>
+          <a:p>
+            <a:endParaRPr/>
+          </a:p>
           <a:p>
             <a:r>
               <a:t>[~40 seconds. Hand off to Aneesh.]</a:t>
             </a:r>
           </a:p>
-          <a:p/>
+          <a:p>
+            <a:endParaRPr/>
+          </a:p>
         </p:txBody>
       </p:sp>
       <p:sp>
@@ -1137,7 +1007,7 @@
             <a:spLocks noGrp="1"/>
           </p:cNvSpPr>
           <p:nvPr>
-            <p:ph type="sldNum" idx="5" sz="quarter"/>
+            <p:ph type="sldNum" sz="quarter" idx="5"/>
           </p:nvPr>
         </p:nvSpPr>
         <p:spPr/>
@@ -1151,7 +1021,7 @@
 </file>
 
 <file path=ppt/notesSlides/notesSlide6.xml><?xml version="1.0" encoding="utf-8"?>
-<p:notes xmlns:a="http://schemas.openxmlformats.org/drawingml/2006/main" xmlns:p="http://schemas.openxmlformats.org/presentationml/2006/main" xmlns:r="http://schemas.openxmlformats.org/officeDocument/2006/relationships">
+<p:notes xmlns:a="http://schemas.openxmlformats.org/drawingml/2006/main" xmlns:r="http://schemas.openxmlformats.org/officeDocument/2006/relationships" xmlns:p="http://schemas.openxmlformats.org/presentationml/2006/main">
   <p:cSld>
     <p:spTree>
       <p:nvGrpSpPr>
@@ -1171,7 +1041,7 @@
         <p:nvSpPr>
           <p:cNvPr id="2" name="Slide Image Placeholder 1"/>
           <p:cNvSpPr>
-            <a:spLocks noGrp="1"/>
+            <a:spLocks noGrp="1" noRot="1" noChangeAspect="1"/>
           </p:cNvSpPr>
           <p:nvPr>
             <p:ph type="sldImg" idx="2"/>
@@ -1186,7 +1056,7 @@
             <a:spLocks noGrp="1"/>
           </p:cNvSpPr>
           <p:nvPr>
-            <p:ph type="body" idx="3" sz="quarter"/>
+            <p:ph type="body" sz="quarter" idx="3"/>
           </p:nvPr>
         </p:nvSpPr>
         <p:spPr/>
@@ -1198,31 +1068,41 @@
               <a:t>SPEAKER: Aneesh · 0:35</a:t>
             </a:r>
           </a:p>
-          <a:p/>
+          <a:p>
+            <a:endParaRPr/>
+          </a:p>
           <a:p>
             <a:r>
               <a:t>"For the Human Factors analysis itself we used HFACS — the Human Factors Analysis and Classification System, built on Reason's Swiss Cheese model.</a:t>
             </a:r>
           </a:p>
-          <a:p/>
+          <a:p>
+            <a:endParaRPr/>
+          </a:p>
           <a:p>
             <a:r>
               <a:t>Four layers of defense. Level 4: Organizational Influences. Level 3: Unsafe Supervision. Level 2: Preconditions. Level 1: Unsafe Acts at the operator.</a:t>
             </a:r>
           </a:p>
-          <a:p/>
+          <a:p>
+            <a:endParaRPr/>
+          </a:p>
           <a:p>
             <a:r>
               <a:t>The course's core tenet: work backward through all four. When the holes line up, an incident gets through. Don't blame the person — look for where the system failed."</a:t>
             </a:r>
           </a:p>
-          <a:p/>
+          <a:p>
+            <a:endParaRPr/>
+          </a:p>
           <a:p>
             <a:r>
               <a:t>[~35 seconds. Set up the star slide.]</a:t>
             </a:r>
           </a:p>
-          <a:p/>
+          <a:p>
+            <a:endParaRPr/>
+          </a:p>
         </p:txBody>
       </p:sp>
       <p:sp>
@@ -1232,7 +1112,7 @@
             <a:spLocks noGrp="1"/>
           </p:cNvSpPr>
           <p:nvPr>
-            <p:ph type="sldNum" idx="5" sz="quarter"/>
+            <p:ph type="sldNum" sz="quarter" idx="5"/>
           </p:nvPr>
         </p:nvSpPr>
         <p:spPr/>
@@ -1246,7 +1126,7 @@
 </file>
 
 <file path=ppt/notesSlides/notesSlide7.xml><?xml version="1.0" encoding="utf-8"?>
-<p:notes xmlns:a="http://schemas.openxmlformats.org/drawingml/2006/main" xmlns:p="http://schemas.openxmlformats.org/presentationml/2006/main" xmlns:r="http://schemas.openxmlformats.org/officeDocument/2006/relationships">
+<p:notes xmlns:a="http://schemas.openxmlformats.org/drawingml/2006/main" xmlns:r="http://schemas.openxmlformats.org/officeDocument/2006/relationships" xmlns:p="http://schemas.openxmlformats.org/presentationml/2006/main">
   <p:cSld>
     <p:spTree>
       <p:nvGrpSpPr>
@@ -1266,7 +1146,7 @@
         <p:nvSpPr>
           <p:cNvPr id="2" name="Slide Image Placeholder 1"/>
           <p:cNvSpPr>
-            <a:spLocks noGrp="1"/>
+            <a:spLocks noGrp="1" noRot="1" noChangeAspect="1"/>
           </p:cNvSpPr>
           <p:nvPr>
             <p:ph type="sldImg" idx="2"/>
@@ -1281,7 +1161,7 @@
             <a:spLocks noGrp="1"/>
           </p:cNvSpPr>
           <p:nvPr>
-            <p:ph type="body" idx="3" sz="quarter"/>
+            <p:ph type="body" sz="quarter" idx="3"/>
           </p:nvPr>
         </p:nvSpPr>
         <p:spPr/>
@@ -1293,49 +1173,65 @@
               <a:t>SPEAKER: Aneesh · 1:10  ★ STAR SLIDE — earns the Systems Thinking points</a:t>
             </a:r>
           </a:p>
-          <a:p/>
+          <a:p>
+            <a:endParaRPr/>
+          </a:p>
           <a:p>
             <a:r>
               <a:t>"Walk it with me, top to bottom.</a:t>
             </a:r>
           </a:p>
-          <a:p/>
+          <a:p>
+            <a:endParaRPr/>
+          </a:p>
           <a:p>
             <a:r>
               <a:t>Level 1: the learner acts on the only signal available, which is XP. In Signal Detection terms, every streak is a False Alarm on the variable that matters.</a:t>
             </a:r>
           </a:p>
-          <a:p/>
+          <a:p>
+            <a:endParaRPr/>
+          </a:p>
           <a:p>
             <a:r>
               <a:t>Level 2: without a supervisor asking for speech, the environment never engages the Episodic Buffer, and words never bind to context. Essoe's working-memory study showed this cleanly: distinct contexts produced 92% retention versus 76% in uniform contexts.</a:t>
             </a:r>
           </a:p>
-          <a:p/>
+          <a:p>
+            <a:endParaRPr/>
+          </a:p>
           <a:p>
             <a:r>
               <a:t>Level 3: Birdbrain, Duolingo's own algorithm, optimizes item-correctness. By TADMUS principles, the supervisor's sensitivity, d-prime, on conversational failure is effectively zero.</a:t>
             </a:r>
           </a:p>
-          <a:p/>
+          <a:p>
+            <a:endParaRPr/>
+          </a:p>
           <a:p>
             <a:r>
               <a:t>Level 4: the organization measures Daily Active Users, which explicitly excludes speaking.</a:t>
             </a:r>
           </a:p>
-          <a:p/>
+          <a:p>
+            <a:endParaRPr/>
+          </a:p>
           <a:p>
             <a:r>
               <a:t>The holes line up. This isn't a user mistake. The incident is structurally predicted."</a:t>
             </a:r>
           </a:p>
-          <a:p/>
+          <a:p>
+            <a:endParaRPr/>
+          </a:p>
           <a:p>
             <a:r>
               <a:t>[~70 seconds. This is the rigor + systems-thinking slide.]</a:t>
             </a:r>
           </a:p>
-          <a:p/>
+          <a:p>
+            <a:endParaRPr/>
+          </a:p>
         </p:txBody>
       </p:sp>
       <p:sp>
@@ -1345,7 +1241,7 @@
             <a:spLocks noGrp="1"/>
           </p:cNvSpPr>
           <p:nvPr>
-            <p:ph type="sldNum" idx="5" sz="quarter"/>
+            <p:ph type="sldNum" sz="quarter" idx="5"/>
           </p:nvPr>
         </p:nvSpPr>
         <p:spPr/>
@@ -1359,7 +1255,7 @@
 </file>
 
 <file path=ppt/notesSlides/notesSlide8.xml><?xml version="1.0" encoding="utf-8"?>
-<p:notes xmlns:a="http://schemas.openxmlformats.org/drawingml/2006/main" xmlns:p="http://schemas.openxmlformats.org/presentationml/2006/main" xmlns:r="http://schemas.openxmlformats.org/officeDocument/2006/relationships">
+<p:notes xmlns:a="http://schemas.openxmlformats.org/drawingml/2006/main" xmlns:r="http://schemas.openxmlformats.org/officeDocument/2006/relationships" xmlns:p="http://schemas.openxmlformats.org/presentationml/2006/main">
   <p:cSld>
     <p:spTree>
       <p:nvGrpSpPr>
@@ -1379,7 +1275,7 @@
         <p:nvSpPr>
           <p:cNvPr id="2" name="Slide Image Placeholder 1"/>
           <p:cNvSpPr>
-            <a:spLocks noGrp="1"/>
+            <a:spLocks noGrp="1" noRot="1" noChangeAspect="1"/>
           </p:cNvSpPr>
           <p:nvPr>
             <p:ph type="sldImg" idx="2"/>
@@ -1394,7 +1290,7 @@
             <a:spLocks noGrp="1"/>
           </p:cNvSpPr>
           <p:nvPr>
-            <p:ph type="body" idx="3" sz="quarter"/>
+            <p:ph type="body" sz="quarter" idx="3"/>
           </p:nvPr>
         </p:nvSpPr>
         <p:spPr/>
@@ -1406,43 +1302,57 @@
               <a:t>SPEAKER: Preston · 0:40</a:t>
             </a:r>
           </a:p>
-          <a:p/>
+          <a:p>
+            <a:endParaRPr/>
+          </a:p>
           <a:p>
             <a:r>
               <a:t>"The course says: name the enemy. Rosling, Tufte, Musk. So here they are, named.</a:t>
             </a:r>
           </a:p>
-          <a:p/>
+          <a:p>
+            <a:endParaRPr/>
+          </a:p>
           <a:p>
             <a:r>
               <a:t>One: the Isolated Drill. Vocabulary taught as isolated items, not embedded in any real situation.</a:t>
             </a:r>
           </a:p>
-          <a:p/>
+          <a:p>
+            <a:endParaRPr/>
+          </a:p>
           <a:p>
             <a:r>
               <a:t>Two: the Wrong Signal. Confident feedback about XP and streaks. The wrong variable, amplified.</a:t>
             </a:r>
           </a:p>
-          <a:p/>
+          <a:p>
+            <a:endParaRPr/>
+          </a:p>
           <a:p>
             <a:r>
               <a:t>Three: the Receptive-Only Evidence Base. Duolingo's own research measures reading and listening. Speaking is unsupervised by design.</a:t>
             </a:r>
           </a:p>
-          <a:p/>
+          <a:p>
+            <a:endParaRPr/>
+          </a:p>
           <a:p>
             <a:r>
               <a:t>Four: the Aligned Holes. Fix any single layer in isolation and the cheese still lines up. Our redesign has to span levels."</a:t>
             </a:r>
           </a:p>
-          <a:p/>
+          <a:p>
+            <a:endParaRPr/>
+          </a:p>
           <a:p>
             <a:r>
               <a:t>[~40 seconds. Hand back to Preston for redesign.]</a:t>
             </a:r>
           </a:p>
-          <a:p/>
+          <a:p>
+            <a:endParaRPr/>
+          </a:p>
         </p:txBody>
       </p:sp>
       <p:sp>
@@ -1452,7 +1362,7 @@
             <a:spLocks noGrp="1"/>
           </p:cNvSpPr>
           <p:nvPr>
-            <p:ph type="sldNum" idx="5" sz="quarter"/>
+            <p:ph type="sldNum" sz="quarter" idx="5"/>
           </p:nvPr>
         </p:nvSpPr>
         <p:spPr/>
@@ -1466,7 +1376,7 @@
 </file>
 
 <file path=ppt/notesSlides/notesSlide9.xml><?xml version="1.0" encoding="utf-8"?>
-<p:notes xmlns:a="http://schemas.openxmlformats.org/drawingml/2006/main" xmlns:p="http://schemas.openxmlformats.org/presentationml/2006/main" xmlns:r="http://schemas.openxmlformats.org/officeDocument/2006/relationships">
+<p:notes xmlns:a="http://schemas.openxmlformats.org/drawingml/2006/main" xmlns:r="http://schemas.openxmlformats.org/officeDocument/2006/relationships" xmlns:p="http://schemas.openxmlformats.org/presentationml/2006/main">
   <p:cSld>
     <p:spTree>
       <p:nvGrpSpPr>
@@ -1486,7 +1396,7 @@
         <p:nvSpPr>
           <p:cNvPr id="2" name="Slide Image Placeholder 1"/>
           <p:cNvSpPr>
-            <a:spLocks noGrp="1"/>
+            <a:spLocks noGrp="1" noRot="1" noChangeAspect="1"/>
           </p:cNvSpPr>
           <p:nvPr>
             <p:ph type="sldImg" idx="2"/>
@@ -1501,7 +1411,7 @@
             <a:spLocks noGrp="1"/>
           </p:cNvSpPr>
           <p:nvPr>
-            <p:ph type="body" idx="3" sz="quarter"/>
+            <p:ph type="body" sz="quarter" idx="3"/>
           </p:nvPr>
         </p:nvSpPr>
         <p:spPr/>
@@ -1513,43 +1423,57 @@
               <a:t>SPEAKER: Preston · 1:10  ★ DESIGN / ARCHITECTURAL INSIGHT slide</a:t>
             </a:r>
           </a:p>
-          <a:p/>
+          <a:p>
+            <a:endParaRPr/>
+          </a:p>
           <a:p>
             <a:r>
               <a:t>"Here's the proof-of-concept. A dialect-specific conversational agent — Carlos, Mexican Spanish, and Elena, Castilian — that scaffolds the interaction rather than just responding.</a:t>
             </a:r>
           </a:p>
-          <a:p/>
+          <a:p>
+            <a:endParaRPr/>
+          </a:p>
           <a:p>
             <a:r>
               <a:t>It rests on three findings.</a:t>
             </a:r>
           </a:p>
-          <a:p/>
+          <a:p>
+            <a:endParaRPr/>
+          </a:p>
           <a:p>
             <a:r>
               <a:t>One: Bibauw's 2022 meta-analysis across seventeen studies. Dialogue-based learning produces a medium effect, d equals point-five-eight, on second-language proficiency.</a:t>
             </a:r>
           </a:p>
-          <a:p/>
+          <a:p>
+            <a:endParaRPr/>
+          </a:p>
           <a:p>
             <a:r>
               <a:t>Two: Mayer's Personalization Principle. d equals one-point-three across ten of ten experiments. Embodiment and conversational style aren't UX decoration — they're the mechanism.</a:t>
             </a:r>
           </a:p>
-          <a:p/>
+          <a:p>
+            <a:endParaRPr/>
+          </a:p>
           <a:p>
             <a:r>
               <a:t>Three: Geeslin and Long. Communicative competence requires acquiring real regional speech patterns. Classrooms don't provide that. Duolingo doesn't provide that. That's our wedge."</a:t>
             </a:r>
           </a:p>
-          <a:p/>
+          <a:p>
+            <a:endParaRPr/>
+          </a:p>
           <a:p>
             <a:r>
               <a:t>[~70 seconds. Hand off to Aneesh.]</a:t>
             </a:r>
           </a:p>
-          <a:p/>
+          <a:p>
+            <a:endParaRPr/>
+          </a:p>
         </p:txBody>
       </p:sp>
       <p:sp>
@@ -1559,7 +1483,7 @@
             <a:spLocks noGrp="1"/>
           </p:cNvSpPr>
           <p:nvPr>
-            <p:ph type="sldNum" idx="5" sz="quarter"/>
+            <p:ph type="sldNum" sz="quarter" idx="5"/>
           </p:nvPr>
         </p:nvSpPr>
         <p:spPr/>
@@ -1610,10 +1534,9 @@
           <a:lstStyle/>
           <a:p>
             <a:r>
-              <a:rPr lang="en-US" smtClean="0"/>
+              <a:rPr lang="en-US"/>
               <a:t>Click to edit Master title style</a:t>
             </a:r>
-            <a:endParaRPr lang="en-US"/>
           </a:p>
         </p:txBody>
       </p:sp>
@@ -1729,10 +1652,9 @@
           </a:lstStyle>
           <a:p>
             <a:r>
-              <a:rPr lang="en-US" smtClean="0"/>
+              <a:rPr lang="en-US"/>
               <a:t>Click to edit Master subtitle style</a:t>
             </a:r>
-            <a:endParaRPr lang="en-US"/>
           </a:p>
         </p:txBody>
       </p:sp>
@@ -1753,7 +1675,7 @@
           <a:p>
             <a:fld id="{5BCAD085-E8A6-8845-BD4E-CB4CCA059FC4}" type="datetimeFigureOut">
               <a:rPr lang="en-US" smtClean="0"/>
-              <a:t>1/27/13</a:t>
+              <a:t>4/26/26</a:t>
             </a:fld>
             <a:endParaRPr lang="en-US"/>
           </a:p>
@@ -1847,10 +1769,9 @@
           <a:lstStyle/>
           <a:p>
             <a:r>
-              <a:rPr lang="en-US" smtClean="0"/>
+              <a:rPr lang="en-US"/>
               <a:t>Click to edit Master title style</a:t>
             </a:r>
-            <a:endParaRPr lang="en-US"/>
           </a:p>
         </p:txBody>
       </p:sp>
@@ -1871,38 +1792,37 @@
           <a:p>
             <a:pPr lvl="0"/>
             <a:r>
-              <a:rPr lang="en-US" smtClean="0"/>
+              <a:rPr lang="en-US"/>
               <a:t>Click to edit Master text styles</a:t>
             </a:r>
           </a:p>
           <a:p>
             <a:pPr lvl="1"/>
             <a:r>
-              <a:rPr lang="en-US" smtClean="0"/>
+              <a:rPr lang="en-US"/>
               <a:t>Second level</a:t>
             </a:r>
           </a:p>
           <a:p>
             <a:pPr lvl="2"/>
             <a:r>
-              <a:rPr lang="en-US" smtClean="0"/>
+              <a:rPr lang="en-US"/>
               <a:t>Third level</a:t>
             </a:r>
           </a:p>
           <a:p>
             <a:pPr lvl="3"/>
             <a:r>
-              <a:rPr lang="en-US" smtClean="0"/>
+              <a:rPr lang="en-US"/>
               <a:t>Fourth level</a:t>
             </a:r>
           </a:p>
           <a:p>
             <a:pPr lvl="4"/>
             <a:r>
-              <a:rPr lang="en-US" smtClean="0"/>
+              <a:rPr lang="en-US"/>
               <a:t>Fifth level</a:t>
             </a:r>
-            <a:endParaRPr lang="en-US"/>
           </a:p>
         </p:txBody>
       </p:sp>
@@ -1923,7 +1843,7 @@
           <a:p>
             <a:fld id="{5BCAD085-E8A6-8845-BD4E-CB4CCA059FC4}" type="datetimeFigureOut">
               <a:rPr lang="en-US" smtClean="0"/>
-              <a:t>1/27/13</a:t>
+              <a:t>4/26/26</a:t>
             </a:fld>
             <a:endParaRPr lang="en-US"/>
           </a:p>
@@ -2022,10 +1942,9 @@
           <a:lstStyle/>
           <a:p>
             <a:r>
-              <a:rPr lang="en-US" smtClean="0"/>
+              <a:rPr lang="en-US"/>
               <a:t>Click to edit Master title style</a:t>
             </a:r>
-            <a:endParaRPr lang="en-US"/>
           </a:p>
         </p:txBody>
       </p:sp>
@@ -2051,38 +1970,37 @@
           <a:p>
             <a:pPr lvl="0"/>
             <a:r>
-              <a:rPr lang="en-US" smtClean="0"/>
+              <a:rPr lang="en-US"/>
               <a:t>Click to edit Master text styles</a:t>
             </a:r>
           </a:p>
           <a:p>
             <a:pPr lvl="1"/>
             <a:r>
-              <a:rPr lang="en-US" smtClean="0"/>
+              <a:rPr lang="en-US"/>
               <a:t>Second level</a:t>
             </a:r>
           </a:p>
           <a:p>
             <a:pPr lvl="2"/>
             <a:r>
-              <a:rPr lang="en-US" smtClean="0"/>
+              <a:rPr lang="en-US"/>
               <a:t>Third level</a:t>
             </a:r>
           </a:p>
           <a:p>
             <a:pPr lvl="3"/>
             <a:r>
-              <a:rPr lang="en-US" smtClean="0"/>
+              <a:rPr lang="en-US"/>
               <a:t>Fourth level</a:t>
             </a:r>
           </a:p>
           <a:p>
             <a:pPr lvl="4"/>
             <a:r>
-              <a:rPr lang="en-US" smtClean="0"/>
+              <a:rPr lang="en-US"/>
               <a:t>Fifth level</a:t>
             </a:r>
-            <a:endParaRPr lang="en-US"/>
           </a:p>
         </p:txBody>
       </p:sp>
@@ -2103,7 +2021,7 @@
           <a:p>
             <a:fld id="{5BCAD085-E8A6-8845-BD4E-CB4CCA059FC4}" type="datetimeFigureOut">
               <a:rPr lang="en-US" smtClean="0"/>
-              <a:t>1/27/13</a:t>
+              <a:t>4/26/26</a:t>
             </a:fld>
             <a:endParaRPr lang="en-US"/>
           </a:p>
@@ -2197,10 +2115,9 @@
           <a:lstStyle/>
           <a:p>
             <a:r>
-              <a:rPr lang="en-US" smtClean="0"/>
+              <a:rPr lang="en-US"/>
               <a:t>Click to edit Master title style</a:t>
             </a:r>
-            <a:endParaRPr lang="en-US"/>
           </a:p>
         </p:txBody>
       </p:sp>
@@ -2221,38 +2138,37 @@
           <a:p>
             <a:pPr lvl="0"/>
             <a:r>
-              <a:rPr lang="en-US" smtClean="0"/>
+              <a:rPr lang="en-US"/>
               <a:t>Click to edit Master text styles</a:t>
             </a:r>
           </a:p>
           <a:p>
             <a:pPr lvl="1"/>
             <a:r>
-              <a:rPr lang="en-US" smtClean="0"/>
+              <a:rPr lang="en-US"/>
               <a:t>Second level</a:t>
             </a:r>
           </a:p>
           <a:p>
             <a:pPr lvl="2"/>
             <a:r>
-              <a:rPr lang="en-US" smtClean="0"/>
+              <a:rPr lang="en-US"/>
               <a:t>Third level</a:t>
             </a:r>
           </a:p>
           <a:p>
             <a:pPr lvl="3"/>
             <a:r>
-              <a:rPr lang="en-US" smtClean="0"/>
+              <a:rPr lang="en-US"/>
               <a:t>Fourth level</a:t>
             </a:r>
           </a:p>
           <a:p>
             <a:pPr lvl="4"/>
             <a:r>
-              <a:rPr lang="en-US" smtClean="0"/>
+              <a:rPr lang="en-US"/>
               <a:t>Fifth level</a:t>
             </a:r>
-            <a:endParaRPr lang="en-US"/>
           </a:p>
         </p:txBody>
       </p:sp>
@@ -2273,7 +2189,7 @@
           <a:p>
             <a:fld id="{5BCAD085-E8A6-8845-BD4E-CB4CCA059FC4}" type="datetimeFigureOut">
               <a:rPr lang="en-US" smtClean="0"/>
-              <a:t>1/27/13</a:t>
+              <a:t>4/26/26</a:t>
             </a:fld>
             <a:endParaRPr lang="en-US"/>
           </a:p>
@@ -2376,10 +2292,9 @@
           </a:lstStyle>
           <a:p>
             <a:r>
-              <a:rPr lang="en-US" smtClean="0"/>
+              <a:rPr lang="en-US"/>
               <a:t>Click to edit Master title style</a:t>
             </a:r>
-            <a:endParaRPr lang="en-US"/>
           </a:p>
         </p:txBody>
       </p:sp>
@@ -2496,7 +2411,7 @@
           <a:p>
             <a:pPr lvl="0"/>
             <a:r>
-              <a:rPr lang="en-US" smtClean="0"/>
+              <a:rPr lang="en-US"/>
               <a:t>Click to edit Master text styles</a:t>
             </a:r>
           </a:p>
@@ -2519,7 +2434,7 @@
           <a:p>
             <a:fld id="{5BCAD085-E8A6-8845-BD4E-CB4CCA059FC4}" type="datetimeFigureOut">
               <a:rPr lang="en-US" smtClean="0"/>
-              <a:t>1/27/13</a:t>
+              <a:t>4/26/26</a:t>
             </a:fld>
             <a:endParaRPr lang="en-US"/>
           </a:p>
@@ -2613,10 +2528,9 @@
           <a:lstStyle/>
           <a:p>
             <a:r>
-              <a:rPr lang="en-US" smtClean="0"/>
+              <a:rPr lang="en-US"/>
               <a:t>Click to edit Master title style</a:t>
             </a:r>
-            <a:endParaRPr lang="en-US"/>
           </a:p>
         </p:txBody>
       </p:sp>
@@ -2670,38 +2584,37 @@
           <a:p>
             <a:pPr lvl="0"/>
             <a:r>
-              <a:rPr lang="en-US" smtClean="0"/>
+              <a:rPr lang="en-US"/>
               <a:t>Click to edit Master text styles</a:t>
             </a:r>
           </a:p>
           <a:p>
             <a:pPr lvl="1"/>
             <a:r>
-              <a:rPr lang="en-US" smtClean="0"/>
+              <a:rPr lang="en-US"/>
               <a:t>Second level</a:t>
             </a:r>
           </a:p>
           <a:p>
             <a:pPr lvl="2"/>
             <a:r>
-              <a:rPr lang="en-US" smtClean="0"/>
+              <a:rPr lang="en-US"/>
               <a:t>Third level</a:t>
             </a:r>
           </a:p>
           <a:p>
             <a:pPr lvl="3"/>
             <a:r>
-              <a:rPr lang="en-US" smtClean="0"/>
+              <a:rPr lang="en-US"/>
               <a:t>Fourth level</a:t>
             </a:r>
           </a:p>
           <a:p>
             <a:pPr lvl="4"/>
             <a:r>
-              <a:rPr lang="en-US" smtClean="0"/>
+              <a:rPr lang="en-US"/>
               <a:t>Fifth level</a:t>
             </a:r>
-            <a:endParaRPr lang="en-US"/>
           </a:p>
         </p:txBody>
       </p:sp>
@@ -2755,38 +2668,37 @@
           <a:p>
             <a:pPr lvl="0"/>
             <a:r>
-              <a:rPr lang="en-US" smtClean="0"/>
+              <a:rPr lang="en-US"/>
               <a:t>Click to edit Master text styles</a:t>
             </a:r>
           </a:p>
           <a:p>
             <a:pPr lvl="1"/>
             <a:r>
-              <a:rPr lang="en-US" smtClean="0"/>
+              <a:rPr lang="en-US"/>
               <a:t>Second level</a:t>
             </a:r>
           </a:p>
           <a:p>
             <a:pPr lvl="2"/>
             <a:r>
-              <a:rPr lang="en-US" smtClean="0"/>
+              <a:rPr lang="en-US"/>
               <a:t>Third level</a:t>
             </a:r>
           </a:p>
           <a:p>
             <a:pPr lvl="3"/>
             <a:r>
-              <a:rPr lang="en-US" smtClean="0"/>
+              <a:rPr lang="en-US"/>
               <a:t>Fourth level</a:t>
             </a:r>
           </a:p>
           <a:p>
             <a:pPr lvl="4"/>
             <a:r>
-              <a:rPr lang="en-US" smtClean="0"/>
+              <a:rPr lang="en-US"/>
               <a:t>Fifth level</a:t>
             </a:r>
-            <a:endParaRPr lang="en-US"/>
           </a:p>
         </p:txBody>
       </p:sp>
@@ -2807,7 +2719,7 @@
           <a:p>
             <a:fld id="{5BCAD085-E8A6-8845-BD4E-CB4CCA059FC4}" type="datetimeFigureOut">
               <a:rPr lang="en-US" smtClean="0"/>
-              <a:t>1/27/13</a:t>
+              <a:t>4/26/26</a:t>
             </a:fld>
             <a:endParaRPr lang="en-US"/>
           </a:p>
@@ -2905,10 +2817,9 @@
           </a:lstStyle>
           <a:p>
             <a:r>
-              <a:rPr lang="en-US" smtClean="0"/>
+              <a:rPr lang="en-US"/>
               <a:t>Click to edit Master title style</a:t>
             </a:r>
-            <a:endParaRPr lang="en-US"/>
           </a:p>
         </p:txBody>
       </p:sp>
@@ -2971,7 +2882,7 @@
           <a:p>
             <a:pPr lvl="0"/>
             <a:r>
-              <a:rPr lang="en-US" smtClean="0"/>
+              <a:rPr lang="en-US"/>
               <a:t>Click to edit Master text styles</a:t>
             </a:r>
           </a:p>
@@ -3027,38 +2938,37 @@
           <a:p>
             <a:pPr lvl="0"/>
             <a:r>
-              <a:rPr lang="en-US" smtClean="0"/>
+              <a:rPr lang="en-US"/>
               <a:t>Click to edit Master text styles</a:t>
             </a:r>
           </a:p>
           <a:p>
             <a:pPr lvl="1"/>
             <a:r>
-              <a:rPr lang="en-US" smtClean="0"/>
+              <a:rPr lang="en-US"/>
               <a:t>Second level</a:t>
             </a:r>
           </a:p>
           <a:p>
             <a:pPr lvl="2"/>
             <a:r>
-              <a:rPr lang="en-US" smtClean="0"/>
+              <a:rPr lang="en-US"/>
               <a:t>Third level</a:t>
             </a:r>
           </a:p>
           <a:p>
             <a:pPr lvl="3"/>
             <a:r>
-              <a:rPr lang="en-US" smtClean="0"/>
+              <a:rPr lang="en-US"/>
               <a:t>Fourth level</a:t>
             </a:r>
           </a:p>
           <a:p>
             <a:pPr lvl="4"/>
             <a:r>
-              <a:rPr lang="en-US" smtClean="0"/>
+              <a:rPr lang="en-US"/>
               <a:t>Fifth level</a:t>
             </a:r>
-            <a:endParaRPr lang="en-US"/>
           </a:p>
         </p:txBody>
       </p:sp>
@@ -3121,7 +3031,7 @@
           <a:p>
             <a:pPr lvl="0"/>
             <a:r>
-              <a:rPr lang="en-US" smtClean="0"/>
+              <a:rPr lang="en-US"/>
               <a:t>Click to edit Master text styles</a:t>
             </a:r>
           </a:p>
@@ -3177,38 +3087,37 @@
           <a:p>
             <a:pPr lvl="0"/>
             <a:r>
-              <a:rPr lang="en-US" smtClean="0"/>
+              <a:rPr lang="en-US"/>
               <a:t>Click to edit Master text styles</a:t>
             </a:r>
           </a:p>
           <a:p>
             <a:pPr lvl="1"/>
             <a:r>
-              <a:rPr lang="en-US" smtClean="0"/>
+              <a:rPr lang="en-US"/>
               <a:t>Second level</a:t>
             </a:r>
           </a:p>
           <a:p>
             <a:pPr lvl="2"/>
             <a:r>
-              <a:rPr lang="en-US" smtClean="0"/>
+              <a:rPr lang="en-US"/>
               <a:t>Third level</a:t>
             </a:r>
           </a:p>
           <a:p>
             <a:pPr lvl="3"/>
             <a:r>
-              <a:rPr lang="en-US" smtClean="0"/>
+              <a:rPr lang="en-US"/>
               <a:t>Fourth level</a:t>
             </a:r>
           </a:p>
           <a:p>
             <a:pPr lvl="4"/>
             <a:r>
-              <a:rPr lang="en-US" smtClean="0"/>
+              <a:rPr lang="en-US"/>
               <a:t>Fifth level</a:t>
             </a:r>
-            <a:endParaRPr lang="en-US"/>
           </a:p>
         </p:txBody>
       </p:sp>
@@ -3229,7 +3138,7 @@
           <a:p>
             <a:fld id="{5BCAD085-E8A6-8845-BD4E-CB4CCA059FC4}" type="datetimeFigureOut">
               <a:rPr lang="en-US" smtClean="0"/>
-              <a:t>1/27/13</a:t>
+              <a:t>4/26/26</a:t>
             </a:fld>
             <a:endParaRPr lang="en-US"/>
           </a:p>
@@ -3323,10 +3232,9 @@
           <a:lstStyle/>
           <a:p>
             <a:r>
-              <a:rPr lang="en-US" smtClean="0"/>
+              <a:rPr lang="en-US"/>
               <a:t>Click to edit Master title style</a:t>
             </a:r>
-            <a:endParaRPr lang="en-US"/>
           </a:p>
         </p:txBody>
       </p:sp>
@@ -3347,7 +3255,7 @@
           <a:p>
             <a:fld id="{5BCAD085-E8A6-8845-BD4E-CB4CCA059FC4}" type="datetimeFigureOut">
               <a:rPr lang="en-US" smtClean="0"/>
-              <a:t>1/27/13</a:t>
+              <a:t>4/26/26</a:t>
             </a:fld>
             <a:endParaRPr lang="en-US"/>
           </a:p>
@@ -3442,7 +3350,7 @@
           <a:p>
             <a:fld id="{5BCAD085-E8A6-8845-BD4E-CB4CCA059FC4}" type="datetimeFigureOut">
               <a:rPr lang="en-US" smtClean="0"/>
-              <a:t>1/27/13</a:t>
+              <a:t>4/26/26</a:t>
             </a:fld>
             <a:endParaRPr lang="en-US"/>
           </a:p>
@@ -3545,10 +3453,9 @@
           </a:lstStyle>
           <a:p>
             <a:r>
-              <a:rPr lang="en-US" smtClean="0"/>
+              <a:rPr lang="en-US"/>
               <a:t>Click to edit Master title style</a:t>
             </a:r>
-            <a:endParaRPr lang="en-US"/>
           </a:p>
         </p:txBody>
       </p:sp>
@@ -3602,38 +3509,37 @@
           <a:p>
             <a:pPr lvl="0"/>
             <a:r>
-              <a:rPr lang="en-US" smtClean="0"/>
+              <a:rPr lang="en-US"/>
               <a:t>Click to edit Master text styles</a:t>
             </a:r>
           </a:p>
           <a:p>
             <a:pPr lvl="1"/>
             <a:r>
-              <a:rPr lang="en-US" smtClean="0"/>
+              <a:rPr lang="en-US"/>
               <a:t>Second level</a:t>
             </a:r>
           </a:p>
           <a:p>
             <a:pPr lvl="2"/>
             <a:r>
-              <a:rPr lang="en-US" smtClean="0"/>
+              <a:rPr lang="en-US"/>
               <a:t>Third level</a:t>
             </a:r>
           </a:p>
           <a:p>
             <a:pPr lvl="3"/>
             <a:r>
-              <a:rPr lang="en-US" smtClean="0"/>
+              <a:rPr lang="en-US"/>
               <a:t>Fourth level</a:t>
             </a:r>
           </a:p>
           <a:p>
             <a:pPr lvl="4"/>
             <a:r>
-              <a:rPr lang="en-US" smtClean="0"/>
+              <a:rPr lang="en-US"/>
               <a:t>Fifth level</a:t>
             </a:r>
-            <a:endParaRPr lang="en-US"/>
           </a:p>
         </p:txBody>
       </p:sp>
@@ -3696,7 +3602,7 @@
           <a:p>
             <a:pPr lvl="0"/>
             <a:r>
-              <a:rPr lang="en-US" smtClean="0"/>
+              <a:rPr lang="en-US"/>
               <a:t>Click to edit Master text styles</a:t>
             </a:r>
           </a:p>
@@ -3719,7 +3625,7 @@
           <a:p>
             <a:fld id="{5BCAD085-E8A6-8845-BD4E-CB4CCA059FC4}" type="datetimeFigureOut">
               <a:rPr lang="en-US" smtClean="0"/>
-              <a:t>1/27/13</a:t>
+              <a:t>4/26/26</a:t>
             </a:fld>
             <a:endParaRPr lang="en-US"/>
           </a:p>
@@ -3822,10 +3728,9 @@
           </a:lstStyle>
           <a:p>
             <a:r>
-              <a:rPr lang="en-US" smtClean="0"/>
+              <a:rPr lang="en-US"/>
               <a:t>Click to edit Master title style</a:t>
             </a:r>
-            <a:endParaRPr lang="en-US"/>
           </a:p>
         </p:txBody>
       </p:sp>
@@ -3949,7 +3854,7 @@
           <a:p>
             <a:pPr lvl="0"/>
             <a:r>
-              <a:rPr lang="en-US" smtClean="0"/>
+              <a:rPr lang="en-US"/>
               <a:t>Click to edit Master text styles</a:t>
             </a:r>
           </a:p>
@@ -3972,7 +3877,7 @@
           <a:p>
             <a:fld id="{5BCAD085-E8A6-8845-BD4E-CB4CCA059FC4}" type="datetimeFigureOut">
               <a:rPr lang="en-US" smtClean="0"/>
-              <a:t>1/27/13</a:t>
+              <a:t>4/26/26</a:t>
             </a:fld>
             <a:endParaRPr lang="en-US"/>
           </a:p>
@@ -4081,10 +3986,9 @@
           <a:lstStyle/>
           <a:p>
             <a:r>
-              <a:rPr lang="en-US" smtClean="0"/>
+              <a:rPr lang="en-US"/>
               <a:t>Click to edit Master title style</a:t>
             </a:r>
-            <a:endParaRPr lang="en-US"/>
           </a:p>
         </p:txBody>
       </p:sp>
@@ -4115,38 +4019,37 @@
           <a:p>
             <a:pPr lvl="0"/>
             <a:r>
-              <a:rPr lang="en-US" smtClean="0"/>
+              <a:rPr lang="en-US"/>
               <a:t>Click to edit Master text styles</a:t>
             </a:r>
           </a:p>
           <a:p>
             <a:pPr lvl="1"/>
             <a:r>
-              <a:rPr lang="en-US" smtClean="0"/>
+              <a:rPr lang="en-US"/>
               <a:t>Second level</a:t>
             </a:r>
           </a:p>
           <a:p>
             <a:pPr lvl="2"/>
             <a:r>
-              <a:rPr lang="en-US" smtClean="0"/>
+              <a:rPr lang="en-US"/>
               <a:t>Third level</a:t>
             </a:r>
           </a:p>
           <a:p>
             <a:pPr lvl="3"/>
             <a:r>
-              <a:rPr lang="en-US" smtClean="0"/>
+              <a:rPr lang="en-US"/>
               <a:t>Fourth level</a:t>
             </a:r>
           </a:p>
           <a:p>
             <a:pPr lvl="4"/>
             <a:r>
-              <a:rPr lang="en-US" smtClean="0"/>
+              <a:rPr lang="en-US"/>
               <a:t>Fifth level</a:t>
             </a:r>
-            <a:endParaRPr lang="en-US"/>
           </a:p>
         </p:txBody>
       </p:sp>
@@ -4185,7 +4088,7 @@
           <a:p>
             <a:fld id="{5BCAD085-E8A6-8845-BD4E-CB4CCA059FC4}" type="datetimeFigureOut">
               <a:rPr lang="en-US" smtClean="0"/>
-              <a:t>1/27/13</a:t>
+              <a:t>4/26/26</a:t>
             </a:fld>
             <a:endParaRPr lang="en-US"/>
           </a:p>
@@ -4544,7 +4447,7 @@
 </file>
 
 <file path=ppt/slides/slide1.xml><?xml version="1.0" encoding="utf-8"?>
-<p:sld xmlns:a="http://schemas.openxmlformats.org/drawingml/2006/main" xmlns:p="http://schemas.openxmlformats.org/presentationml/2006/main" xmlns:r="http://schemas.openxmlformats.org/officeDocument/2006/relationships">
+<p:sld xmlns:a="http://schemas.openxmlformats.org/drawingml/2006/main" xmlns:r="http://schemas.openxmlformats.org/officeDocument/2006/relationships" xmlns:p="http://schemas.openxmlformats.org/presentationml/2006/main">
   <p:cSld>
     <p:bg>
       <p:bgPr>
@@ -4560,7 +4463,14 @@
         <p:cNvGrpSpPr/>
         <p:nvPr/>
       </p:nvGrpSpPr>
-      <p:grpSpPr/>
+      <p:grpSpPr>
+        <a:xfrm>
+          <a:off x="0" y="0"/>
+          <a:ext cx="0" cy="0"/>
+          <a:chOff x="0" y="0"/>
+          <a:chExt cx="0" cy="0"/>
+        </a:xfrm>
+      </p:grpSpPr>
       <p:sp>
         <p:nvSpPr>
           <p:cNvPr id="2" name="TextBox 1"/>
@@ -4578,7 +4488,7 @@
           <a:noFill/>
         </p:spPr>
         <p:txBody>
-          <a:bodyPr wrap="square" lIns="0" rIns="0" tIns="0" bIns="0" anchor="t">
+          <a:bodyPr wrap="square" lIns="0" tIns="0" rIns="0" bIns="0" anchor="t">
             <a:spAutoFit/>
           </a:bodyPr>
           <a:lstStyle/>
@@ -4637,6 +4547,7 @@
           <a:lstStyle/>
           <a:p>
             <a:pPr algn="ctr"/>
+            <a:endParaRPr/>
           </a:p>
         </p:txBody>
       </p:sp>
@@ -4649,7 +4560,7 @@
         <p:spPr>
           <a:xfrm>
             <a:off x="548640" y="2331720"/>
-            <a:ext cx="11091672" cy="1005840"/>
+            <a:ext cx="11091672" cy="738664"/>
           </a:xfrm>
           <a:prstGeom prst="rect">
             <a:avLst/>
@@ -4657,14 +4568,14 @@
           <a:noFill/>
         </p:spPr>
         <p:txBody>
-          <a:bodyPr wrap="square" lIns="0" rIns="0" tIns="0" bIns="0" anchor="t">
+          <a:bodyPr wrap="square" lIns="0" tIns="0" rIns="0" bIns="0" anchor="t">
             <a:spAutoFit/>
           </a:bodyPr>
           <a:lstStyle/>
           <a:p>
             <a:pPr algn="ctr"/>
             <a:r>
-              <a:rPr sz="4400" b="1" i="0">
+              <a:rPr sz="4800" b="1" i="0" dirty="0">
                 <a:solidFill>
                   <a:srgbClr val="F2F3F5"/>
                 </a:solidFill>
@@ -4684,7 +4595,7 @@
         <p:spPr>
           <a:xfrm>
             <a:off x="548640" y="3429000"/>
-            <a:ext cx="11091672" cy="502920"/>
+            <a:ext cx="11091672" cy="430887"/>
           </a:xfrm>
           <a:prstGeom prst="rect">
             <a:avLst/>
@@ -4692,14 +4603,14 @@
           <a:noFill/>
         </p:spPr>
         <p:txBody>
-          <a:bodyPr wrap="square" lIns="0" rIns="0" tIns="0" bIns="0" anchor="t">
+          <a:bodyPr wrap="square" lIns="0" tIns="0" rIns="0" bIns="0" anchor="t">
             <a:spAutoFit/>
           </a:bodyPr>
           <a:lstStyle/>
           <a:p>
             <a:pPr algn="ctr"/>
             <a:r>
-              <a:rPr sz="2000" b="0" i="0">
+              <a:rPr sz="2800" b="0" i="0" dirty="0">
                 <a:solidFill>
                   <a:srgbClr val="9AA1AB"/>
                 </a:solidFill>
@@ -4718,8 +4629,8 @@
         </p:nvSpPr>
         <p:spPr>
           <a:xfrm>
-            <a:off x="548640" y="5394960"/>
-            <a:ext cx="11091672" cy="365760"/>
+            <a:off x="548576" y="4877430"/>
+            <a:ext cx="11091672" cy="307777"/>
           </a:xfrm>
           <a:prstGeom prst="rect">
             <a:avLst/>
@@ -4727,90 +4638,20 @@
           <a:noFill/>
         </p:spPr>
         <p:txBody>
-          <a:bodyPr wrap="square" lIns="0" rIns="0" tIns="0" bIns="0" anchor="t">
+          <a:bodyPr wrap="square" lIns="0" tIns="0" rIns="0" bIns="0" anchor="t">
             <a:spAutoFit/>
           </a:bodyPr>
           <a:lstStyle/>
           <a:p>
             <a:pPr algn="ctr"/>
             <a:r>
-              <a:rPr sz="1200" b="1" i="0">
+              <a:rPr sz="2000" b="1" i="0" dirty="0">
                 <a:solidFill>
                   <a:srgbClr val="7B9FE0"/>
                 </a:solidFill>
                 <a:latin typeface="Helvetica Neue"/>
               </a:rPr>
               <a:t>PRESTON CUSICK · ANEESH HARWALKAR</a:t>
-            </a:r>
-          </a:p>
-        </p:txBody>
-      </p:sp>
-      <p:sp>
-        <p:nvSpPr>
-          <p:cNvPr id="7" name="TextBox 6"/>
-          <p:cNvSpPr txBox="1"/>
-          <p:nvPr/>
-        </p:nvSpPr>
-        <p:spPr>
-          <a:xfrm>
-            <a:off x="548640" y="5806440"/>
-            <a:ext cx="11091672" cy="365760"/>
-          </a:xfrm>
-          <a:prstGeom prst="rect">
-            <a:avLst/>
-          </a:prstGeom>
-          <a:noFill/>
-        </p:spPr>
-        <p:txBody>
-          <a:bodyPr wrap="square" lIns="0" rIns="0" tIns="0" bIns="0" anchor="t">
-            <a:spAutoFit/>
-          </a:bodyPr>
-          <a:lstStyle/>
-          <a:p>
-            <a:pPr algn="ctr"/>
-            <a:r>
-              <a:rPr sz="1400" b="0" i="1">
-                <a:solidFill>
-                  <a:srgbClr val="656B75"/>
-                </a:solidFill>
-                <a:latin typeface="Helvetica Neue"/>
-              </a:rPr>
-              <a:t>Evaluate  →  Analyze  →  Improve</a:t>
-            </a:r>
-          </a:p>
-        </p:txBody>
-      </p:sp>
-      <p:sp>
-        <p:nvSpPr>
-          <p:cNvPr id="8" name="TextBox 7"/>
-          <p:cNvSpPr txBox="1"/>
-          <p:nvPr/>
-        </p:nvSpPr>
-        <p:spPr>
-          <a:xfrm>
-            <a:off x="11247120" y="6510528"/>
-            <a:ext cx="731520" cy="274320"/>
-          </a:xfrm>
-          <a:prstGeom prst="rect">
-            <a:avLst/>
-          </a:prstGeom>
-          <a:noFill/>
-        </p:spPr>
-        <p:txBody>
-          <a:bodyPr wrap="square" lIns="0" rIns="0" tIns="0" bIns="0" anchor="t">
-            <a:spAutoFit/>
-          </a:bodyPr>
-          <a:lstStyle/>
-          <a:p>
-            <a:pPr algn="r"/>
-            <a:r>
-              <a:rPr sz="900" b="0" i="0">
-                <a:solidFill>
-                  <a:srgbClr val="656B75"/>
-                </a:solidFill>
-                <a:latin typeface="Helvetica Neue"/>
-              </a:rPr>
-              <a:t>1</a:t>
             </a:r>
           </a:p>
         </p:txBody>
@@ -4824,7 +4665,7 @@
 </file>
 
 <file path=ppt/slides/slide10.xml><?xml version="1.0" encoding="utf-8"?>
-<p:sld xmlns:a="http://schemas.openxmlformats.org/drawingml/2006/main" xmlns:p="http://schemas.openxmlformats.org/presentationml/2006/main" xmlns:r="http://schemas.openxmlformats.org/officeDocument/2006/relationships">
+<p:sld xmlns:a="http://schemas.openxmlformats.org/drawingml/2006/main" xmlns:r="http://schemas.openxmlformats.org/officeDocument/2006/relationships" xmlns:p="http://schemas.openxmlformats.org/presentationml/2006/main">
   <p:cSld>
     <p:bg>
       <p:bgPr>
@@ -4840,86 +4681,14 @@
         <p:cNvGrpSpPr/>
         <p:nvPr/>
       </p:nvGrpSpPr>
-      <p:grpSpPr/>
-      <p:sp>
-        <p:nvSpPr>
-          <p:cNvPr id="2" name="TextBox 1"/>
-          <p:cNvSpPr txBox="1"/>
-          <p:nvPr/>
-        </p:nvSpPr>
-        <p:spPr>
-          <a:xfrm>
-            <a:off x="548640" y="411480"/>
-            <a:ext cx="6858000" cy="274320"/>
-          </a:xfrm>
-          <a:prstGeom prst="rect">
-            <a:avLst/>
-          </a:prstGeom>
-          <a:noFill/>
-        </p:spPr>
-        <p:txBody>
-          <a:bodyPr wrap="square" lIns="0" rIns="0" tIns="0" bIns="0" anchor="t">
-            <a:spAutoFit/>
-          </a:bodyPr>
-          <a:lstStyle/>
-          <a:p>
-            <a:pPr algn="l"/>
-            <a:r>
-              <a:rPr sz="1100" b="1" i="0">
-                <a:solidFill>
-                  <a:srgbClr val="7BE0B4"/>
-                </a:solidFill>
-                <a:latin typeface="Helvetica Neue"/>
-              </a:rPr>
-              <a:t>ACT III · IMPROVE</a:t>
-            </a:r>
-          </a:p>
-        </p:txBody>
-      </p:sp>
-      <p:sp>
-        <p:nvSpPr>
-          <p:cNvPr id="3" name="Rectangle 2"/>
-          <p:cNvSpPr/>
-          <p:nvPr/>
-        </p:nvSpPr>
-        <p:spPr>
-          <a:xfrm>
-            <a:off x="5120640" y="512064"/>
-            <a:ext cx="6583680" cy="9144"/>
-          </a:xfrm>
-          <a:prstGeom prst="rect">
-            <a:avLst/>
-          </a:prstGeom>
-          <a:solidFill>
-            <a:srgbClr val="282C35"/>
-          </a:solidFill>
-          <a:ln>
-            <a:noFill/>
-          </a:ln>
-          <a:effectLst/>
-        </p:spPr>
-        <p:style>
-          <a:lnRef idx="1">
-            <a:schemeClr val="accent1"/>
-          </a:lnRef>
-          <a:fillRef idx="3">
-            <a:schemeClr val="accent1"/>
-          </a:fillRef>
-          <a:effectRef idx="2">
-            <a:schemeClr val="accent1"/>
-          </a:effectRef>
-          <a:fontRef idx="minor">
-            <a:schemeClr val="lt1"/>
-          </a:fontRef>
-        </p:style>
-        <p:txBody>
-          <a:bodyPr rtlCol="0" anchor="ctr"/>
-          <a:lstStyle/>
-          <a:p>
-            <a:pPr algn="ctr"/>
-          </a:p>
-        </p:txBody>
-      </p:sp>
+      <p:grpSpPr>
+        <a:xfrm>
+          <a:off x="0" y="0"/>
+          <a:ext cx="0" cy="0"/>
+          <a:chOff x="0" y="0"/>
+          <a:chExt cx="0" cy="0"/>
+        </a:xfrm>
+      </p:grpSpPr>
       <p:sp>
         <p:nvSpPr>
           <p:cNvPr id="4" name="TextBox 3"/>
@@ -4937,7 +4706,7 @@
           <a:noFill/>
         </p:spPr>
         <p:txBody>
-          <a:bodyPr wrap="square" lIns="0" rIns="0" tIns="0" bIns="0" anchor="t">
+          <a:bodyPr wrap="square" lIns="0" tIns="0" rIns="0" bIns="0" anchor="t">
             <a:spAutoFit/>
           </a:bodyPr>
           <a:lstStyle/>
@@ -4996,6 +4765,7 @@
           <a:lstStyle/>
           <a:p>
             <a:pPr algn="ctr"/>
+            <a:endParaRPr/>
           </a:p>
         </p:txBody>
       </p:sp>
@@ -5040,6 +4810,7 @@
           <a:lstStyle/>
           <a:p>
             <a:pPr algn="ctr"/>
+            <a:endParaRPr/>
           </a:p>
         </p:txBody>
       </p:sp>
@@ -5060,7 +4831,7 @@
           <a:noFill/>
         </p:spPr>
         <p:txBody>
-          <a:bodyPr wrap="square" lIns="0" rIns="0" tIns="0" bIns="0" anchor="t">
+          <a:bodyPr wrap="square" lIns="0" tIns="0" rIns="0" bIns="0" anchor="t">
             <a:spAutoFit/>
           </a:bodyPr>
           <a:lstStyle/>
@@ -5095,7 +4866,7 @@
           <a:noFill/>
         </p:spPr>
         <p:txBody>
-          <a:bodyPr wrap="square" lIns="0" rIns="0" tIns="0" bIns="0" anchor="t">
+          <a:bodyPr wrap="square" lIns="0" tIns="0" rIns="0" bIns="0" anchor="t">
             <a:spAutoFit/>
           </a:bodyPr>
           <a:lstStyle/>
@@ -5130,7 +4901,7 @@
           <a:noFill/>
         </p:spPr>
         <p:txBody>
-          <a:bodyPr wrap="square" lIns="0" rIns="0" tIns="0" bIns="0" anchor="t">
+          <a:bodyPr wrap="square" lIns="0" tIns="0" rIns="0" bIns="0" anchor="t">
             <a:spAutoFit/>
           </a:bodyPr>
           <a:lstStyle/>
@@ -5189,6 +4960,7 @@
           <a:lstStyle/>
           <a:p>
             <a:pPr algn="ctr"/>
+            <a:endParaRPr/>
           </a:p>
         </p:txBody>
       </p:sp>
@@ -5233,6 +5005,7 @@
           <a:lstStyle/>
           <a:p>
             <a:pPr algn="ctr"/>
+            <a:endParaRPr/>
           </a:p>
         </p:txBody>
       </p:sp>
@@ -5253,7 +5026,7 @@
           <a:noFill/>
         </p:spPr>
         <p:txBody>
-          <a:bodyPr wrap="square" lIns="0" rIns="0" tIns="0" bIns="0" anchor="t">
+          <a:bodyPr wrap="square" lIns="0" tIns="0" rIns="0" bIns="0" anchor="t">
             <a:spAutoFit/>
           </a:bodyPr>
           <a:lstStyle/>
@@ -5288,7 +5061,7 @@
           <a:noFill/>
         </p:spPr>
         <p:txBody>
-          <a:bodyPr wrap="square" lIns="0" rIns="0" tIns="0" bIns="0" anchor="t">
+          <a:bodyPr wrap="square" lIns="0" tIns="0" rIns="0" bIns="0" anchor="t">
             <a:spAutoFit/>
           </a:bodyPr>
           <a:lstStyle/>
@@ -5323,7 +5096,7 @@
           <a:noFill/>
         </p:spPr>
         <p:txBody>
-          <a:bodyPr wrap="square" lIns="0" rIns="0" tIns="0" bIns="0" anchor="t">
+          <a:bodyPr wrap="square" lIns="0" tIns="0" rIns="0" bIns="0" anchor="t">
             <a:spAutoFit/>
           </a:bodyPr>
           <a:lstStyle/>
@@ -5358,7 +5131,7 @@
           <a:noFill/>
         </p:spPr>
         <p:txBody>
-          <a:bodyPr wrap="square" lIns="0" rIns="0" tIns="0" bIns="0" anchor="t">
+          <a:bodyPr wrap="square" lIns="0" tIns="0" rIns="0" bIns="0" anchor="t">
             <a:spAutoFit/>
           </a:bodyPr>
           <a:lstStyle/>
@@ -5393,7 +5166,7 @@
           <a:noFill/>
         </p:spPr>
         <p:txBody>
-          <a:bodyPr wrap="square" lIns="0" rIns="0" tIns="0" bIns="0" anchor="t">
+          <a:bodyPr wrap="square" lIns="0" tIns="0" rIns="0" bIns="0" anchor="t">
             <a:spAutoFit/>
           </a:bodyPr>
           <a:lstStyle/>
@@ -5428,7 +5201,7 @@
           <a:noFill/>
         </p:spPr>
         <p:txBody>
-          <a:bodyPr wrap="square" lIns="0" rIns="0" tIns="0" bIns="0" anchor="t">
+          <a:bodyPr wrap="square" lIns="0" tIns="0" rIns="0" bIns="0" anchor="t">
             <a:spAutoFit/>
           </a:bodyPr>
           <a:lstStyle/>
@@ -5463,7 +5236,7 @@
           <a:noFill/>
         </p:spPr>
         <p:txBody>
-          <a:bodyPr wrap="square" lIns="0" rIns="0" tIns="0" bIns="0" anchor="t">
+          <a:bodyPr wrap="square" lIns="0" tIns="0" rIns="0" bIns="0" anchor="t">
             <a:spAutoFit/>
           </a:bodyPr>
           <a:lstStyle/>
@@ -5498,7 +5271,7 @@
           <a:noFill/>
         </p:spPr>
         <p:txBody>
-          <a:bodyPr wrap="square" lIns="0" rIns="0" tIns="0" bIns="0" anchor="t">
+          <a:bodyPr wrap="square" lIns="0" tIns="0" rIns="0" bIns="0" anchor="t">
             <a:spAutoFit/>
           </a:bodyPr>
           <a:lstStyle/>
@@ -5533,7 +5306,7 @@
           <a:noFill/>
         </p:spPr>
         <p:txBody>
-          <a:bodyPr wrap="square" lIns="0" rIns="0" tIns="0" bIns="0" anchor="t">
+          <a:bodyPr wrap="square" lIns="0" tIns="0" rIns="0" bIns="0" anchor="t">
             <a:spAutoFit/>
           </a:bodyPr>
           <a:lstStyle/>
@@ -5568,7 +5341,7 @@
           <a:noFill/>
         </p:spPr>
         <p:txBody>
-          <a:bodyPr wrap="square" lIns="0" rIns="0" tIns="0" bIns="0" anchor="t">
+          <a:bodyPr wrap="square" lIns="0" tIns="0" rIns="0" bIns="0" anchor="t">
             <a:spAutoFit/>
           </a:bodyPr>
           <a:lstStyle/>
@@ -5603,7 +5376,7 @@
           <a:noFill/>
         </p:spPr>
         <p:txBody>
-          <a:bodyPr wrap="square" lIns="0" rIns="0" tIns="0" bIns="0" anchor="t">
+          <a:bodyPr wrap="square" lIns="0" tIns="0" rIns="0" bIns="0" anchor="t">
             <a:spAutoFit/>
           </a:bodyPr>
           <a:lstStyle/>
@@ -5638,7 +5411,7 @@
           <a:noFill/>
         </p:spPr>
         <p:txBody>
-          <a:bodyPr wrap="square" lIns="0" rIns="0" tIns="0" bIns="0" anchor="t">
+          <a:bodyPr wrap="square" lIns="0" tIns="0" rIns="0" bIns="0" anchor="t">
             <a:spAutoFit/>
           </a:bodyPr>
           <a:lstStyle/>
@@ -5673,7 +5446,7 @@
           <a:noFill/>
         </p:spPr>
         <p:txBody>
-          <a:bodyPr wrap="square" lIns="0" rIns="0" tIns="0" bIns="0" anchor="t">
+          <a:bodyPr wrap="square" lIns="0" tIns="0" rIns="0" bIns="0" anchor="t">
             <a:spAutoFit/>
           </a:bodyPr>
           <a:lstStyle/>
@@ -5708,7 +5481,7 @@
           <a:noFill/>
         </p:spPr>
         <p:txBody>
-          <a:bodyPr wrap="square" lIns="0" rIns="0" tIns="0" bIns="0" anchor="t">
+          <a:bodyPr wrap="square" lIns="0" tIns="0" rIns="0" bIns="0" anchor="t">
             <a:spAutoFit/>
           </a:bodyPr>
           <a:lstStyle/>
@@ -5728,14 +5501,20 @@
       </p:sp>
       <p:sp>
         <p:nvSpPr>
-          <p:cNvPr id="26" name="TextBox 25"/>
+          <p:cNvPr id="29" name="TextBox 28">
+            <a:extLst>
+              <a:ext uri="{FF2B5EF4-FFF2-40B4-BE49-F238E27FC236}">
+                <a16:creationId xmlns:a16="http://schemas.microsoft.com/office/drawing/2014/main" id="{8EDFFDC8-33BC-6562-4581-219F5B52DC26}"/>
+              </a:ext>
+            </a:extLst>
+          </p:cNvPr>
           <p:cNvSpPr txBox="1"/>
           <p:nvPr/>
         </p:nvSpPr>
         <p:spPr>
           <a:xfrm>
-            <a:off x="11247120" y="6510528"/>
-            <a:ext cx="731520" cy="274320"/>
+            <a:off x="548640" y="411480"/>
+            <a:ext cx="6858000" cy="169277"/>
           </a:xfrm>
           <a:prstGeom prst="rect">
             <a:avLst/>
@@ -5743,21 +5522,27 @@
           <a:noFill/>
         </p:spPr>
         <p:txBody>
-          <a:bodyPr wrap="square" lIns="0" rIns="0" tIns="0" bIns="0" anchor="t">
+          <a:bodyPr wrap="square" lIns="0" tIns="0" rIns="0" bIns="0" anchor="t">
             <a:spAutoFit/>
           </a:bodyPr>
           <a:lstStyle/>
           <a:p>
-            <a:pPr algn="r"/>
-            <a:r>
-              <a:rPr sz="900" b="0" i="0">
-                <a:solidFill>
-                  <a:srgbClr val="656B75"/>
+            <a:pPr algn="l"/>
+            <a:r>
+              <a:rPr lang="en-US" sz="1100" b="1" i="0" dirty="0">
+                <a:solidFill>
+                  <a:srgbClr val="7BE0B4"/>
                 </a:solidFill>
                 <a:latin typeface="Helvetica Neue"/>
               </a:rPr>
-              <a:t>10</a:t>
-            </a:r>
+              <a:t>REDESIGN</a:t>
+            </a:r>
+            <a:endParaRPr sz="1100" b="1" i="0" dirty="0">
+              <a:solidFill>
+                <a:srgbClr val="7BE0B4"/>
+              </a:solidFill>
+              <a:latin typeface="Helvetica Neue"/>
+            </a:endParaRPr>
           </a:p>
         </p:txBody>
       </p:sp>
@@ -5770,7 +5555,7 @@
 </file>
 
 <file path=ppt/slides/slide11.xml><?xml version="1.0" encoding="utf-8"?>
-<p:sld xmlns:a="http://schemas.openxmlformats.org/drawingml/2006/main" xmlns:p="http://schemas.openxmlformats.org/presentationml/2006/main" xmlns:r="http://schemas.openxmlformats.org/officeDocument/2006/relationships">
+<p:sld xmlns:a="http://schemas.openxmlformats.org/drawingml/2006/main" xmlns:r="http://schemas.openxmlformats.org/officeDocument/2006/relationships" xmlns:p="http://schemas.openxmlformats.org/presentationml/2006/main">
   <p:cSld>
     <p:bg>
       <p:bgPr>
@@ -5786,86 +5571,14 @@
         <p:cNvGrpSpPr/>
         <p:nvPr/>
       </p:nvGrpSpPr>
-      <p:grpSpPr/>
-      <p:sp>
-        <p:nvSpPr>
-          <p:cNvPr id="2" name="TextBox 1"/>
-          <p:cNvSpPr txBox="1"/>
-          <p:nvPr/>
-        </p:nvSpPr>
-        <p:spPr>
-          <a:xfrm>
-            <a:off x="548640" y="411480"/>
-            <a:ext cx="6858000" cy="274320"/>
-          </a:xfrm>
-          <a:prstGeom prst="rect">
-            <a:avLst/>
-          </a:prstGeom>
-          <a:noFill/>
-        </p:spPr>
-        <p:txBody>
-          <a:bodyPr wrap="square" lIns="0" rIns="0" tIns="0" bIns="0" anchor="t">
-            <a:spAutoFit/>
-          </a:bodyPr>
-          <a:lstStyle/>
-          <a:p>
-            <a:pPr algn="l"/>
-            <a:r>
-              <a:rPr sz="1100" b="1" i="0">
-                <a:solidFill>
-                  <a:srgbClr val="7BE0B4"/>
-                </a:solidFill>
-                <a:latin typeface="Helvetica Neue"/>
-              </a:rPr>
-              <a:t>PROJECT CLOSE</a:t>
-            </a:r>
-          </a:p>
-        </p:txBody>
-      </p:sp>
-      <p:sp>
-        <p:nvSpPr>
-          <p:cNvPr id="3" name="Rectangle 2"/>
-          <p:cNvSpPr/>
-          <p:nvPr/>
-        </p:nvSpPr>
-        <p:spPr>
-          <a:xfrm>
-            <a:off x="5120640" y="512064"/>
-            <a:ext cx="6583680" cy="9144"/>
-          </a:xfrm>
-          <a:prstGeom prst="rect">
-            <a:avLst/>
-          </a:prstGeom>
-          <a:solidFill>
-            <a:srgbClr val="282C35"/>
-          </a:solidFill>
-          <a:ln>
-            <a:noFill/>
-          </a:ln>
-          <a:effectLst/>
-        </p:spPr>
-        <p:style>
-          <a:lnRef idx="1">
-            <a:schemeClr val="accent1"/>
-          </a:lnRef>
-          <a:fillRef idx="3">
-            <a:schemeClr val="accent1"/>
-          </a:fillRef>
-          <a:effectRef idx="2">
-            <a:schemeClr val="accent1"/>
-          </a:effectRef>
-          <a:fontRef idx="minor">
-            <a:schemeClr val="lt1"/>
-          </a:fontRef>
-        </p:style>
-        <p:txBody>
-          <a:bodyPr rtlCol="0" anchor="ctr"/>
-          <a:lstStyle/>
-          <a:p>
-            <a:pPr algn="ctr"/>
-          </a:p>
-        </p:txBody>
-      </p:sp>
+      <p:grpSpPr>
+        <a:xfrm>
+          <a:off x="0" y="0"/>
+          <a:ext cx="0" cy="0"/>
+          <a:chOff x="0" y="0"/>
+          <a:chExt cx="0" cy="0"/>
+        </a:xfrm>
+      </p:grpSpPr>
       <p:sp>
         <p:nvSpPr>
           <p:cNvPr id="4" name="TextBox 3"/>
@@ -5874,7 +5587,7 @@
         </p:nvSpPr>
         <p:spPr>
           <a:xfrm>
-            <a:off x="548640" y="2194560"/>
+            <a:off x="548576" y="1679405"/>
             <a:ext cx="11091672" cy="914400"/>
           </a:xfrm>
           <a:prstGeom prst="rect">
@@ -5883,7 +5596,7 @@
           <a:noFill/>
         </p:spPr>
         <p:txBody>
-          <a:bodyPr wrap="square" lIns="0" rIns="0" tIns="0" bIns="0" anchor="t">
+          <a:bodyPr wrap="square" lIns="0" tIns="0" rIns="0" bIns="0" anchor="t">
             <a:spAutoFit/>
           </a:bodyPr>
           <a:lstStyle/>
@@ -5909,7 +5622,7 @@
         </p:nvSpPr>
         <p:spPr>
           <a:xfrm>
-            <a:off x="548640" y="3017520"/>
+            <a:off x="548576" y="2502365"/>
             <a:ext cx="11091672" cy="914400"/>
           </a:xfrm>
           <a:prstGeom prst="rect">
@@ -5918,7 +5631,7 @@
           <a:noFill/>
         </p:spPr>
         <p:txBody>
-          <a:bodyPr wrap="square" lIns="0" rIns="0" tIns="0" bIns="0" anchor="t">
+          <a:bodyPr wrap="square" lIns="0" tIns="0" rIns="0" bIns="0" anchor="t">
             <a:spAutoFit/>
           </a:bodyPr>
           <a:lstStyle/>
@@ -5944,7 +5657,7 @@
         </p:nvSpPr>
         <p:spPr>
           <a:xfrm>
-            <a:off x="548640" y="4251960"/>
+            <a:off x="548576" y="3736805"/>
             <a:ext cx="11091672" cy="457200"/>
           </a:xfrm>
           <a:prstGeom prst="rect">
@@ -5953,7 +5666,7 @@
           <a:noFill/>
         </p:spPr>
         <p:txBody>
-          <a:bodyPr wrap="square" lIns="0" rIns="0" tIns="0" bIns="0" anchor="t">
+          <a:bodyPr wrap="square" lIns="0" tIns="0" rIns="0" bIns="0" anchor="t">
             <a:spAutoFit/>
           </a:bodyPr>
           <a:lstStyle/>
@@ -5979,7 +5692,7 @@
         </p:nvSpPr>
         <p:spPr>
           <a:xfrm>
-            <a:off x="3108960" y="5303520"/>
+            <a:off x="3108896" y="4788365"/>
             <a:ext cx="5943600" cy="1005840"/>
           </a:xfrm>
           <a:prstGeom prst="rect">
@@ -6012,6 +5725,7 @@
           <a:lstStyle/>
           <a:p>
             <a:pPr algn="ctr"/>
+            <a:endParaRPr/>
           </a:p>
         </p:txBody>
       </p:sp>
@@ -6023,7 +5737,7 @@
         </p:nvSpPr>
         <p:spPr>
           <a:xfrm>
-            <a:off x="3108960" y="5440680"/>
+            <a:off x="3108896" y="4925525"/>
             <a:ext cx="5943600" cy="365760"/>
           </a:xfrm>
           <a:prstGeom prst="rect">
@@ -6032,7 +5746,7 @@
           <a:noFill/>
         </p:spPr>
         <p:txBody>
-          <a:bodyPr wrap="square" lIns="0" rIns="0" tIns="0" bIns="0" anchor="t">
+          <a:bodyPr wrap="square" lIns="0" tIns="0" rIns="0" bIns="0" anchor="t">
             <a:spAutoFit/>
           </a:bodyPr>
           <a:lstStyle/>
@@ -6058,7 +5772,7 @@
         </p:nvSpPr>
         <p:spPr>
           <a:xfrm>
-            <a:off x="3108960" y="5760720"/>
+            <a:off x="3108896" y="5245565"/>
             <a:ext cx="5943600" cy="320040"/>
           </a:xfrm>
           <a:prstGeom prst="rect">
@@ -6067,7 +5781,7 @@
           <a:noFill/>
         </p:spPr>
         <p:txBody>
-          <a:bodyPr wrap="square" lIns="0" rIns="0" tIns="0" bIns="0" anchor="t">
+          <a:bodyPr wrap="square" lIns="0" tIns="0" rIns="0" bIns="0" anchor="t">
             <a:spAutoFit/>
           </a:bodyPr>
           <a:lstStyle/>
@@ -6093,7 +5807,7 @@
         </p:nvSpPr>
         <p:spPr>
           <a:xfrm>
-            <a:off x="3108960" y="5989320"/>
+            <a:off x="3108896" y="5542745"/>
             <a:ext cx="5943600" cy="274320"/>
           </a:xfrm>
           <a:prstGeom prst="rect">
@@ -6102,55 +5816,20 @@
           <a:noFill/>
         </p:spPr>
         <p:txBody>
-          <a:bodyPr wrap="square" lIns="0" rIns="0" tIns="0" bIns="0" anchor="t">
+          <a:bodyPr wrap="square" lIns="0" tIns="0" rIns="0" bIns="0" anchor="t">
             <a:spAutoFit/>
           </a:bodyPr>
           <a:lstStyle/>
           <a:p>
             <a:pPr algn="ctr"/>
             <a:r>
-              <a:rPr sz="1100" b="0" i="1">
+              <a:rPr sz="1100" b="0" i="1" dirty="0">
                 <a:solidFill>
                   <a:srgbClr val="656B75"/>
                 </a:solidFill>
                 <a:latin typeface="Helvetica Neue"/>
               </a:rPr>
               <a:t>Prof. John L. Neumann, Ph.D.</a:t>
-            </a:r>
-          </a:p>
-        </p:txBody>
-      </p:sp>
-      <p:sp>
-        <p:nvSpPr>
-          <p:cNvPr id="11" name="TextBox 10"/>
-          <p:cNvSpPr txBox="1"/>
-          <p:nvPr/>
-        </p:nvSpPr>
-        <p:spPr>
-          <a:xfrm>
-            <a:off x="11247120" y="6510528"/>
-            <a:ext cx="731520" cy="274320"/>
-          </a:xfrm>
-          <a:prstGeom prst="rect">
-            <a:avLst/>
-          </a:prstGeom>
-          <a:noFill/>
-        </p:spPr>
-        <p:txBody>
-          <a:bodyPr wrap="square" lIns="0" rIns="0" tIns="0" bIns="0" anchor="t">
-            <a:spAutoFit/>
-          </a:bodyPr>
-          <a:lstStyle/>
-          <a:p>
-            <a:pPr algn="r"/>
-            <a:r>
-              <a:rPr sz="900" b="0" i="0">
-                <a:solidFill>
-                  <a:srgbClr val="656B75"/>
-                </a:solidFill>
-                <a:latin typeface="Helvetica Neue"/>
-              </a:rPr>
-              <a:t>11</a:t>
             </a:r>
           </a:p>
         </p:txBody>
@@ -6164,7 +5843,7 @@
 </file>
 
 <file path=ppt/slides/slide2.xml><?xml version="1.0" encoding="utf-8"?>
-<p:sld xmlns:a="http://schemas.openxmlformats.org/drawingml/2006/main" xmlns:p="http://schemas.openxmlformats.org/presentationml/2006/main" xmlns:r="http://schemas.openxmlformats.org/officeDocument/2006/relationships">
+<p:sld xmlns:a="http://schemas.openxmlformats.org/drawingml/2006/main" xmlns:r="http://schemas.openxmlformats.org/officeDocument/2006/relationships" xmlns:p="http://schemas.openxmlformats.org/presentationml/2006/main">
   <p:cSld>
     <p:bg>
       <p:bgPr>
@@ -6180,86 +5859,14 @@
         <p:cNvGrpSpPr/>
         <p:nvPr/>
       </p:nvGrpSpPr>
-      <p:grpSpPr/>
-      <p:sp>
-        <p:nvSpPr>
-          <p:cNvPr id="2" name="TextBox 1"/>
-          <p:cNvSpPr txBox="1"/>
-          <p:nvPr/>
-        </p:nvSpPr>
-        <p:spPr>
-          <a:xfrm>
-            <a:off x="548640" y="411480"/>
-            <a:ext cx="6858000" cy="274320"/>
-          </a:xfrm>
-          <a:prstGeom prst="rect">
-            <a:avLst/>
-          </a:prstGeom>
-          <a:noFill/>
-        </p:spPr>
-        <p:txBody>
-          <a:bodyPr wrap="square" lIns="0" rIns="0" tIns="0" bIns="0" anchor="t">
-            <a:spAutoFit/>
-          </a:bodyPr>
-          <a:lstStyle/>
-          <a:p>
-            <a:pPr algn="l"/>
-            <a:r>
-              <a:rPr sz="1100" b="1" i="0">
-                <a:solidFill>
-                  <a:srgbClr val="7B9FE0"/>
-                </a:solidFill>
-                <a:latin typeface="Helvetica Neue"/>
-              </a:rPr>
-              <a:t>ACT I · EVALUATE</a:t>
-            </a:r>
-          </a:p>
-        </p:txBody>
-      </p:sp>
-      <p:sp>
-        <p:nvSpPr>
-          <p:cNvPr id="3" name="Rectangle 2"/>
-          <p:cNvSpPr/>
-          <p:nvPr/>
-        </p:nvSpPr>
-        <p:spPr>
-          <a:xfrm>
-            <a:off x="5120640" y="512064"/>
-            <a:ext cx="6583680" cy="9144"/>
-          </a:xfrm>
-          <a:prstGeom prst="rect">
-            <a:avLst/>
-          </a:prstGeom>
-          <a:solidFill>
-            <a:srgbClr val="282C35"/>
-          </a:solidFill>
-          <a:ln>
-            <a:noFill/>
-          </a:ln>
-          <a:effectLst/>
-        </p:spPr>
-        <p:style>
-          <a:lnRef idx="1">
-            <a:schemeClr val="accent1"/>
-          </a:lnRef>
-          <a:fillRef idx="3">
-            <a:schemeClr val="accent1"/>
-          </a:fillRef>
-          <a:effectRef idx="2">
-            <a:schemeClr val="accent1"/>
-          </a:effectRef>
-          <a:fontRef idx="minor">
-            <a:schemeClr val="lt1"/>
-          </a:fontRef>
-        </p:style>
-        <p:txBody>
-          <a:bodyPr rtlCol="0" anchor="ctr"/>
-          <a:lstStyle/>
-          <a:p>
-            <a:pPr algn="ctr"/>
-          </a:p>
-        </p:txBody>
-      </p:sp>
+      <p:grpSpPr>
+        <a:xfrm>
+          <a:off x="0" y="0"/>
+          <a:ext cx="0" cy="0"/>
+          <a:chOff x="0" y="0"/>
+          <a:chExt cx="0" cy="0"/>
+        </a:xfrm>
+      </p:grpSpPr>
       <p:sp>
         <p:nvSpPr>
           <p:cNvPr id="4" name="TextBox 3"/>
@@ -6277,7 +5884,7 @@
           <a:noFill/>
         </p:spPr>
         <p:txBody>
-          <a:bodyPr wrap="square" lIns="0" rIns="0" tIns="0" bIns="0" anchor="t">
+          <a:bodyPr wrap="square" lIns="0" tIns="0" rIns="0" bIns="0" anchor="t">
             <a:spAutoFit/>
           </a:bodyPr>
           <a:lstStyle/>
@@ -6304,7 +5911,7 @@
         <p:spPr>
           <a:xfrm>
             <a:off x="548640" y="1920240"/>
-            <a:ext cx="11091672" cy="457200"/>
+            <a:ext cx="11091672" cy="307777"/>
           </a:xfrm>
           <a:prstGeom prst="rect">
             <a:avLst/>
@@ -6312,14 +5919,14 @@
           <a:noFill/>
         </p:spPr>
         <p:txBody>
-          <a:bodyPr wrap="square" lIns="0" rIns="0" tIns="0" bIns="0" anchor="t">
+          <a:bodyPr wrap="square" lIns="0" tIns="0" rIns="0" bIns="0" anchor="t">
             <a:spAutoFit/>
           </a:bodyPr>
           <a:lstStyle/>
           <a:p>
             <a:pPr algn="l"/>
             <a:r>
-              <a:rPr sz="1800" b="0" i="0">
+              <a:rPr sz="2000" b="0" i="0" dirty="0">
                 <a:solidFill>
                   <a:srgbClr val="9AA1AB"/>
                 </a:solidFill>
@@ -6371,6 +5978,7 @@
           <a:lstStyle/>
           <a:p>
             <a:pPr algn="ctr"/>
+            <a:endParaRPr/>
           </a:p>
         </p:txBody>
       </p:sp>
@@ -6415,6 +6023,7 @@
           <a:lstStyle/>
           <a:p>
             <a:pPr algn="ctr"/>
+            <a:endParaRPr/>
           </a:p>
         </p:txBody>
       </p:sp>
@@ -6427,7 +6036,7 @@
         <p:spPr>
           <a:xfrm>
             <a:off x="699515" y="3474720"/>
-            <a:ext cx="3200400" cy="365760"/>
+            <a:ext cx="3200400" cy="215444"/>
           </a:xfrm>
           <a:prstGeom prst="rect">
             <a:avLst/>
@@ -6435,14 +6044,14 @@
           <a:noFill/>
         </p:spPr>
         <p:txBody>
-          <a:bodyPr wrap="square" lIns="0" rIns="0" tIns="0" bIns="0" anchor="t">
+          <a:bodyPr wrap="square" lIns="0" tIns="0" rIns="0" bIns="0" anchor="t">
             <a:spAutoFit/>
           </a:bodyPr>
           <a:lstStyle/>
           <a:p>
             <a:pPr algn="l"/>
             <a:r>
-              <a:rPr sz="1100" b="1" i="0">
+              <a:rPr sz="1400" b="1" i="0" dirty="0">
                 <a:solidFill>
                   <a:srgbClr val="7B9FE0"/>
                 </a:solidFill>
@@ -6450,6 +6059,12 @@
               </a:rPr>
               <a:t>INTERNAL</a:t>
             </a:r>
+            <a:endParaRPr sz="1100" b="1" i="0" dirty="0">
+              <a:solidFill>
+                <a:srgbClr val="7B9FE0"/>
+              </a:solidFill>
+              <a:latin typeface="Helvetica Neue"/>
+            </a:endParaRPr>
           </a:p>
         </p:txBody>
       </p:sp>
@@ -6462,7 +6077,7 @@
         <p:spPr>
           <a:xfrm>
             <a:off x="699515" y="3977639"/>
-            <a:ext cx="3200400" cy="1463040"/>
+            <a:ext cx="3200400" cy="830997"/>
           </a:xfrm>
           <a:prstGeom prst="rect">
             <a:avLst/>
@@ -6470,14 +6085,14 @@
           <a:noFill/>
         </p:spPr>
         <p:txBody>
-          <a:bodyPr wrap="square" lIns="0" rIns="0" tIns="0" bIns="0" anchor="t">
+          <a:bodyPr wrap="square" lIns="0" tIns="0" rIns="0" bIns="0" anchor="t">
             <a:spAutoFit/>
           </a:bodyPr>
           <a:lstStyle/>
           <a:p>
             <a:pPr algn="l"/>
             <a:r>
-              <a:rPr sz="1400" b="0" i="0">
+              <a:rPr b="0" i="0" dirty="0">
                 <a:solidFill>
                   <a:srgbClr val="F2F3F5"/>
                 </a:solidFill>
@@ -6529,6 +6144,7 @@
           <a:lstStyle/>
           <a:p>
             <a:pPr algn="ctr"/>
+            <a:endParaRPr/>
           </a:p>
         </p:txBody>
       </p:sp>
@@ -6573,6 +6189,7 @@
           <a:lstStyle/>
           <a:p>
             <a:pPr algn="ctr"/>
+            <a:endParaRPr/>
           </a:p>
         </p:txBody>
       </p:sp>
@@ -6585,7 +6202,7 @@
         <p:spPr>
           <a:xfrm>
             <a:off x="4539996" y="3474720"/>
-            <a:ext cx="3200400" cy="365760"/>
+            <a:ext cx="3200400" cy="215444"/>
           </a:xfrm>
           <a:prstGeom prst="rect">
             <a:avLst/>
@@ -6593,14 +6210,14 @@
           <a:noFill/>
         </p:spPr>
         <p:txBody>
-          <a:bodyPr wrap="square" lIns="0" rIns="0" tIns="0" bIns="0" anchor="t">
+          <a:bodyPr wrap="square" lIns="0" tIns="0" rIns="0" bIns="0" anchor="t">
             <a:spAutoFit/>
           </a:bodyPr>
           <a:lstStyle/>
           <a:p>
             <a:pPr algn="l"/>
             <a:r>
-              <a:rPr sz="1100" b="1" i="0">
+              <a:rPr sz="1400" b="1" i="0" dirty="0">
                 <a:solidFill>
                   <a:srgbClr val="E07BAA"/>
                 </a:solidFill>
@@ -6608,6 +6225,12 @@
               </a:rPr>
               <a:t>EXTERNAL</a:t>
             </a:r>
+            <a:endParaRPr sz="1100" b="1" i="0" dirty="0">
+              <a:solidFill>
+                <a:srgbClr val="E07BAA"/>
+              </a:solidFill>
+              <a:latin typeface="Helvetica Neue"/>
+            </a:endParaRPr>
           </a:p>
         </p:txBody>
       </p:sp>
@@ -6620,7 +6243,7 @@
         <p:spPr>
           <a:xfrm>
             <a:off x="4539996" y="3977639"/>
-            <a:ext cx="3200400" cy="1463040"/>
+            <a:ext cx="3200400" cy="830997"/>
           </a:xfrm>
           <a:prstGeom prst="rect">
             <a:avLst/>
@@ -6628,14 +6251,14 @@
           <a:noFill/>
         </p:spPr>
         <p:txBody>
-          <a:bodyPr wrap="square" lIns="0" rIns="0" tIns="0" bIns="0" anchor="t">
+          <a:bodyPr wrap="square" lIns="0" tIns="0" rIns="0" bIns="0" anchor="t">
             <a:spAutoFit/>
           </a:bodyPr>
           <a:lstStyle/>
           <a:p>
             <a:pPr algn="l"/>
             <a:r>
-              <a:rPr sz="1400" b="0" i="0">
+              <a:rPr b="0" i="0">
                 <a:solidFill>
                   <a:srgbClr val="F2F3F5"/>
                 </a:solidFill>
@@ -6687,6 +6310,7 @@
           <a:lstStyle/>
           <a:p>
             <a:pPr algn="ctr"/>
+            <a:endParaRPr/>
           </a:p>
         </p:txBody>
       </p:sp>
@@ -6731,6 +6355,7 @@
           <a:lstStyle/>
           <a:p>
             <a:pPr algn="ctr"/>
+            <a:endParaRPr/>
           </a:p>
         </p:txBody>
       </p:sp>
@@ -6743,7 +6368,7 @@
         <p:spPr>
           <a:xfrm>
             <a:off x="8380476" y="3474720"/>
-            <a:ext cx="3200400" cy="365760"/>
+            <a:ext cx="3200400" cy="215444"/>
           </a:xfrm>
           <a:prstGeom prst="rect">
             <a:avLst/>
@@ -6751,14 +6376,14 @@
           <a:noFill/>
         </p:spPr>
         <p:txBody>
-          <a:bodyPr wrap="square" lIns="0" rIns="0" tIns="0" bIns="0" anchor="t">
+          <a:bodyPr wrap="square" lIns="0" tIns="0" rIns="0" bIns="0" anchor="t">
             <a:spAutoFit/>
           </a:bodyPr>
           <a:lstStyle/>
           <a:p>
             <a:pPr algn="l"/>
             <a:r>
-              <a:rPr sz="1100" b="1" i="0">
+              <a:rPr sz="1400" b="1" i="0">
                 <a:solidFill>
                   <a:srgbClr val="E0C27B"/>
                 </a:solidFill>
@@ -6778,7 +6403,7 @@
         <p:spPr>
           <a:xfrm>
             <a:off x="8380476" y="3977639"/>
-            <a:ext cx="3200400" cy="1463040"/>
+            <a:ext cx="3200400" cy="830997"/>
           </a:xfrm>
           <a:prstGeom prst="rect">
             <a:avLst/>
@@ -6786,14 +6411,14 @@
           <a:noFill/>
         </p:spPr>
         <p:txBody>
-          <a:bodyPr wrap="square" lIns="0" rIns="0" tIns="0" bIns="0" anchor="t">
+          <a:bodyPr wrap="square" lIns="0" tIns="0" rIns="0" bIns="0" anchor="t">
             <a:spAutoFit/>
           </a:bodyPr>
           <a:lstStyle/>
           <a:p>
             <a:pPr algn="l"/>
             <a:r>
-              <a:rPr sz="1400" b="0" i="0">
+              <a:rPr b="0" i="0" dirty="0">
                 <a:solidFill>
                   <a:srgbClr val="F2F3F5"/>
                 </a:solidFill>
@@ -6806,14 +6431,20 @@
       </p:sp>
       <p:sp>
         <p:nvSpPr>
-          <p:cNvPr id="18" name="TextBox 17"/>
+          <p:cNvPr id="19" name="TextBox 18">
+            <a:extLst>
+              <a:ext uri="{FF2B5EF4-FFF2-40B4-BE49-F238E27FC236}">
+                <a16:creationId xmlns:a16="http://schemas.microsoft.com/office/drawing/2014/main" id="{60D48785-82E3-0B38-6BCD-54C15B3BBFE4}"/>
+              </a:ext>
+            </a:extLst>
+          </p:cNvPr>
           <p:cNvSpPr txBox="1"/>
           <p:nvPr/>
         </p:nvSpPr>
         <p:spPr>
           <a:xfrm>
-            <a:off x="11247120" y="6510528"/>
-            <a:ext cx="731520" cy="274320"/>
+            <a:off x="548640" y="411480"/>
+            <a:ext cx="6858000" cy="169277"/>
           </a:xfrm>
           <a:prstGeom prst="rect">
             <a:avLst/>
@@ -6821,21 +6452,27 @@
           <a:noFill/>
         </p:spPr>
         <p:txBody>
-          <a:bodyPr wrap="square" lIns="0" rIns="0" tIns="0" bIns="0" anchor="t">
+          <a:bodyPr wrap="square" lIns="0" tIns="0" rIns="0" bIns="0" anchor="t">
             <a:spAutoFit/>
           </a:bodyPr>
           <a:lstStyle/>
           <a:p>
-            <a:pPr algn="r"/>
-            <a:r>
-              <a:rPr sz="900" b="0" i="0">
-                <a:solidFill>
-                  <a:srgbClr val="656B75"/>
+            <a:pPr algn="l"/>
+            <a:r>
+              <a:rPr lang="en-US" sz="1100" b="1" i="0" dirty="0">
+                <a:solidFill>
+                  <a:srgbClr val="7B9FE0"/>
                 </a:solidFill>
                 <a:latin typeface="Helvetica Neue"/>
               </a:rPr>
-              <a:t>2</a:t>
-            </a:r>
+              <a:t>RESEARCH</a:t>
+            </a:r>
+            <a:endParaRPr sz="1100" b="1" i="0" dirty="0">
+              <a:solidFill>
+                <a:srgbClr val="7B9FE0"/>
+              </a:solidFill>
+              <a:latin typeface="Helvetica Neue"/>
+            </a:endParaRPr>
           </a:p>
         </p:txBody>
       </p:sp>
@@ -6848,7 +6485,7 @@
 </file>
 
 <file path=ppt/slides/slide3.xml><?xml version="1.0" encoding="utf-8"?>
-<p:sld xmlns:a="http://schemas.openxmlformats.org/drawingml/2006/main" xmlns:p="http://schemas.openxmlformats.org/presentationml/2006/main" xmlns:r="http://schemas.openxmlformats.org/officeDocument/2006/relationships">
+<p:sld xmlns:a="http://schemas.openxmlformats.org/drawingml/2006/main" xmlns:r="http://schemas.openxmlformats.org/officeDocument/2006/relationships" xmlns:p="http://schemas.openxmlformats.org/presentationml/2006/main">
   <p:cSld>
     <p:bg>
       <p:bgPr>
@@ -6864,7 +6501,14 @@
         <p:cNvGrpSpPr/>
         <p:nvPr/>
       </p:nvGrpSpPr>
-      <p:grpSpPr/>
+      <p:grpSpPr>
+        <a:xfrm>
+          <a:off x="0" y="0"/>
+          <a:ext cx="0" cy="0"/>
+          <a:chOff x="0" y="0"/>
+          <a:chExt cx="0" cy="0"/>
+        </a:xfrm>
+      </p:grpSpPr>
       <p:sp>
         <p:nvSpPr>
           <p:cNvPr id="2" name="TextBox 1"/>
@@ -6874,7 +6518,7 @@
         <p:spPr>
           <a:xfrm>
             <a:off x="548640" y="411480"/>
-            <a:ext cx="6858000" cy="274320"/>
+            <a:ext cx="6858000" cy="169277"/>
           </a:xfrm>
           <a:prstGeom prst="rect">
             <a:avLst/>
@@ -6882,65 +6526,27 @@
           <a:noFill/>
         </p:spPr>
         <p:txBody>
-          <a:bodyPr wrap="square" lIns="0" rIns="0" tIns="0" bIns="0" anchor="t">
+          <a:bodyPr wrap="square" lIns="0" tIns="0" rIns="0" bIns="0" anchor="t">
             <a:spAutoFit/>
           </a:bodyPr>
           <a:lstStyle/>
           <a:p>
             <a:pPr algn="l"/>
             <a:r>
-              <a:rPr sz="1100" b="1" i="0">
+              <a:rPr lang="en-US" sz="1100" b="1" i="0" dirty="0">
                 <a:solidFill>
                   <a:srgbClr val="7B9FE0"/>
                 </a:solidFill>
                 <a:latin typeface="Helvetica Neue"/>
               </a:rPr>
-              <a:t>ACT I · EVALUATE</a:t>
-            </a:r>
-          </a:p>
-        </p:txBody>
-      </p:sp>
-      <p:sp>
-        <p:nvSpPr>
-          <p:cNvPr id="3" name="Rectangle 2"/>
-          <p:cNvSpPr/>
-          <p:nvPr/>
-        </p:nvSpPr>
-        <p:spPr>
-          <a:xfrm>
-            <a:off x="5120640" y="512064"/>
-            <a:ext cx="6583680" cy="9144"/>
-          </a:xfrm>
-          <a:prstGeom prst="rect">
-            <a:avLst/>
-          </a:prstGeom>
-          <a:solidFill>
-            <a:srgbClr val="282C35"/>
-          </a:solidFill>
-          <a:ln>
-            <a:noFill/>
-          </a:ln>
-          <a:effectLst/>
-        </p:spPr>
-        <p:style>
-          <a:lnRef idx="1">
-            <a:schemeClr val="accent1"/>
-          </a:lnRef>
-          <a:fillRef idx="3">
-            <a:schemeClr val="accent1"/>
-          </a:fillRef>
-          <a:effectRef idx="2">
-            <a:schemeClr val="accent1"/>
-          </a:effectRef>
-          <a:fontRef idx="minor">
-            <a:schemeClr val="lt1"/>
-          </a:fontRef>
-        </p:style>
-        <p:txBody>
-          <a:bodyPr rtlCol="0" anchor="ctr"/>
-          <a:lstStyle/>
-          <a:p>
-            <a:pPr algn="ctr"/>
+              <a:t>RESEARCH</a:t>
+            </a:r>
+            <a:endParaRPr sz="1100" b="1" i="0" dirty="0">
+              <a:solidFill>
+                <a:srgbClr val="7B9FE0"/>
+              </a:solidFill>
+              <a:latin typeface="Helvetica Neue"/>
+            </a:endParaRPr>
           </a:p>
         </p:txBody>
       </p:sp>
@@ -6961,7 +6567,7 @@
           <a:noFill/>
         </p:spPr>
         <p:txBody>
-          <a:bodyPr wrap="square" lIns="0" rIns="0" tIns="0" bIns="0" anchor="t">
+          <a:bodyPr wrap="square" lIns="0" tIns="0" rIns="0" bIns="0" anchor="t">
             <a:spAutoFit/>
           </a:bodyPr>
           <a:lstStyle/>
@@ -6988,7 +6594,7 @@
         <p:spPr>
           <a:xfrm>
             <a:off x="548640" y="1874519"/>
-            <a:ext cx="11091672" cy="411480"/>
+            <a:ext cx="11091672" cy="307777"/>
           </a:xfrm>
           <a:prstGeom prst="rect">
             <a:avLst/>
@@ -6996,14 +6602,14 @@
           <a:noFill/>
         </p:spPr>
         <p:txBody>
-          <a:bodyPr wrap="square" lIns="0" rIns="0" tIns="0" bIns="0" anchor="t">
+          <a:bodyPr wrap="square" lIns="0" tIns="0" rIns="0" bIns="0" anchor="t">
             <a:spAutoFit/>
           </a:bodyPr>
           <a:lstStyle/>
           <a:p>
             <a:pPr algn="l"/>
             <a:r>
-              <a:rPr sz="1400" b="0" i="1">
+              <a:rPr sz="2000" b="0" i="1">
                 <a:solidFill>
                   <a:srgbClr val="9AA1AB"/>
                 </a:solidFill>
@@ -7055,6 +6661,7 @@
           <a:lstStyle/>
           <a:p>
             <a:pPr algn="ctr"/>
+            <a:endParaRPr/>
           </a:p>
         </p:txBody>
       </p:sp>
@@ -7099,6 +6706,7 @@
           <a:lstStyle/>
           <a:p>
             <a:pPr algn="ctr"/>
+            <a:endParaRPr/>
           </a:p>
         </p:txBody>
       </p:sp>
@@ -7111,7 +6719,7 @@
         <p:spPr>
           <a:xfrm>
             <a:off x="722375" y="3154680"/>
-            <a:ext cx="3154680" cy="365760"/>
+            <a:ext cx="3154680" cy="215444"/>
           </a:xfrm>
           <a:prstGeom prst="rect">
             <a:avLst/>
@@ -7119,14 +6727,14 @@
           <a:noFill/>
         </p:spPr>
         <p:txBody>
-          <a:bodyPr wrap="square" lIns="0" rIns="0" tIns="0" bIns="0" anchor="t">
+          <a:bodyPr wrap="square" lIns="0" tIns="0" rIns="0" bIns="0" anchor="t">
             <a:spAutoFit/>
           </a:bodyPr>
           <a:lstStyle/>
           <a:p>
             <a:pPr algn="l"/>
             <a:r>
-              <a:rPr sz="1100" b="1" i="0">
+              <a:rPr sz="1400" b="1" i="0">
                 <a:solidFill>
                   <a:srgbClr val="7B9FE0"/>
                 </a:solidFill>
@@ -7154,7 +6762,7 @@
           <a:noFill/>
         </p:spPr>
         <p:txBody>
-          <a:bodyPr wrap="square" lIns="0" rIns="0" tIns="0" bIns="0" anchor="t">
+          <a:bodyPr wrap="square" lIns="0" tIns="0" rIns="0" bIns="0" anchor="t">
             <a:spAutoFit/>
           </a:bodyPr>
           <a:lstStyle/>
@@ -7189,7 +6797,7 @@
           <a:noFill/>
         </p:spPr>
         <p:txBody>
-          <a:bodyPr wrap="square" lIns="0" rIns="0" tIns="0" bIns="0" anchor="t">
+          <a:bodyPr wrap="square" lIns="0" tIns="0" rIns="0" bIns="0" anchor="t">
             <a:spAutoFit/>
           </a:bodyPr>
           <a:lstStyle/>
@@ -7248,6 +6856,7 @@
           <a:lstStyle/>
           <a:p>
             <a:pPr algn="ctr"/>
+            <a:endParaRPr/>
           </a:p>
         </p:txBody>
       </p:sp>
@@ -7292,6 +6901,7 @@
           <a:lstStyle/>
           <a:p>
             <a:pPr algn="ctr"/>
+            <a:endParaRPr/>
           </a:p>
         </p:txBody>
       </p:sp>
@@ -7304,7 +6914,7 @@
         <p:spPr>
           <a:xfrm>
             <a:off x="4562855" y="3154680"/>
-            <a:ext cx="3154680" cy="365760"/>
+            <a:ext cx="3154680" cy="215444"/>
           </a:xfrm>
           <a:prstGeom prst="rect">
             <a:avLst/>
@@ -7312,14 +6922,14 @@
           <a:noFill/>
         </p:spPr>
         <p:txBody>
-          <a:bodyPr wrap="square" lIns="0" rIns="0" tIns="0" bIns="0" anchor="t">
+          <a:bodyPr wrap="square" lIns="0" tIns="0" rIns="0" bIns="0" anchor="t">
             <a:spAutoFit/>
           </a:bodyPr>
           <a:lstStyle/>
           <a:p>
             <a:pPr algn="l"/>
             <a:r>
-              <a:rPr sz="1100" b="1" i="0">
+              <a:rPr sz="1400" b="1" i="0">
                 <a:solidFill>
                   <a:srgbClr val="E0C27B"/>
                 </a:solidFill>
@@ -7347,7 +6957,7 @@
           <a:noFill/>
         </p:spPr>
         <p:txBody>
-          <a:bodyPr wrap="square" lIns="0" rIns="0" tIns="0" bIns="0" anchor="t">
+          <a:bodyPr wrap="square" lIns="0" tIns="0" rIns="0" bIns="0" anchor="t">
             <a:spAutoFit/>
           </a:bodyPr>
           <a:lstStyle/>
@@ -7382,7 +6992,7 @@
           <a:noFill/>
         </p:spPr>
         <p:txBody>
-          <a:bodyPr wrap="square" lIns="0" rIns="0" tIns="0" bIns="0" anchor="t">
+          <a:bodyPr wrap="square" lIns="0" tIns="0" rIns="0" bIns="0" anchor="t">
             <a:spAutoFit/>
           </a:bodyPr>
           <a:lstStyle/>
@@ -7441,6 +7051,7 @@
           <a:lstStyle/>
           <a:p>
             <a:pPr algn="ctr"/>
+            <a:endParaRPr/>
           </a:p>
         </p:txBody>
       </p:sp>
@@ -7485,6 +7096,7 @@
           <a:lstStyle/>
           <a:p>
             <a:pPr algn="ctr"/>
+            <a:endParaRPr/>
           </a:p>
         </p:txBody>
       </p:sp>
@@ -7497,7 +7109,7 @@
         <p:spPr>
           <a:xfrm>
             <a:off x="8403336" y="3154680"/>
-            <a:ext cx="3154680" cy="365760"/>
+            <a:ext cx="3154680" cy="215444"/>
           </a:xfrm>
           <a:prstGeom prst="rect">
             <a:avLst/>
@@ -7505,14 +7117,14 @@
           <a:noFill/>
         </p:spPr>
         <p:txBody>
-          <a:bodyPr wrap="square" lIns="0" rIns="0" tIns="0" bIns="0" anchor="t">
+          <a:bodyPr wrap="square" lIns="0" tIns="0" rIns="0" bIns="0" anchor="t">
             <a:spAutoFit/>
           </a:bodyPr>
           <a:lstStyle/>
           <a:p>
             <a:pPr algn="l"/>
             <a:r>
-              <a:rPr sz="1100" b="1" i="0">
+              <a:rPr sz="1400" b="1" i="0">
                 <a:solidFill>
                   <a:srgbClr val="E07B7B"/>
                 </a:solidFill>
@@ -7532,7 +7144,7 @@
         <p:spPr>
           <a:xfrm>
             <a:off x="8403336" y="3749039"/>
-            <a:ext cx="3154680" cy="777240"/>
+            <a:ext cx="3154680" cy="461665"/>
           </a:xfrm>
           <a:prstGeom prst="rect">
             <a:avLst/>
@@ -7540,20 +7152,47 @@
           <a:noFill/>
         </p:spPr>
         <p:txBody>
-          <a:bodyPr wrap="square" lIns="0" rIns="0" tIns="0" bIns="0" anchor="t">
+          <a:bodyPr wrap="square" lIns="0" tIns="0" rIns="0" bIns="0" anchor="t">
             <a:spAutoFit/>
           </a:bodyPr>
           <a:lstStyle/>
           <a:p>
             <a:pPr algn="l"/>
             <a:r>
-              <a:rPr sz="3000" b="1" i="0">
+              <a:rPr lang="en-US" sz="3000" b="1" dirty="0">
                 <a:solidFill>
                   <a:srgbClr val="F2F3F5"/>
                 </a:solidFill>
                 <a:latin typeface="Helvetica Neue"/>
               </a:rPr>
-              <a:t>not assessed</a:t>
+              <a:t>N</a:t>
+            </a:r>
+            <a:r>
+              <a:rPr sz="3000" b="1" i="0" dirty="0">
+                <a:solidFill>
+                  <a:srgbClr val="F2F3F5"/>
+                </a:solidFill>
+                <a:latin typeface="Helvetica Neue"/>
+              </a:rPr>
+              <a:t>ot </a:t>
+            </a:r>
+            <a:r>
+              <a:rPr lang="en-US" sz="3000" b="1" dirty="0">
+                <a:solidFill>
+                  <a:srgbClr val="F2F3F5"/>
+                </a:solidFill>
+                <a:latin typeface="Helvetica Neue"/>
+              </a:rPr>
+              <a:t>A</a:t>
+            </a:r>
+            <a:r>
+              <a:rPr sz="3000" b="1" i="0" dirty="0">
+                <a:solidFill>
+                  <a:srgbClr val="F2F3F5"/>
+                </a:solidFill>
+                <a:latin typeface="Helvetica Neue"/>
+              </a:rPr>
+              <a:t>ssessed</a:t>
             </a:r>
           </a:p>
         </p:txBody>
@@ -7575,7 +7214,7 @@
           <a:noFill/>
         </p:spPr>
         <p:txBody>
-          <a:bodyPr wrap="square" lIns="0" rIns="0" tIns="0" bIns="0" anchor="t">
+          <a:bodyPr wrap="square" lIns="0" tIns="0" rIns="0" bIns="0" anchor="t">
             <a:spAutoFit/>
           </a:bodyPr>
           <a:lstStyle/>
@@ -7589,41 +7228,6 @@
                 <a:latin typeface="Helvetica Neue"/>
               </a:rPr>
               <a:t>"No other skills were assessed."</a:t>
-            </a:r>
-          </a:p>
-        </p:txBody>
-      </p:sp>
-      <p:sp>
-        <p:nvSpPr>
-          <p:cNvPr id="21" name="TextBox 20"/>
-          <p:cNvSpPr txBox="1"/>
-          <p:nvPr/>
-        </p:nvSpPr>
-        <p:spPr>
-          <a:xfrm>
-            <a:off x="11247120" y="6510528"/>
-            <a:ext cx="731520" cy="274320"/>
-          </a:xfrm>
-          <a:prstGeom prst="rect">
-            <a:avLst/>
-          </a:prstGeom>
-          <a:noFill/>
-        </p:spPr>
-        <p:txBody>
-          <a:bodyPr wrap="square" lIns="0" rIns="0" tIns="0" bIns="0" anchor="t">
-            <a:spAutoFit/>
-          </a:bodyPr>
-          <a:lstStyle/>
-          <a:p>
-            <a:pPr algn="r"/>
-            <a:r>
-              <a:rPr sz="900" b="0" i="0">
-                <a:solidFill>
-                  <a:srgbClr val="656B75"/>
-                </a:solidFill>
-                <a:latin typeface="Helvetica Neue"/>
-              </a:rPr>
-              <a:t>3</a:t>
             </a:r>
           </a:p>
         </p:txBody>
@@ -7637,7 +7241,7 @@
 </file>
 
 <file path=ppt/slides/slide4.xml><?xml version="1.0" encoding="utf-8"?>
-<p:sld xmlns:a="http://schemas.openxmlformats.org/drawingml/2006/main" xmlns:p="http://schemas.openxmlformats.org/presentationml/2006/main" xmlns:r="http://schemas.openxmlformats.org/officeDocument/2006/relationships">
+<p:sld xmlns:a="http://schemas.openxmlformats.org/drawingml/2006/main" xmlns:r="http://schemas.openxmlformats.org/officeDocument/2006/relationships" xmlns:p="http://schemas.openxmlformats.org/presentationml/2006/main">
   <p:cSld>
     <p:bg>
       <p:bgPr>
@@ -7653,7 +7257,14 @@
         <p:cNvGrpSpPr/>
         <p:nvPr/>
       </p:nvGrpSpPr>
-      <p:grpSpPr/>
+      <p:grpSpPr>
+        <a:xfrm>
+          <a:off x="0" y="0"/>
+          <a:ext cx="0" cy="0"/>
+          <a:chOff x="0" y="0"/>
+          <a:chExt cx="0" cy="0"/>
+        </a:xfrm>
+      </p:grpSpPr>
       <p:sp>
         <p:nvSpPr>
           <p:cNvPr id="2" name="TextBox 1"/>
@@ -7663,7 +7274,7 @@
         <p:spPr>
           <a:xfrm>
             <a:off x="548640" y="411480"/>
-            <a:ext cx="6858000" cy="274320"/>
+            <a:ext cx="6858000" cy="169277"/>
           </a:xfrm>
           <a:prstGeom prst="rect">
             <a:avLst/>
@@ -7671,65 +7282,27 @@
           <a:noFill/>
         </p:spPr>
         <p:txBody>
-          <a:bodyPr wrap="square" lIns="0" rIns="0" tIns="0" bIns="0" anchor="t">
+          <a:bodyPr wrap="square" lIns="0" tIns="0" rIns="0" bIns="0" anchor="t">
             <a:spAutoFit/>
           </a:bodyPr>
           <a:lstStyle/>
           <a:p>
             <a:pPr algn="l"/>
             <a:r>
-              <a:rPr sz="1100" b="1" i="0">
+              <a:rPr lang="en-US" sz="1100" b="1" i="0" dirty="0">
                 <a:solidFill>
                   <a:srgbClr val="E07BAA"/>
                 </a:solidFill>
                 <a:latin typeface="Helvetica Neue"/>
               </a:rPr>
-              <a:t>ACT II · ANALYZE</a:t>
-            </a:r>
-          </a:p>
-        </p:txBody>
-      </p:sp>
-      <p:sp>
-        <p:nvSpPr>
-          <p:cNvPr id="3" name="Rectangle 2"/>
-          <p:cNvSpPr/>
-          <p:nvPr/>
-        </p:nvSpPr>
-        <p:spPr>
-          <a:xfrm>
-            <a:off x="5120640" y="512064"/>
-            <a:ext cx="6583680" cy="9144"/>
-          </a:xfrm>
-          <a:prstGeom prst="rect">
-            <a:avLst/>
-          </a:prstGeom>
-          <a:solidFill>
-            <a:srgbClr val="282C35"/>
-          </a:solidFill>
-          <a:ln>
-            <a:noFill/>
-          </a:ln>
-          <a:effectLst/>
-        </p:spPr>
-        <p:style>
-          <a:lnRef idx="1">
-            <a:schemeClr val="accent1"/>
-          </a:lnRef>
-          <a:fillRef idx="3">
-            <a:schemeClr val="accent1"/>
-          </a:fillRef>
-          <a:effectRef idx="2">
-            <a:schemeClr val="accent1"/>
-          </a:effectRef>
-          <a:fontRef idx="minor">
-            <a:schemeClr val="lt1"/>
-          </a:fontRef>
-        </p:style>
-        <p:txBody>
-          <a:bodyPr rtlCol="0" anchor="ctr"/>
-          <a:lstStyle/>
-          <a:p>
-            <a:pPr algn="ctr"/>
+              <a:t>ANALYSIS</a:t>
+            </a:r>
+            <a:endParaRPr sz="1100" b="1" i="0" dirty="0">
+              <a:solidFill>
+                <a:srgbClr val="E07BAA"/>
+              </a:solidFill>
+              <a:latin typeface="Helvetica Neue"/>
+            </a:endParaRPr>
           </a:p>
         </p:txBody>
       </p:sp>
@@ -7750,7 +7323,7 @@
           <a:noFill/>
         </p:spPr>
         <p:txBody>
-          <a:bodyPr wrap="square" lIns="0" rIns="0" tIns="0" bIns="0" anchor="t">
+          <a:bodyPr wrap="square" lIns="0" tIns="0" rIns="0" bIns="0" anchor="t">
             <a:spAutoFit/>
           </a:bodyPr>
           <a:lstStyle/>
@@ -7777,7 +7350,7 @@
         <p:spPr>
           <a:xfrm>
             <a:off x="548640" y="1874519"/>
-            <a:ext cx="11091672" cy="411480"/>
+            <a:ext cx="11091672" cy="307777"/>
           </a:xfrm>
           <a:prstGeom prst="rect">
             <a:avLst/>
@@ -7785,14 +7358,14 @@
           <a:noFill/>
         </p:spPr>
         <p:txBody>
-          <a:bodyPr wrap="square" lIns="0" rIns="0" tIns="0" bIns="0" anchor="t">
+          <a:bodyPr wrap="square" lIns="0" tIns="0" rIns="0" bIns="0" anchor="t">
             <a:spAutoFit/>
           </a:bodyPr>
           <a:lstStyle/>
           <a:p>
             <a:pPr algn="l"/>
             <a:r>
-              <a:rPr sz="1400" b="0" i="1">
+              <a:rPr sz="2000" b="0" i="1" dirty="0">
                 <a:solidFill>
                   <a:srgbClr val="9AA1AB"/>
                 </a:solidFill>
@@ -7844,6 +7417,7 @@
           <a:lstStyle/>
           <a:p>
             <a:pPr algn="ctr"/>
+            <a:endParaRPr/>
           </a:p>
         </p:txBody>
       </p:sp>
@@ -7888,6 +7462,7 @@
           <a:lstStyle/>
           <a:p>
             <a:pPr algn="ctr"/>
+            <a:endParaRPr/>
           </a:p>
         </p:txBody>
       </p:sp>
@@ -7900,7 +7475,7 @@
         <p:spPr>
           <a:xfrm>
             <a:off x="790956" y="2834640"/>
-            <a:ext cx="5029200" cy="365760"/>
+            <a:ext cx="5029200" cy="215444"/>
           </a:xfrm>
           <a:prstGeom prst="rect">
             <a:avLst/>
@@ -7908,14 +7483,14 @@
           <a:noFill/>
         </p:spPr>
         <p:txBody>
-          <a:bodyPr wrap="square" lIns="0" rIns="0" tIns="0" bIns="0" anchor="t">
+          <a:bodyPr wrap="square" lIns="0" tIns="0" rIns="0" bIns="0" anchor="t">
             <a:spAutoFit/>
           </a:bodyPr>
           <a:lstStyle/>
           <a:p>
             <a:pPr algn="l"/>
             <a:r>
-              <a:rPr sz="1100" b="1" i="0">
+              <a:rPr sz="1400" b="1" i="0">
                 <a:solidFill>
                   <a:srgbClr val="7B9FE0"/>
                 </a:solidFill>
@@ -7935,7 +7510,7 @@
         <p:spPr>
           <a:xfrm>
             <a:off x="790956" y="3291840"/>
-            <a:ext cx="5029200" cy="914400"/>
+            <a:ext cx="5029200" cy="553998"/>
           </a:xfrm>
           <a:prstGeom prst="rect">
             <a:avLst/>
@@ -7943,14 +7518,14 @@
           <a:noFill/>
         </p:spPr>
         <p:txBody>
-          <a:bodyPr wrap="square" lIns="0" rIns="0" tIns="0" bIns="0" anchor="t">
+          <a:bodyPr wrap="square" lIns="0" tIns="0" rIns="0" bIns="0" anchor="t">
             <a:spAutoFit/>
           </a:bodyPr>
           <a:lstStyle/>
           <a:p>
             <a:pPr algn="l"/>
             <a:r>
-              <a:rPr sz="1400" b="0" i="0">
+              <a:rPr b="0" i="0" dirty="0">
                 <a:solidFill>
                   <a:srgbClr val="F2F3F5"/>
                 </a:solidFill>
@@ -8002,6 +7577,7 @@
           <a:lstStyle/>
           <a:p>
             <a:pPr algn="ctr"/>
+            <a:endParaRPr/>
           </a:p>
         </p:txBody>
       </p:sp>
@@ -8046,6 +7622,7 @@
           <a:lstStyle/>
           <a:p>
             <a:pPr algn="ctr"/>
+            <a:endParaRPr/>
           </a:p>
         </p:txBody>
       </p:sp>
@@ -8058,7 +7635,7 @@
         <p:spPr>
           <a:xfrm>
             <a:off x="6460236" y="2834640"/>
-            <a:ext cx="5029200" cy="365760"/>
+            <a:ext cx="5029200" cy="215444"/>
           </a:xfrm>
           <a:prstGeom prst="rect">
             <a:avLst/>
@@ -8066,14 +7643,14 @@
           <a:noFill/>
         </p:spPr>
         <p:txBody>
-          <a:bodyPr wrap="square" lIns="0" rIns="0" tIns="0" bIns="0" anchor="t">
+          <a:bodyPr wrap="square" lIns="0" tIns="0" rIns="0" bIns="0" anchor="t">
             <a:spAutoFit/>
           </a:bodyPr>
           <a:lstStyle/>
           <a:p>
             <a:pPr algn="l"/>
             <a:r>
-              <a:rPr sz="1100" b="1" i="0">
+              <a:rPr sz="1400" b="1" i="0">
                 <a:solidFill>
                   <a:srgbClr val="E07BAA"/>
                 </a:solidFill>
@@ -8093,7 +7670,7 @@
         <p:spPr>
           <a:xfrm>
             <a:off x="6460236" y="3291840"/>
-            <a:ext cx="5029200" cy="914400"/>
+            <a:ext cx="5029200" cy="553998"/>
           </a:xfrm>
           <a:prstGeom prst="rect">
             <a:avLst/>
@@ -8101,14 +7678,14 @@
           <a:noFill/>
         </p:spPr>
         <p:txBody>
-          <a:bodyPr wrap="square" lIns="0" rIns="0" tIns="0" bIns="0" anchor="t">
+          <a:bodyPr wrap="square" lIns="0" tIns="0" rIns="0" bIns="0" anchor="t">
             <a:spAutoFit/>
           </a:bodyPr>
           <a:lstStyle/>
           <a:p>
             <a:pPr algn="l"/>
             <a:r>
-              <a:rPr sz="1400" b="0" i="0">
+              <a:rPr b="0" i="0" dirty="0">
                 <a:solidFill>
                   <a:srgbClr val="F2F3F5"/>
                 </a:solidFill>
@@ -8160,6 +7737,7 @@
           <a:lstStyle/>
           <a:p>
             <a:pPr algn="ctr"/>
+            <a:endParaRPr/>
           </a:p>
         </p:txBody>
       </p:sp>
@@ -8204,6 +7782,7 @@
           <a:lstStyle/>
           <a:p>
             <a:pPr algn="ctr"/>
+            <a:endParaRPr/>
           </a:p>
         </p:txBody>
       </p:sp>
@@ -8216,7 +7795,7 @@
         <p:spPr>
           <a:xfrm>
             <a:off x="790956" y="4709160"/>
-            <a:ext cx="5029200" cy="365760"/>
+            <a:ext cx="5029200" cy="215444"/>
           </a:xfrm>
           <a:prstGeom prst="rect">
             <a:avLst/>
@@ -8224,14 +7803,14 @@
           <a:noFill/>
         </p:spPr>
         <p:txBody>
-          <a:bodyPr wrap="square" lIns="0" rIns="0" tIns="0" bIns="0" anchor="t">
+          <a:bodyPr wrap="square" lIns="0" tIns="0" rIns="0" bIns="0" anchor="t">
             <a:spAutoFit/>
           </a:bodyPr>
           <a:lstStyle/>
           <a:p>
             <a:pPr algn="l"/>
             <a:r>
-              <a:rPr sz="1100" b="1" i="0">
+              <a:rPr sz="1400" b="1" i="0">
                 <a:solidFill>
                   <a:srgbClr val="E0C27B"/>
                 </a:solidFill>
@@ -8251,7 +7830,7 @@
         <p:spPr>
           <a:xfrm>
             <a:off x="790956" y="5166360"/>
-            <a:ext cx="5029200" cy="914400"/>
+            <a:ext cx="5029200" cy="553998"/>
           </a:xfrm>
           <a:prstGeom prst="rect">
             <a:avLst/>
@@ -8259,14 +7838,14 @@
           <a:noFill/>
         </p:spPr>
         <p:txBody>
-          <a:bodyPr wrap="square" lIns="0" rIns="0" tIns="0" bIns="0" anchor="t">
+          <a:bodyPr wrap="square" lIns="0" tIns="0" rIns="0" bIns="0" anchor="t">
             <a:spAutoFit/>
           </a:bodyPr>
           <a:lstStyle/>
           <a:p>
             <a:pPr algn="l"/>
             <a:r>
-              <a:rPr sz="1400" b="0" i="0">
+              <a:rPr b="0" i="0">
                 <a:solidFill>
                   <a:srgbClr val="F2F3F5"/>
                 </a:solidFill>
@@ -8318,6 +7897,7 @@
           <a:lstStyle/>
           <a:p>
             <a:pPr algn="ctr"/>
+            <a:endParaRPr/>
           </a:p>
         </p:txBody>
       </p:sp>
@@ -8362,6 +7942,7 @@
           <a:lstStyle/>
           <a:p>
             <a:pPr algn="ctr"/>
+            <a:endParaRPr/>
           </a:p>
         </p:txBody>
       </p:sp>
@@ -8374,7 +7955,7 @@
         <p:spPr>
           <a:xfrm>
             <a:off x="6460236" y="4709160"/>
-            <a:ext cx="5029200" cy="365760"/>
+            <a:ext cx="5029200" cy="215444"/>
           </a:xfrm>
           <a:prstGeom prst="rect">
             <a:avLst/>
@@ -8382,14 +7963,14 @@
           <a:noFill/>
         </p:spPr>
         <p:txBody>
-          <a:bodyPr wrap="square" lIns="0" rIns="0" tIns="0" bIns="0" anchor="t">
+          <a:bodyPr wrap="square" lIns="0" tIns="0" rIns="0" bIns="0" anchor="t">
             <a:spAutoFit/>
           </a:bodyPr>
           <a:lstStyle/>
           <a:p>
             <a:pPr algn="l"/>
             <a:r>
-              <a:rPr sz="1100" b="1" i="0">
+              <a:rPr sz="1400" b="1" i="0">
                 <a:solidFill>
                   <a:srgbClr val="7BE0B4"/>
                 </a:solidFill>
@@ -8409,7 +7990,7 @@
         <p:spPr>
           <a:xfrm>
             <a:off x="6460236" y="5166360"/>
-            <a:ext cx="5029200" cy="914400"/>
+            <a:ext cx="5029200" cy="553998"/>
           </a:xfrm>
           <a:prstGeom prst="rect">
             <a:avLst/>
@@ -8417,55 +7998,20 @@
           <a:noFill/>
         </p:spPr>
         <p:txBody>
-          <a:bodyPr wrap="square" lIns="0" rIns="0" tIns="0" bIns="0" anchor="t">
+          <a:bodyPr wrap="square" lIns="0" tIns="0" rIns="0" bIns="0" anchor="t">
             <a:spAutoFit/>
           </a:bodyPr>
           <a:lstStyle/>
           <a:p>
             <a:pPr algn="l"/>
             <a:r>
-              <a:rPr sz="1400" b="0" i="0">
+              <a:rPr b="0" i="0">
                 <a:solidFill>
                   <a:srgbClr val="F2F3F5"/>
                 </a:solidFill>
                 <a:latin typeface="Helvetica Neue"/>
               </a:rPr>
               <a:t>No real-world knowledge built. No regional speech patterns. No conversation skills.</a:t>
-            </a:r>
-          </a:p>
-        </p:txBody>
-      </p:sp>
-      <p:sp>
-        <p:nvSpPr>
-          <p:cNvPr id="22" name="TextBox 21"/>
-          <p:cNvSpPr txBox="1"/>
-          <p:nvPr/>
-        </p:nvSpPr>
-        <p:spPr>
-          <a:xfrm>
-            <a:off x="11247120" y="6510528"/>
-            <a:ext cx="731520" cy="274320"/>
-          </a:xfrm>
-          <a:prstGeom prst="rect">
-            <a:avLst/>
-          </a:prstGeom>
-          <a:noFill/>
-        </p:spPr>
-        <p:txBody>
-          <a:bodyPr wrap="square" lIns="0" rIns="0" tIns="0" bIns="0" anchor="t">
-            <a:spAutoFit/>
-          </a:bodyPr>
-          <a:lstStyle/>
-          <a:p>
-            <a:pPr algn="r"/>
-            <a:r>
-              <a:rPr sz="900" b="0" i="0">
-                <a:solidFill>
-                  <a:srgbClr val="656B75"/>
-                </a:solidFill>
-                <a:latin typeface="Helvetica Neue"/>
-              </a:rPr>
-              <a:t>4</a:t>
             </a:r>
           </a:p>
         </p:txBody>
@@ -8479,7 +8025,7 @@
 </file>
 
 <file path=ppt/slides/slide5.xml><?xml version="1.0" encoding="utf-8"?>
-<p:sld xmlns:a="http://schemas.openxmlformats.org/drawingml/2006/main" xmlns:p="http://schemas.openxmlformats.org/presentationml/2006/main" xmlns:r="http://schemas.openxmlformats.org/officeDocument/2006/relationships">
+<p:sld xmlns:a="http://schemas.openxmlformats.org/drawingml/2006/main" xmlns:r="http://schemas.openxmlformats.org/officeDocument/2006/relationships" xmlns:p="http://schemas.openxmlformats.org/presentationml/2006/main">
   <p:cSld>
     <p:bg>
       <p:bgPr>
@@ -8495,86 +8041,14 @@
         <p:cNvGrpSpPr/>
         <p:nvPr/>
       </p:nvGrpSpPr>
-      <p:grpSpPr/>
-      <p:sp>
-        <p:nvSpPr>
-          <p:cNvPr id="2" name="TextBox 1"/>
-          <p:cNvSpPr txBox="1"/>
-          <p:nvPr/>
-        </p:nvSpPr>
-        <p:spPr>
-          <a:xfrm>
-            <a:off x="548640" y="411480"/>
-            <a:ext cx="6858000" cy="274320"/>
-          </a:xfrm>
-          <a:prstGeom prst="rect">
-            <a:avLst/>
-          </a:prstGeom>
-          <a:noFill/>
-        </p:spPr>
-        <p:txBody>
-          <a:bodyPr wrap="square" lIns="0" rIns="0" tIns="0" bIns="0" anchor="t">
-            <a:spAutoFit/>
-          </a:bodyPr>
-          <a:lstStyle/>
-          <a:p>
-            <a:pPr algn="l"/>
-            <a:r>
-              <a:rPr sz="1100" b="1" i="0">
-                <a:solidFill>
-                  <a:srgbClr val="E07BAA"/>
-                </a:solidFill>
-                <a:latin typeface="Helvetica Neue"/>
-              </a:rPr>
-              <a:t>ACT II · ANALYZE</a:t>
-            </a:r>
-          </a:p>
-        </p:txBody>
-      </p:sp>
-      <p:sp>
-        <p:nvSpPr>
-          <p:cNvPr id="3" name="Rectangle 2"/>
-          <p:cNvSpPr/>
-          <p:nvPr/>
-        </p:nvSpPr>
-        <p:spPr>
-          <a:xfrm>
-            <a:off x="5120640" y="512064"/>
-            <a:ext cx="6583680" cy="9144"/>
-          </a:xfrm>
-          <a:prstGeom prst="rect">
-            <a:avLst/>
-          </a:prstGeom>
-          <a:solidFill>
-            <a:srgbClr val="282C35"/>
-          </a:solidFill>
-          <a:ln>
-            <a:noFill/>
-          </a:ln>
-          <a:effectLst/>
-        </p:spPr>
-        <p:style>
-          <a:lnRef idx="1">
-            <a:schemeClr val="accent1"/>
-          </a:lnRef>
-          <a:fillRef idx="3">
-            <a:schemeClr val="accent1"/>
-          </a:fillRef>
-          <a:effectRef idx="2">
-            <a:schemeClr val="accent1"/>
-          </a:effectRef>
-          <a:fontRef idx="minor">
-            <a:schemeClr val="lt1"/>
-          </a:fontRef>
-        </p:style>
-        <p:txBody>
-          <a:bodyPr rtlCol="0" anchor="ctr"/>
-          <a:lstStyle/>
-          <a:p>
-            <a:pPr algn="ctr"/>
-          </a:p>
-        </p:txBody>
-      </p:sp>
+      <p:grpSpPr>
+        <a:xfrm>
+          <a:off x="0" y="0"/>
+          <a:ext cx="0" cy="0"/>
+          <a:chOff x="0" y="0"/>
+          <a:chExt cx="0" cy="0"/>
+        </a:xfrm>
+      </p:grpSpPr>
       <p:sp>
         <p:nvSpPr>
           <p:cNvPr id="4" name="TextBox 3"/>
@@ -8592,7 +8066,7 @@
           <a:noFill/>
         </p:spPr>
         <p:txBody>
-          <a:bodyPr wrap="square" lIns="0" rIns="0" tIns="0" bIns="0" anchor="t">
+          <a:bodyPr wrap="square" lIns="0" tIns="0" rIns="0" bIns="0" anchor="t">
             <a:spAutoFit/>
           </a:bodyPr>
           <a:lstStyle/>
@@ -8619,7 +8093,7 @@
         <p:spPr>
           <a:xfrm>
             <a:off x="548640" y="1874519"/>
-            <a:ext cx="11091672" cy="411480"/>
+            <a:ext cx="11091672" cy="307777"/>
           </a:xfrm>
           <a:prstGeom prst="rect">
             <a:avLst/>
@@ -8627,14 +8101,14 @@
           <a:noFill/>
         </p:spPr>
         <p:txBody>
-          <a:bodyPr wrap="square" lIns="0" rIns="0" tIns="0" bIns="0" anchor="t">
+          <a:bodyPr wrap="square" lIns="0" tIns="0" rIns="0" bIns="0" anchor="t">
             <a:spAutoFit/>
           </a:bodyPr>
           <a:lstStyle/>
           <a:p>
             <a:pPr algn="l"/>
             <a:r>
-              <a:rPr sz="1400" b="0" i="1">
+              <a:rPr sz="2000" b="0" i="1">
                 <a:solidFill>
                   <a:srgbClr val="9AA1AB"/>
                 </a:solidFill>
@@ -8686,6 +8160,7 @@
           <a:lstStyle/>
           <a:p>
             <a:pPr algn="ctr"/>
+            <a:endParaRPr/>
           </a:p>
         </p:txBody>
       </p:sp>
@@ -8730,6 +8205,7 @@
           <a:lstStyle/>
           <a:p>
             <a:pPr algn="ctr"/>
+            <a:endParaRPr/>
           </a:p>
         </p:txBody>
       </p:sp>
@@ -8742,7 +8218,7 @@
         <p:spPr>
           <a:xfrm>
             <a:off x="699515" y="3017520"/>
-            <a:ext cx="3200400" cy="365760"/>
+            <a:ext cx="3200400" cy="215444"/>
           </a:xfrm>
           <a:prstGeom prst="rect">
             <a:avLst/>
@@ -8750,14 +8226,14 @@
           <a:noFill/>
         </p:spPr>
         <p:txBody>
-          <a:bodyPr wrap="square" lIns="0" rIns="0" tIns="0" bIns="0" anchor="t">
+          <a:bodyPr wrap="square" lIns="0" tIns="0" rIns="0" bIns="0" anchor="t">
             <a:spAutoFit/>
           </a:bodyPr>
           <a:lstStyle/>
           <a:p>
             <a:pPr algn="l"/>
             <a:r>
-              <a:rPr sz="1100" b="1" i="0">
+              <a:rPr sz="1400" b="1" i="0">
                 <a:solidFill>
                   <a:srgbClr val="7B9FE0"/>
                 </a:solidFill>
@@ -8785,7 +8261,7 @@
           <a:noFill/>
         </p:spPr>
         <p:txBody>
-          <a:bodyPr wrap="square" lIns="0" rIns="0" tIns="0" bIns="0" anchor="t">
+          <a:bodyPr wrap="square" lIns="0" tIns="0" rIns="0" bIns="0" anchor="t">
             <a:spAutoFit/>
           </a:bodyPr>
           <a:lstStyle/>
@@ -8820,7 +8296,7 @@
           <a:noFill/>
         </p:spPr>
         <p:txBody>
-          <a:bodyPr wrap="square" lIns="0" rIns="0" tIns="0" bIns="0" anchor="t">
+          <a:bodyPr wrap="square" lIns="0" tIns="0" rIns="0" bIns="0" anchor="t">
             <a:spAutoFit/>
           </a:bodyPr>
           <a:lstStyle/>
@@ -8879,6 +8355,7 @@
           <a:lstStyle/>
           <a:p>
             <a:pPr algn="ctr"/>
+            <a:endParaRPr/>
           </a:p>
         </p:txBody>
       </p:sp>
@@ -8923,6 +8400,7 @@
           <a:lstStyle/>
           <a:p>
             <a:pPr algn="ctr"/>
+            <a:endParaRPr/>
           </a:p>
         </p:txBody>
       </p:sp>
@@ -8935,7 +8413,7 @@
         <p:spPr>
           <a:xfrm>
             <a:off x="4539996" y="3017520"/>
-            <a:ext cx="3200400" cy="365760"/>
+            <a:ext cx="3200400" cy="215444"/>
           </a:xfrm>
           <a:prstGeom prst="rect">
             <a:avLst/>
@@ -8943,14 +8421,14 @@
           <a:noFill/>
         </p:spPr>
         <p:txBody>
-          <a:bodyPr wrap="square" lIns="0" rIns="0" tIns="0" bIns="0" anchor="t">
+          <a:bodyPr wrap="square" lIns="0" tIns="0" rIns="0" bIns="0" anchor="t">
             <a:spAutoFit/>
           </a:bodyPr>
           <a:lstStyle/>
           <a:p>
             <a:pPr algn="l"/>
             <a:r>
-              <a:rPr sz="1100" b="1" i="0">
+              <a:rPr sz="1400" b="1" i="0">
                 <a:solidFill>
                   <a:srgbClr val="E07BAA"/>
                 </a:solidFill>
@@ -8978,7 +8456,7 @@
           <a:noFill/>
         </p:spPr>
         <p:txBody>
-          <a:bodyPr wrap="square" lIns="0" rIns="0" tIns="0" bIns="0" anchor="t">
+          <a:bodyPr wrap="square" lIns="0" tIns="0" rIns="0" bIns="0" anchor="t">
             <a:spAutoFit/>
           </a:bodyPr>
           <a:lstStyle/>
@@ -9005,7 +8483,7 @@
         <p:spPr>
           <a:xfrm>
             <a:off x="4539996" y="4526280"/>
-            <a:ext cx="3200400" cy="1005840"/>
+            <a:ext cx="3200400" cy="400110"/>
           </a:xfrm>
           <a:prstGeom prst="rect">
             <a:avLst/>
@@ -9013,20 +8491,47 @@
           <a:noFill/>
         </p:spPr>
         <p:txBody>
-          <a:bodyPr wrap="square" lIns="0" rIns="0" tIns="0" bIns="0" anchor="t">
+          <a:bodyPr wrap="square" lIns="0" tIns="0" rIns="0" bIns="0" anchor="t">
             <a:spAutoFit/>
           </a:bodyPr>
           <a:lstStyle/>
           <a:p>
             <a:pPr algn="l"/>
             <a:r>
-              <a:rPr sz="1300" b="0" i="0">
+              <a:rPr sz="1300" b="0" i="0" dirty="0" err="1">
                 <a:solidFill>
                   <a:srgbClr val="9AA1AB"/>
                 </a:solidFill>
                 <a:latin typeface="Helvetica Neue"/>
               </a:rPr>
-              <a:t>Bibauw 2022 · d = 0.58.   Mayer 2021 · d = 1.3.</a:t>
+              <a:t>Bibauw</a:t>
+            </a:r>
+            <a:r>
+              <a:rPr sz="1300" b="0" i="0" dirty="0">
+                <a:solidFill>
+                  <a:srgbClr val="9AA1AB"/>
+                </a:solidFill>
+                <a:latin typeface="Helvetica Neue"/>
+              </a:rPr>
+              <a:t> 2022 · d = 0.58.  </a:t>
+            </a:r>
+            <a:endParaRPr lang="en-US" sz="1300" b="0" i="0" dirty="0">
+              <a:solidFill>
+                <a:srgbClr val="9AA1AB"/>
+              </a:solidFill>
+              <a:latin typeface="Helvetica Neue"/>
+            </a:endParaRPr>
+          </a:p>
+          <a:p>
+            <a:pPr algn="l"/>
+            <a:r>
+              <a:rPr sz="1300" b="0" i="0" dirty="0">
+                <a:solidFill>
+                  <a:srgbClr val="9AA1AB"/>
+                </a:solidFill>
+                <a:latin typeface="Helvetica Neue"/>
+              </a:rPr>
+              <a:t>Mayer 2021 · d = 1.3.</a:t>
             </a:r>
           </a:p>
         </p:txBody>
@@ -9072,6 +8577,7 @@
           <a:lstStyle/>
           <a:p>
             <a:pPr algn="ctr"/>
+            <a:endParaRPr/>
           </a:p>
         </p:txBody>
       </p:sp>
@@ -9116,6 +8622,7 @@
           <a:lstStyle/>
           <a:p>
             <a:pPr algn="ctr"/>
+            <a:endParaRPr/>
           </a:p>
         </p:txBody>
       </p:sp>
@@ -9128,7 +8635,7 @@
         <p:spPr>
           <a:xfrm>
             <a:off x="8380476" y="3017520"/>
-            <a:ext cx="3200400" cy="365760"/>
+            <a:ext cx="3200400" cy="215444"/>
           </a:xfrm>
           <a:prstGeom prst="rect">
             <a:avLst/>
@@ -9136,14 +8643,14 @@
           <a:noFill/>
         </p:spPr>
         <p:txBody>
-          <a:bodyPr wrap="square" lIns="0" rIns="0" tIns="0" bIns="0" anchor="t">
+          <a:bodyPr wrap="square" lIns="0" tIns="0" rIns="0" bIns="0" anchor="t">
             <a:spAutoFit/>
           </a:bodyPr>
           <a:lstStyle/>
           <a:p>
             <a:pPr algn="l"/>
             <a:r>
-              <a:rPr sz="1100" b="1" i="0">
+              <a:rPr sz="1400" b="1" i="0">
                 <a:solidFill>
                   <a:srgbClr val="7BE0B4"/>
                 </a:solidFill>
@@ -9171,7 +8678,7 @@
           <a:noFill/>
         </p:spPr>
         <p:txBody>
-          <a:bodyPr wrap="square" lIns="0" rIns="0" tIns="0" bIns="0" anchor="t">
+          <a:bodyPr wrap="square" lIns="0" tIns="0" rIns="0" bIns="0" anchor="t">
             <a:spAutoFit/>
           </a:bodyPr>
           <a:lstStyle/>
@@ -9206,7 +8713,7 @@
           <a:noFill/>
         </p:spPr>
         <p:txBody>
-          <a:bodyPr wrap="square" lIns="0" rIns="0" tIns="0" bIns="0" anchor="t">
+          <a:bodyPr wrap="square" lIns="0" tIns="0" rIns="0" bIns="0" anchor="t">
             <a:spAutoFit/>
           </a:bodyPr>
           <a:lstStyle/>
@@ -9233,7 +8740,7 @@
         <p:spPr>
           <a:xfrm>
             <a:off x="548640" y="5943600"/>
-            <a:ext cx="11091672" cy="320040"/>
+            <a:ext cx="11091672" cy="246221"/>
           </a:xfrm>
           <a:prstGeom prst="rect">
             <a:avLst/>
@@ -9241,14 +8748,14 @@
           <a:noFill/>
         </p:spPr>
         <p:txBody>
-          <a:bodyPr wrap="square" lIns="0" rIns="0" tIns="0" bIns="0" anchor="t">
+          <a:bodyPr wrap="square" lIns="0" tIns="0" rIns="0" bIns="0" anchor="t">
             <a:spAutoFit/>
           </a:bodyPr>
           <a:lstStyle/>
           <a:p>
             <a:pPr algn="ctr"/>
             <a:r>
-              <a:rPr sz="1100" b="0" i="1">
+              <a:rPr sz="1600" b="0" i="1">
                 <a:solidFill>
                   <a:srgbClr val="656B75"/>
                 </a:solidFill>
@@ -9261,14 +8768,20 @@
       </p:sp>
       <p:sp>
         <p:nvSpPr>
-          <p:cNvPr id="22" name="TextBox 21"/>
+          <p:cNvPr id="23" name="TextBox 22">
+            <a:extLst>
+              <a:ext uri="{FF2B5EF4-FFF2-40B4-BE49-F238E27FC236}">
+                <a16:creationId xmlns:a16="http://schemas.microsoft.com/office/drawing/2014/main" id="{1CC8D3D7-2F54-44AE-30B2-BCA10C9BA2A2}"/>
+              </a:ext>
+            </a:extLst>
+          </p:cNvPr>
           <p:cNvSpPr txBox="1"/>
           <p:nvPr/>
         </p:nvSpPr>
         <p:spPr>
           <a:xfrm>
-            <a:off x="11247120" y="6510528"/>
-            <a:ext cx="731520" cy="274320"/>
+            <a:off x="548640" y="411480"/>
+            <a:ext cx="6858000" cy="169277"/>
           </a:xfrm>
           <a:prstGeom prst="rect">
             <a:avLst/>
@@ -9276,21 +8789,27 @@
           <a:noFill/>
         </p:spPr>
         <p:txBody>
-          <a:bodyPr wrap="square" lIns="0" rIns="0" tIns="0" bIns="0" anchor="t">
+          <a:bodyPr wrap="square" lIns="0" tIns="0" rIns="0" bIns="0" anchor="t">
             <a:spAutoFit/>
           </a:bodyPr>
           <a:lstStyle/>
           <a:p>
-            <a:pPr algn="r"/>
-            <a:r>
-              <a:rPr sz="900" b="0" i="0">
-                <a:solidFill>
-                  <a:srgbClr val="656B75"/>
+            <a:pPr algn="l"/>
+            <a:r>
+              <a:rPr lang="en-US" sz="1100" b="1" i="0" dirty="0">
+                <a:solidFill>
+                  <a:srgbClr val="E07BAA"/>
                 </a:solidFill>
                 <a:latin typeface="Helvetica Neue"/>
               </a:rPr>
-              <a:t>5</a:t>
-            </a:r>
+              <a:t>ANALYSIS</a:t>
+            </a:r>
+            <a:endParaRPr sz="1100" b="1" i="0" dirty="0">
+              <a:solidFill>
+                <a:srgbClr val="E07BAA"/>
+              </a:solidFill>
+              <a:latin typeface="Helvetica Neue"/>
+            </a:endParaRPr>
           </a:p>
         </p:txBody>
       </p:sp>
@@ -9303,7 +8822,7 @@
 </file>
 
 <file path=ppt/slides/slide6.xml><?xml version="1.0" encoding="utf-8"?>
-<p:sld xmlns:a="http://schemas.openxmlformats.org/drawingml/2006/main" xmlns:p="http://schemas.openxmlformats.org/presentationml/2006/main" xmlns:r="http://schemas.openxmlformats.org/officeDocument/2006/relationships">
+<p:sld xmlns:a="http://schemas.openxmlformats.org/drawingml/2006/main" xmlns:r="http://schemas.openxmlformats.org/officeDocument/2006/relationships" xmlns:p="http://schemas.openxmlformats.org/presentationml/2006/main">
   <p:cSld>
     <p:bg>
       <p:bgPr>
@@ -9319,86 +8838,14 @@
         <p:cNvGrpSpPr/>
         <p:nvPr/>
       </p:nvGrpSpPr>
-      <p:grpSpPr/>
-      <p:sp>
-        <p:nvSpPr>
-          <p:cNvPr id="2" name="TextBox 1"/>
-          <p:cNvSpPr txBox="1"/>
-          <p:nvPr/>
-        </p:nvSpPr>
-        <p:spPr>
-          <a:xfrm>
-            <a:off x="548640" y="411480"/>
-            <a:ext cx="6858000" cy="274320"/>
-          </a:xfrm>
-          <a:prstGeom prst="rect">
-            <a:avLst/>
-          </a:prstGeom>
-          <a:noFill/>
-        </p:spPr>
-        <p:txBody>
-          <a:bodyPr wrap="square" lIns="0" rIns="0" tIns="0" bIns="0" anchor="t">
-            <a:spAutoFit/>
-          </a:bodyPr>
-          <a:lstStyle/>
-          <a:p>
-            <a:pPr algn="l"/>
-            <a:r>
-              <a:rPr sz="1100" b="1" i="0">
-                <a:solidFill>
-                  <a:srgbClr val="E07BAA"/>
-                </a:solidFill>
-                <a:latin typeface="Helvetica Neue"/>
-              </a:rPr>
-              <a:t>ACT II · ANALYZE</a:t>
-            </a:r>
-          </a:p>
-        </p:txBody>
-      </p:sp>
-      <p:sp>
-        <p:nvSpPr>
-          <p:cNvPr id="3" name="Rectangle 2"/>
-          <p:cNvSpPr/>
-          <p:nvPr/>
-        </p:nvSpPr>
-        <p:spPr>
-          <a:xfrm>
-            <a:off x="5120640" y="512064"/>
-            <a:ext cx="6583680" cy="9144"/>
-          </a:xfrm>
-          <a:prstGeom prst="rect">
-            <a:avLst/>
-          </a:prstGeom>
-          <a:solidFill>
-            <a:srgbClr val="282C35"/>
-          </a:solidFill>
-          <a:ln>
-            <a:noFill/>
-          </a:ln>
-          <a:effectLst/>
-        </p:spPr>
-        <p:style>
-          <a:lnRef idx="1">
-            <a:schemeClr val="accent1"/>
-          </a:lnRef>
-          <a:fillRef idx="3">
-            <a:schemeClr val="accent1"/>
-          </a:fillRef>
-          <a:effectRef idx="2">
-            <a:schemeClr val="accent1"/>
-          </a:effectRef>
-          <a:fontRef idx="minor">
-            <a:schemeClr val="lt1"/>
-          </a:fontRef>
-        </p:style>
-        <p:txBody>
-          <a:bodyPr rtlCol="0" anchor="ctr"/>
-          <a:lstStyle/>
-          <a:p>
-            <a:pPr algn="ctr"/>
-          </a:p>
-        </p:txBody>
-      </p:sp>
+      <p:grpSpPr>
+        <a:xfrm>
+          <a:off x="0" y="0"/>
+          <a:ext cx="0" cy="0"/>
+          <a:chOff x="0" y="0"/>
+          <a:chExt cx="0" cy="0"/>
+        </a:xfrm>
+      </p:grpSpPr>
       <p:sp>
         <p:nvSpPr>
           <p:cNvPr id="4" name="TextBox 3"/>
@@ -9416,7 +8863,7 @@
           <a:noFill/>
         </p:spPr>
         <p:txBody>
-          <a:bodyPr wrap="square" lIns="0" rIns="0" tIns="0" bIns="0" anchor="t">
+          <a:bodyPr wrap="square" lIns="0" tIns="0" rIns="0" bIns="0" anchor="t">
             <a:spAutoFit/>
           </a:bodyPr>
           <a:lstStyle/>
@@ -9443,7 +8890,7 @@
         <p:spPr>
           <a:xfrm>
             <a:off x="548640" y="1874519"/>
-            <a:ext cx="11091672" cy="411480"/>
+            <a:ext cx="11091672" cy="246221"/>
           </a:xfrm>
           <a:prstGeom prst="rect">
             <a:avLst/>
@@ -9451,14 +8898,14 @@
           <a:noFill/>
         </p:spPr>
         <p:txBody>
-          <a:bodyPr wrap="square" lIns="0" rIns="0" tIns="0" bIns="0" anchor="t">
+          <a:bodyPr wrap="square" lIns="0" tIns="0" rIns="0" bIns="0" anchor="t">
             <a:spAutoFit/>
           </a:bodyPr>
           <a:lstStyle/>
           <a:p>
             <a:pPr algn="l"/>
             <a:r>
-              <a:rPr sz="1400" b="0" i="1">
+              <a:rPr sz="1600" b="0" i="1">
                 <a:solidFill>
                   <a:srgbClr val="9AA1AB"/>
                 </a:solidFill>
@@ -9510,6 +8957,7 @@
           <a:lstStyle/>
           <a:p>
             <a:pPr algn="ctr"/>
+            <a:endParaRPr/>
           </a:p>
         </p:txBody>
       </p:sp>
@@ -9554,6 +9002,7 @@
           <a:lstStyle/>
           <a:p>
             <a:pPr algn="ctr"/>
+            <a:endParaRPr/>
           </a:p>
         </p:txBody>
       </p:sp>
@@ -9565,8 +9014,8 @@
         </p:nvSpPr>
         <p:spPr>
           <a:xfrm>
-            <a:off x="1371600" y="2743200"/>
-            <a:ext cx="6400800" cy="365760"/>
+            <a:off x="1371600" y="2818358"/>
+            <a:ext cx="6400800" cy="215444"/>
           </a:xfrm>
           <a:prstGeom prst="rect">
             <a:avLst/>
@@ -9574,14 +9023,14 @@
           <a:noFill/>
         </p:spPr>
         <p:txBody>
-          <a:bodyPr wrap="square" lIns="0" rIns="0" tIns="0" bIns="0" anchor="ctr">
+          <a:bodyPr wrap="square" lIns="0" tIns="0" rIns="0" bIns="0" anchor="ctr">
             <a:spAutoFit/>
           </a:bodyPr>
           <a:lstStyle/>
           <a:p>
             <a:pPr algn="l"/>
             <a:r>
-              <a:rPr sz="1200" b="1" i="0">
+              <a:rPr sz="1400" b="1" i="0">
                 <a:solidFill>
                   <a:srgbClr val="7B9FE0"/>
                 </a:solidFill>
@@ -9633,6 +9082,7 @@
           <a:lstStyle/>
           <a:p>
             <a:pPr algn="ctr"/>
+            <a:endParaRPr/>
           </a:p>
         </p:txBody>
       </p:sp>
@@ -9677,6 +9127,7 @@
           <a:lstStyle/>
           <a:p>
             <a:pPr algn="ctr"/>
+            <a:endParaRPr/>
           </a:p>
         </p:txBody>
       </p:sp>
@@ -9721,6 +9172,7 @@
           <a:lstStyle/>
           <a:p>
             <a:pPr algn="ctr"/>
+            <a:endParaRPr/>
           </a:p>
         </p:txBody>
       </p:sp>
@@ -9765,6 +9217,7 @@
           <a:lstStyle/>
           <a:p>
             <a:pPr algn="ctr"/>
+            <a:endParaRPr/>
           </a:p>
         </p:txBody>
       </p:sp>
@@ -9809,6 +9262,7 @@
           <a:lstStyle/>
           <a:p>
             <a:pPr algn="ctr"/>
+            <a:endParaRPr/>
           </a:p>
         </p:txBody>
       </p:sp>
@@ -9820,8 +9274,8 @@
         </p:nvSpPr>
         <p:spPr>
           <a:xfrm>
-            <a:off x="1371600" y="3547872"/>
-            <a:ext cx="6400800" cy="365760"/>
+            <a:off x="1371600" y="3623030"/>
+            <a:ext cx="6400800" cy="215444"/>
           </a:xfrm>
           <a:prstGeom prst="rect">
             <a:avLst/>
@@ -9829,14 +9283,14 @@
           <a:noFill/>
         </p:spPr>
         <p:txBody>
-          <a:bodyPr wrap="square" lIns="0" rIns="0" tIns="0" bIns="0" anchor="ctr">
+          <a:bodyPr wrap="square" lIns="0" tIns="0" rIns="0" bIns="0" anchor="ctr">
             <a:spAutoFit/>
           </a:bodyPr>
           <a:lstStyle/>
           <a:p>
             <a:pPr algn="l"/>
             <a:r>
-              <a:rPr sz="1200" b="1" i="0">
+              <a:rPr sz="1400" b="1" i="0">
                 <a:solidFill>
                   <a:srgbClr val="E07BAA"/>
                 </a:solidFill>
@@ -9888,6 +9342,7 @@
           <a:lstStyle/>
           <a:p>
             <a:pPr algn="ctr"/>
+            <a:endParaRPr/>
           </a:p>
         </p:txBody>
       </p:sp>
@@ -9932,6 +9387,7 @@
           <a:lstStyle/>
           <a:p>
             <a:pPr algn="ctr"/>
+            <a:endParaRPr/>
           </a:p>
         </p:txBody>
       </p:sp>
@@ -9976,6 +9432,7 @@
           <a:lstStyle/>
           <a:p>
             <a:pPr algn="ctr"/>
+            <a:endParaRPr/>
           </a:p>
         </p:txBody>
       </p:sp>
@@ -10020,6 +9477,7 @@
           <a:lstStyle/>
           <a:p>
             <a:pPr algn="ctr"/>
+            <a:endParaRPr/>
           </a:p>
         </p:txBody>
       </p:sp>
@@ -10064,6 +9522,7 @@
           <a:lstStyle/>
           <a:p>
             <a:pPr algn="ctr"/>
+            <a:endParaRPr/>
           </a:p>
         </p:txBody>
       </p:sp>
@@ -10075,8 +9534,8 @@
         </p:nvSpPr>
         <p:spPr>
           <a:xfrm>
-            <a:off x="1371600" y="4352544"/>
-            <a:ext cx="6400800" cy="365760"/>
+            <a:off x="1371600" y="4427702"/>
+            <a:ext cx="6400800" cy="215444"/>
           </a:xfrm>
           <a:prstGeom prst="rect">
             <a:avLst/>
@@ -10084,14 +9543,14 @@
           <a:noFill/>
         </p:spPr>
         <p:txBody>
-          <a:bodyPr wrap="square" lIns="0" rIns="0" tIns="0" bIns="0" anchor="ctr">
+          <a:bodyPr wrap="square" lIns="0" tIns="0" rIns="0" bIns="0" anchor="ctr">
             <a:spAutoFit/>
           </a:bodyPr>
           <a:lstStyle/>
           <a:p>
             <a:pPr algn="l"/>
             <a:r>
-              <a:rPr sz="1200" b="1" i="0">
+              <a:rPr sz="1400" b="1" i="0">
                 <a:solidFill>
                   <a:srgbClr val="E0C27B"/>
                 </a:solidFill>
@@ -10143,6 +9602,7 @@
           <a:lstStyle/>
           <a:p>
             <a:pPr algn="ctr"/>
+            <a:endParaRPr/>
           </a:p>
         </p:txBody>
       </p:sp>
@@ -10187,6 +9647,7 @@
           <a:lstStyle/>
           <a:p>
             <a:pPr algn="ctr"/>
+            <a:endParaRPr/>
           </a:p>
         </p:txBody>
       </p:sp>
@@ -10231,6 +9692,7 @@
           <a:lstStyle/>
           <a:p>
             <a:pPr algn="ctr"/>
+            <a:endParaRPr/>
           </a:p>
         </p:txBody>
       </p:sp>
@@ -10275,6 +9737,7 @@
           <a:lstStyle/>
           <a:p>
             <a:pPr algn="ctr"/>
+            <a:endParaRPr/>
           </a:p>
         </p:txBody>
       </p:sp>
@@ -10319,6 +9782,7 @@
           <a:lstStyle/>
           <a:p>
             <a:pPr algn="ctr"/>
+            <a:endParaRPr/>
           </a:p>
         </p:txBody>
       </p:sp>
@@ -10330,8 +9794,8 @@
         </p:nvSpPr>
         <p:spPr>
           <a:xfrm>
-            <a:off x="1371600" y="5157216"/>
-            <a:ext cx="6400800" cy="365760"/>
+            <a:off x="1371600" y="5232374"/>
+            <a:ext cx="6400800" cy="215444"/>
           </a:xfrm>
           <a:prstGeom prst="rect">
             <a:avLst/>
@@ -10339,14 +9803,14 @@
           <a:noFill/>
         </p:spPr>
         <p:txBody>
-          <a:bodyPr wrap="square" lIns="0" rIns="0" tIns="0" bIns="0" anchor="ctr">
+          <a:bodyPr wrap="square" lIns="0" tIns="0" rIns="0" bIns="0" anchor="ctr">
             <a:spAutoFit/>
           </a:bodyPr>
           <a:lstStyle/>
           <a:p>
             <a:pPr algn="l"/>
             <a:r>
-              <a:rPr sz="1200" b="1" i="0">
+              <a:rPr sz="1400" b="1" i="0">
                 <a:solidFill>
                   <a:srgbClr val="E07B7B"/>
                 </a:solidFill>
@@ -10398,6 +9862,7 @@
           <a:lstStyle/>
           <a:p>
             <a:pPr algn="ctr"/>
+            <a:endParaRPr/>
           </a:p>
         </p:txBody>
       </p:sp>
@@ -10442,6 +9907,7 @@
           <a:lstStyle/>
           <a:p>
             <a:pPr algn="ctr"/>
+            <a:endParaRPr/>
           </a:p>
         </p:txBody>
       </p:sp>
@@ -10486,6 +9952,7 @@
           <a:lstStyle/>
           <a:p>
             <a:pPr algn="ctr"/>
+            <a:endParaRPr/>
           </a:p>
         </p:txBody>
       </p:sp>
@@ -10497,8 +9964,8 @@
         </p:nvSpPr>
         <p:spPr>
           <a:xfrm>
-            <a:off x="8887967" y="2194560"/>
-            <a:ext cx="91440" cy="3282696"/>
+            <a:off x="8887521" y="2340864"/>
+            <a:ext cx="109729" cy="3520440"/>
           </a:xfrm>
           <a:prstGeom prst="rect">
             <a:avLst/>
@@ -10530,6 +9997,7 @@
           <a:lstStyle/>
           <a:p>
             <a:pPr algn="ctr"/>
+            <a:endParaRPr/>
           </a:p>
         </p:txBody>
       </p:sp>
@@ -10541,7 +10009,7 @@
         </p:nvSpPr>
         <p:spPr>
           <a:xfrm rot="10800000">
-            <a:off x="8732519" y="5477256"/>
+            <a:off x="8732074" y="5861304"/>
             <a:ext cx="402336" cy="274320"/>
           </a:xfrm>
           <a:prstGeom prst="triangle">
@@ -10574,6 +10042,7 @@
           <a:lstStyle/>
           <a:p>
             <a:pPr algn="ctr"/>
+            <a:endParaRPr/>
           </a:p>
         </p:txBody>
       </p:sp>
@@ -10585,8 +10054,8 @@
         </p:nvSpPr>
         <p:spPr>
           <a:xfrm>
-            <a:off x="8019288" y="1828800"/>
-            <a:ext cx="1828800" cy="274320"/>
+            <a:off x="8027985" y="2024837"/>
+            <a:ext cx="1828800" cy="184666"/>
           </a:xfrm>
           <a:prstGeom prst="rect">
             <a:avLst/>
@@ -10594,14 +10063,14 @@
           <a:noFill/>
         </p:spPr>
         <p:txBody>
-          <a:bodyPr wrap="square" lIns="0" rIns="0" tIns="0" bIns="0" anchor="t">
+          <a:bodyPr wrap="square" lIns="0" tIns="0" rIns="0" bIns="0" anchor="t">
             <a:spAutoFit/>
           </a:bodyPr>
           <a:lstStyle/>
           <a:p>
             <a:pPr algn="ctr"/>
             <a:r>
-              <a:rPr sz="1000" b="1" i="0">
+              <a:rPr sz="1200" b="1" i="0" dirty="0">
                 <a:solidFill>
                   <a:srgbClr val="9AA1AB"/>
                 </a:solidFill>
@@ -10620,8 +10089,8 @@
         </p:nvSpPr>
         <p:spPr>
           <a:xfrm>
-            <a:off x="8019288" y="5797296"/>
-            <a:ext cx="1828800" cy="274320"/>
+            <a:off x="8019288" y="6254271"/>
+            <a:ext cx="1828800" cy="184666"/>
           </a:xfrm>
           <a:prstGeom prst="rect">
             <a:avLst/>
@@ -10629,14 +10098,14 @@
           <a:noFill/>
         </p:spPr>
         <p:txBody>
-          <a:bodyPr wrap="square" lIns="0" rIns="0" tIns="0" bIns="0" anchor="t">
+          <a:bodyPr wrap="square" lIns="0" tIns="0" rIns="0" bIns="0" anchor="t">
             <a:spAutoFit/>
           </a:bodyPr>
           <a:lstStyle/>
           <a:p>
             <a:pPr algn="ctr"/>
             <a:r>
-              <a:rPr sz="1000" b="1" i="0">
+              <a:rPr sz="1200" b="1" i="0" dirty="0">
                 <a:solidFill>
                   <a:srgbClr val="E07B7B"/>
                 </a:solidFill>
@@ -10649,14 +10118,20 @@
       </p:sp>
       <p:sp>
         <p:nvSpPr>
-          <p:cNvPr id="34" name="TextBox 33"/>
+          <p:cNvPr id="35" name="TextBox 34">
+            <a:extLst>
+              <a:ext uri="{FF2B5EF4-FFF2-40B4-BE49-F238E27FC236}">
+                <a16:creationId xmlns:a16="http://schemas.microsoft.com/office/drawing/2014/main" id="{0B6B5A6A-7961-D009-6FA6-4664D791DD99}"/>
+              </a:ext>
+            </a:extLst>
+          </p:cNvPr>
           <p:cNvSpPr txBox="1"/>
           <p:nvPr/>
         </p:nvSpPr>
         <p:spPr>
           <a:xfrm>
-            <a:off x="11247120" y="6510528"/>
-            <a:ext cx="731520" cy="274320"/>
+            <a:off x="548640" y="411480"/>
+            <a:ext cx="6858000" cy="169277"/>
           </a:xfrm>
           <a:prstGeom prst="rect">
             <a:avLst/>
@@ -10664,21 +10139,27 @@
           <a:noFill/>
         </p:spPr>
         <p:txBody>
-          <a:bodyPr wrap="square" lIns="0" rIns="0" tIns="0" bIns="0" anchor="t">
+          <a:bodyPr wrap="square" lIns="0" tIns="0" rIns="0" bIns="0" anchor="t">
             <a:spAutoFit/>
           </a:bodyPr>
           <a:lstStyle/>
           <a:p>
-            <a:pPr algn="r"/>
-            <a:r>
-              <a:rPr sz="900" b="0" i="0">
-                <a:solidFill>
-                  <a:srgbClr val="656B75"/>
+            <a:pPr algn="l"/>
+            <a:r>
+              <a:rPr lang="en-US" sz="1100" b="1" i="0" dirty="0">
+                <a:solidFill>
+                  <a:srgbClr val="E07BAA"/>
                 </a:solidFill>
                 <a:latin typeface="Helvetica Neue"/>
               </a:rPr>
-              <a:t>6</a:t>
-            </a:r>
+              <a:t>ANALYSIS</a:t>
+            </a:r>
+            <a:endParaRPr sz="1100" b="1" i="0" dirty="0">
+              <a:solidFill>
+                <a:srgbClr val="E07BAA"/>
+              </a:solidFill>
+              <a:latin typeface="Helvetica Neue"/>
+            </a:endParaRPr>
           </a:p>
         </p:txBody>
       </p:sp>
@@ -10691,7 +10172,7 @@
 </file>
 
 <file path=ppt/slides/slide7.xml><?xml version="1.0" encoding="utf-8"?>
-<p:sld xmlns:a="http://schemas.openxmlformats.org/drawingml/2006/main" xmlns:p="http://schemas.openxmlformats.org/presentationml/2006/main" xmlns:r="http://schemas.openxmlformats.org/officeDocument/2006/relationships">
+<p:sld xmlns:a="http://schemas.openxmlformats.org/drawingml/2006/main" xmlns:r="http://schemas.openxmlformats.org/officeDocument/2006/relationships" xmlns:p="http://schemas.openxmlformats.org/presentationml/2006/main">
   <p:cSld>
     <p:bg>
       <p:bgPr>
@@ -10707,86 +10188,14 @@
         <p:cNvGrpSpPr/>
         <p:nvPr/>
       </p:nvGrpSpPr>
-      <p:grpSpPr/>
-      <p:sp>
-        <p:nvSpPr>
-          <p:cNvPr id="2" name="TextBox 1"/>
-          <p:cNvSpPr txBox="1"/>
-          <p:nvPr/>
-        </p:nvSpPr>
-        <p:spPr>
-          <a:xfrm>
-            <a:off x="548640" y="411480"/>
-            <a:ext cx="6858000" cy="274320"/>
-          </a:xfrm>
-          <a:prstGeom prst="rect">
-            <a:avLst/>
-          </a:prstGeom>
-          <a:noFill/>
-        </p:spPr>
-        <p:txBody>
-          <a:bodyPr wrap="square" lIns="0" rIns="0" tIns="0" bIns="0" anchor="t">
-            <a:spAutoFit/>
-          </a:bodyPr>
-          <a:lstStyle/>
-          <a:p>
-            <a:pPr algn="l"/>
-            <a:r>
-              <a:rPr sz="1100" b="1" i="0">
-                <a:solidFill>
-                  <a:srgbClr val="E07BAA"/>
-                </a:solidFill>
-                <a:latin typeface="Helvetica Neue"/>
-              </a:rPr>
-              <a:t>ACT II · ANALYZE</a:t>
-            </a:r>
-          </a:p>
-        </p:txBody>
-      </p:sp>
-      <p:sp>
-        <p:nvSpPr>
-          <p:cNvPr id="3" name="Rectangle 2"/>
-          <p:cNvSpPr/>
-          <p:nvPr/>
-        </p:nvSpPr>
-        <p:spPr>
-          <a:xfrm>
-            <a:off x="5120640" y="512064"/>
-            <a:ext cx="6583680" cy="9144"/>
-          </a:xfrm>
-          <a:prstGeom prst="rect">
-            <a:avLst/>
-          </a:prstGeom>
-          <a:solidFill>
-            <a:srgbClr val="282C35"/>
-          </a:solidFill>
-          <a:ln>
-            <a:noFill/>
-          </a:ln>
-          <a:effectLst/>
-        </p:spPr>
-        <p:style>
-          <a:lnRef idx="1">
-            <a:schemeClr val="accent1"/>
-          </a:lnRef>
-          <a:fillRef idx="3">
-            <a:schemeClr val="accent1"/>
-          </a:fillRef>
-          <a:effectRef idx="2">
-            <a:schemeClr val="accent1"/>
-          </a:effectRef>
-          <a:fontRef idx="minor">
-            <a:schemeClr val="lt1"/>
-          </a:fontRef>
-        </p:style>
-        <p:txBody>
-          <a:bodyPr rtlCol="0" anchor="ctr"/>
-          <a:lstStyle/>
-          <a:p>
-            <a:pPr algn="ctr"/>
-          </a:p>
-        </p:txBody>
-      </p:sp>
+      <p:grpSpPr>
+        <a:xfrm>
+          <a:off x="0" y="0"/>
+          <a:ext cx="0" cy="0"/>
+          <a:chOff x="0" y="0"/>
+          <a:chExt cx="0" cy="0"/>
+        </a:xfrm>
+      </p:grpSpPr>
       <p:sp>
         <p:nvSpPr>
           <p:cNvPr id="4" name="TextBox 3"/>
@@ -10804,7 +10213,7 @@
           <a:noFill/>
         </p:spPr>
         <p:txBody>
-          <a:bodyPr wrap="square" lIns="0" rIns="0" tIns="0" bIns="0" anchor="t">
+          <a:bodyPr wrap="square" lIns="0" tIns="0" rIns="0" bIns="0" anchor="t">
             <a:spAutoFit/>
           </a:bodyPr>
           <a:lstStyle/>
@@ -10831,7 +10240,7 @@
         <p:spPr>
           <a:xfrm>
             <a:off x="548640" y="1874519"/>
-            <a:ext cx="11091672" cy="411480"/>
+            <a:ext cx="11091672" cy="307777"/>
           </a:xfrm>
           <a:prstGeom prst="rect">
             <a:avLst/>
@@ -10839,14 +10248,14 @@
           <a:noFill/>
         </p:spPr>
         <p:txBody>
-          <a:bodyPr wrap="square" lIns="0" rIns="0" tIns="0" bIns="0" anchor="t">
+          <a:bodyPr wrap="square" lIns="0" tIns="0" rIns="0" bIns="0" anchor="t">
             <a:spAutoFit/>
           </a:bodyPr>
           <a:lstStyle/>
           <a:p>
             <a:pPr algn="l"/>
             <a:r>
-              <a:rPr sz="1400" b="0" i="1">
+              <a:rPr sz="2000" b="0" i="1">
                 <a:solidFill>
                   <a:srgbClr val="9AA1AB"/>
                 </a:solidFill>
@@ -10898,6 +10307,7 @@
           <a:lstStyle/>
           <a:p>
             <a:pPr algn="ctr"/>
+            <a:endParaRPr/>
           </a:p>
         </p:txBody>
       </p:sp>
@@ -10942,6 +10352,7 @@
           <a:lstStyle/>
           <a:p>
             <a:pPr algn="ctr"/>
+            <a:endParaRPr/>
           </a:p>
         </p:txBody>
       </p:sp>
@@ -10953,8 +10364,8 @@
         </p:nvSpPr>
         <p:spPr>
           <a:xfrm>
-            <a:off x="1371600" y="2697479"/>
-            <a:ext cx="3840480" cy="502920"/>
+            <a:off x="1371600" y="2841217"/>
+            <a:ext cx="3840480" cy="215444"/>
           </a:xfrm>
           <a:prstGeom prst="rect">
             <a:avLst/>
@@ -10962,14 +10373,14 @@
           <a:noFill/>
         </p:spPr>
         <p:txBody>
-          <a:bodyPr wrap="square" lIns="0" rIns="0" tIns="0" bIns="0" anchor="ctr">
+          <a:bodyPr wrap="square" lIns="0" tIns="0" rIns="0" bIns="0" anchor="ctr">
             <a:spAutoFit/>
           </a:bodyPr>
           <a:lstStyle/>
           <a:p>
             <a:pPr algn="l"/>
             <a:r>
-              <a:rPr sz="1200" b="1" i="0">
+              <a:rPr sz="1400" b="1" i="0">
                 <a:solidFill>
                   <a:srgbClr val="E07B7B"/>
                 </a:solidFill>
@@ -10988,8 +10399,8 @@
         </p:nvSpPr>
         <p:spPr>
           <a:xfrm>
-            <a:off x="5303520" y="2697479"/>
-            <a:ext cx="5577840" cy="502920"/>
+            <a:off x="5303520" y="2810439"/>
+            <a:ext cx="5577840" cy="276999"/>
           </a:xfrm>
           <a:prstGeom prst="rect">
             <a:avLst/>
@@ -10997,14 +10408,14 @@
           <a:noFill/>
         </p:spPr>
         <p:txBody>
-          <a:bodyPr wrap="square" lIns="0" rIns="0" tIns="0" bIns="0" anchor="ctr">
+          <a:bodyPr wrap="square" lIns="0" tIns="0" rIns="0" bIns="0" anchor="ctr">
             <a:spAutoFit/>
           </a:bodyPr>
           <a:lstStyle/>
           <a:p>
             <a:pPr algn="l"/>
             <a:r>
-              <a:rPr sz="1400" b="0" i="0">
+              <a:rPr b="0" i="0">
                 <a:solidFill>
                   <a:srgbClr val="F2F3F5"/>
                 </a:solidFill>
@@ -11056,6 +10467,7 @@
           <a:lstStyle/>
           <a:p>
             <a:pPr algn="ctr"/>
+            <a:endParaRPr/>
           </a:p>
         </p:txBody>
       </p:sp>
@@ -11100,6 +10512,7 @@
           <a:lstStyle/>
           <a:p>
             <a:pPr algn="ctr"/>
+            <a:endParaRPr/>
           </a:p>
         </p:txBody>
       </p:sp>
@@ -11111,8 +10524,8 @@
         </p:nvSpPr>
         <p:spPr>
           <a:xfrm>
-            <a:off x="1371600" y="3611879"/>
-            <a:ext cx="3840480" cy="502920"/>
+            <a:off x="1371600" y="3755617"/>
+            <a:ext cx="3840480" cy="215444"/>
           </a:xfrm>
           <a:prstGeom prst="rect">
             <a:avLst/>
@@ -11120,14 +10533,14 @@
           <a:noFill/>
         </p:spPr>
         <p:txBody>
-          <a:bodyPr wrap="square" lIns="0" rIns="0" tIns="0" bIns="0" anchor="ctr">
+          <a:bodyPr wrap="square" lIns="0" tIns="0" rIns="0" bIns="0" anchor="ctr">
             <a:spAutoFit/>
           </a:bodyPr>
           <a:lstStyle/>
           <a:p>
             <a:pPr algn="l"/>
             <a:r>
-              <a:rPr sz="1200" b="1" i="0">
+              <a:rPr sz="1400" b="1" i="0">
                 <a:solidFill>
                   <a:srgbClr val="E0C27B"/>
                 </a:solidFill>
@@ -11146,8 +10559,8 @@
         </p:nvSpPr>
         <p:spPr>
           <a:xfrm>
-            <a:off x="5303520" y="3611879"/>
-            <a:ext cx="5577840" cy="502920"/>
+            <a:off x="5303520" y="3586340"/>
+            <a:ext cx="5577840" cy="553998"/>
           </a:xfrm>
           <a:prstGeom prst="rect">
             <a:avLst/>
@@ -11155,14 +10568,14 @@
           <a:noFill/>
         </p:spPr>
         <p:txBody>
-          <a:bodyPr wrap="square" lIns="0" rIns="0" tIns="0" bIns="0" anchor="ctr">
+          <a:bodyPr wrap="square" lIns="0" tIns="0" rIns="0" bIns="0" anchor="ctr">
             <a:spAutoFit/>
           </a:bodyPr>
           <a:lstStyle/>
           <a:p>
             <a:pPr algn="l"/>
             <a:r>
-              <a:rPr sz="1400" b="0" i="0">
+              <a:rPr b="0" i="0">
                 <a:solidFill>
                   <a:srgbClr val="F2F3F5"/>
                 </a:solidFill>
@@ -11214,6 +10627,7 @@
           <a:lstStyle/>
           <a:p>
             <a:pPr algn="ctr"/>
+            <a:endParaRPr/>
           </a:p>
         </p:txBody>
       </p:sp>
@@ -11258,6 +10672,7 @@
           <a:lstStyle/>
           <a:p>
             <a:pPr algn="ctr"/>
+            <a:endParaRPr/>
           </a:p>
         </p:txBody>
       </p:sp>
@@ -11269,8 +10684,8 @@
         </p:nvSpPr>
         <p:spPr>
           <a:xfrm>
-            <a:off x="1371600" y="4526280"/>
-            <a:ext cx="3840480" cy="502920"/>
+            <a:off x="1371600" y="4670018"/>
+            <a:ext cx="3840480" cy="215444"/>
           </a:xfrm>
           <a:prstGeom prst="rect">
             <a:avLst/>
@@ -11278,14 +10693,14 @@
           <a:noFill/>
         </p:spPr>
         <p:txBody>
-          <a:bodyPr wrap="square" lIns="0" rIns="0" tIns="0" bIns="0" anchor="ctr">
+          <a:bodyPr wrap="square" lIns="0" tIns="0" rIns="0" bIns="0" anchor="ctr">
             <a:spAutoFit/>
           </a:bodyPr>
           <a:lstStyle/>
           <a:p>
             <a:pPr algn="l"/>
             <a:r>
-              <a:rPr sz="1200" b="1" i="0">
+              <a:rPr sz="1400" b="1" i="0">
                 <a:solidFill>
                   <a:srgbClr val="E07BAA"/>
                 </a:solidFill>
@@ -11304,8 +10719,8 @@
         </p:nvSpPr>
         <p:spPr>
           <a:xfrm>
-            <a:off x="5303520" y="4526280"/>
-            <a:ext cx="5577840" cy="502920"/>
+            <a:off x="5303520" y="4500741"/>
+            <a:ext cx="5577840" cy="553998"/>
           </a:xfrm>
           <a:prstGeom prst="rect">
             <a:avLst/>
@@ -11313,14 +10728,14 @@
           <a:noFill/>
         </p:spPr>
         <p:txBody>
-          <a:bodyPr wrap="square" lIns="0" rIns="0" tIns="0" bIns="0" anchor="ctr">
+          <a:bodyPr wrap="square" lIns="0" tIns="0" rIns="0" bIns="0" anchor="ctr">
             <a:spAutoFit/>
           </a:bodyPr>
           <a:lstStyle/>
           <a:p>
             <a:pPr algn="l"/>
             <a:r>
-              <a:rPr sz="1400" b="0" i="0">
+              <a:rPr b="0" i="0">
                 <a:solidFill>
                   <a:srgbClr val="F2F3F5"/>
                 </a:solidFill>
@@ -11372,6 +10787,7 @@
           <a:lstStyle/>
           <a:p>
             <a:pPr algn="ctr"/>
+            <a:endParaRPr/>
           </a:p>
         </p:txBody>
       </p:sp>
@@ -11416,6 +10832,7 @@
           <a:lstStyle/>
           <a:p>
             <a:pPr algn="ctr"/>
+            <a:endParaRPr/>
           </a:p>
         </p:txBody>
       </p:sp>
@@ -11427,8 +10844,8 @@
         </p:nvSpPr>
         <p:spPr>
           <a:xfrm>
-            <a:off x="1371600" y="5440680"/>
-            <a:ext cx="3840480" cy="502920"/>
+            <a:off x="1371600" y="5584418"/>
+            <a:ext cx="3840480" cy="215444"/>
           </a:xfrm>
           <a:prstGeom prst="rect">
             <a:avLst/>
@@ -11436,14 +10853,14 @@
           <a:noFill/>
         </p:spPr>
         <p:txBody>
-          <a:bodyPr wrap="square" lIns="0" rIns="0" tIns="0" bIns="0" anchor="ctr">
+          <a:bodyPr wrap="square" lIns="0" tIns="0" rIns="0" bIns="0" anchor="ctr">
             <a:spAutoFit/>
           </a:bodyPr>
           <a:lstStyle/>
           <a:p>
             <a:pPr algn="l"/>
             <a:r>
-              <a:rPr sz="1200" b="1" i="0">
+              <a:rPr sz="1400" b="1" i="0">
                 <a:solidFill>
                   <a:srgbClr val="7B9FE0"/>
                 </a:solidFill>
@@ -11462,8 +10879,8 @@
         </p:nvSpPr>
         <p:spPr>
           <a:xfrm>
-            <a:off x="5303520" y="5440680"/>
-            <a:ext cx="5577840" cy="502920"/>
+            <a:off x="5303520" y="5553640"/>
+            <a:ext cx="5577840" cy="276999"/>
           </a:xfrm>
           <a:prstGeom prst="rect">
             <a:avLst/>
@@ -11471,14 +10888,14 @@
           <a:noFill/>
         </p:spPr>
         <p:txBody>
-          <a:bodyPr wrap="square" lIns="0" rIns="0" tIns="0" bIns="0" anchor="ctr">
+          <a:bodyPr wrap="square" lIns="0" tIns="0" rIns="0" bIns="0" anchor="ctr">
             <a:spAutoFit/>
           </a:bodyPr>
           <a:lstStyle/>
           <a:p>
             <a:pPr algn="l"/>
             <a:r>
-              <a:rPr sz="1400" b="0" i="0">
+              <a:rPr b="0" i="0">
                 <a:solidFill>
                   <a:srgbClr val="F2F3F5"/>
                 </a:solidFill>
@@ -11491,14 +10908,20 @@
       </p:sp>
       <p:sp>
         <p:nvSpPr>
-          <p:cNvPr id="22" name="TextBox 21"/>
+          <p:cNvPr id="23" name="TextBox 22">
+            <a:extLst>
+              <a:ext uri="{FF2B5EF4-FFF2-40B4-BE49-F238E27FC236}">
+                <a16:creationId xmlns:a16="http://schemas.microsoft.com/office/drawing/2014/main" id="{CC8155A0-9807-E5EF-E6A3-B1E21F13B3E2}"/>
+              </a:ext>
+            </a:extLst>
+          </p:cNvPr>
           <p:cNvSpPr txBox="1"/>
           <p:nvPr/>
         </p:nvSpPr>
         <p:spPr>
           <a:xfrm>
-            <a:off x="11247120" y="6510528"/>
-            <a:ext cx="731520" cy="274320"/>
+            <a:off x="548640" y="411480"/>
+            <a:ext cx="6858000" cy="169277"/>
           </a:xfrm>
           <a:prstGeom prst="rect">
             <a:avLst/>
@@ -11506,21 +10929,27 @@
           <a:noFill/>
         </p:spPr>
         <p:txBody>
-          <a:bodyPr wrap="square" lIns="0" rIns="0" tIns="0" bIns="0" anchor="t">
+          <a:bodyPr wrap="square" lIns="0" tIns="0" rIns="0" bIns="0" anchor="t">
             <a:spAutoFit/>
           </a:bodyPr>
           <a:lstStyle/>
           <a:p>
-            <a:pPr algn="r"/>
-            <a:r>
-              <a:rPr sz="900" b="0" i="0">
-                <a:solidFill>
-                  <a:srgbClr val="656B75"/>
+            <a:pPr algn="l"/>
+            <a:r>
+              <a:rPr lang="en-US" sz="1100" b="1" i="0" dirty="0">
+                <a:solidFill>
+                  <a:srgbClr val="E07BAA"/>
                 </a:solidFill>
                 <a:latin typeface="Helvetica Neue"/>
               </a:rPr>
-              <a:t>7</a:t>
-            </a:r>
+              <a:t>ANALYSIS</a:t>
+            </a:r>
+            <a:endParaRPr sz="1100" b="1" i="0" dirty="0">
+              <a:solidFill>
+                <a:srgbClr val="E07BAA"/>
+              </a:solidFill>
+              <a:latin typeface="Helvetica Neue"/>
+            </a:endParaRPr>
           </a:p>
         </p:txBody>
       </p:sp>
@@ -11533,7 +10962,7 @@
 </file>
 
 <file path=ppt/slides/slide8.xml><?xml version="1.0" encoding="utf-8"?>
-<p:sld xmlns:a="http://schemas.openxmlformats.org/drawingml/2006/main" xmlns:p="http://schemas.openxmlformats.org/presentationml/2006/main" xmlns:r="http://schemas.openxmlformats.org/officeDocument/2006/relationships">
+<p:sld xmlns:a="http://schemas.openxmlformats.org/drawingml/2006/main" xmlns:r="http://schemas.openxmlformats.org/officeDocument/2006/relationships" xmlns:p="http://schemas.openxmlformats.org/presentationml/2006/main">
   <p:cSld>
     <p:bg>
       <p:bgPr>
@@ -11549,86 +10978,14 @@
         <p:cNvGrpSpPr/>
         <p:nvPr/>
       </p:nvGrpSpPr>
-      <p:grpSpPr/>
-      <p:sp>
-        <p:nvSpPr>
-          <p:cNvPr id="2" name="TextBox 1"/>
-          <p:cNvSpPr txBox="1"/>
-          <p:nvPr/>
-        </p:nvSpPr>
-        <p:spPr>
-          <a:xfrm>
-            <a:off x="548640" y="411480"/>
-            <a:ext cx="6858000" cy="274320"/>
-          </a:xfrm>
-          <a:prstGeom prst="rect">
-            <a:avLst/>
-          </a:prstGeom>
-          <a:noFill/>
-        </p:spPr>
-        <p:txBody>
-          <a:bodyPr wrap="square" lIns="0" rIns="0" tIns="0" bIns="0" anchor="t">
-            <a:spAutoFit/>
-          </a:bodyPr>
-          <a:lstStyle/>
-          <a:p>
-            <a:pPr algn="l"/>
-            <a:r>
-              <a:rPr sz="1100" b="1" i="0">
-                <a:solidFill>
-                  <a:srgbClr val="E07BAA"/>
-                </a:solidFill>
-                <a:latin typeface="Helvetica Neue"/>
-              </a:rPr>
-              <a:t>ACT II · ANALYZE</a:t>
-            </a:r>
-          </a:p>
-        </p:txBody>
-      </p:sp>
-      <p:sp>
-        <p:nvSpPr>
-          <p:cNvPr id="3" name="Rectangle 2"/>
-          <p:cNvSpPr/>
-          <p:nvPr/>
-        </p:nvSpPr>
-        <p:spPr>
-          <a:xfrm>
-            <a:off x="5120640" y="512064"/>
-            <a:ext cx="6583680" cy="9144"/>
-          </a:xfrm>
-          <a:prstGeom prst="rect">
-            <a:avLst/>
-          </a:prstGeom>
-          <a:solidFill>
-            <a:srgbClr val="282C35"/>
-          </a:solidFill>
-          <a:ln>
-            <a:noFill/>
-          </a:ln>
-          <a:effectLst/>
-        </p:spPr>
-        <p:style>
-          <a:lnRef idx="1">
-            <a:schemeClr val="accent1"/>
-          </a:lnRef>
-          <a:fillRef idx="3">
-            <a:schemeClr val="accent1"/>
-          </a:fillRef>
-          <a:effectRef idx="2">
-            <a:schemeClr val="accent1"/>
-          </a:effectRef>
-          <a:fontRef idx="minor">
-            <a:schemeClr val="lt1"/>
-          </a:fontRef>
-        </p:style>
-        <p:txBody>
-          <a:bodyPr rtlCol="0" anchor="ctr"/>
-          <a:lstStyle/>
-          <a:p>
-            <a:pPr algn="ctr"/>
-          </a:p>
-        </p:txBody>
-      </p:sp>
+      <p:grpSpPr>
+        <a:xfrm>
+          <a:off x="0" y="0"/>
+          <a:ext cx="0" cy="0"/>
+          <a:chOff x="0" y="0"/>
+          <a:chExt cx="0" cy="0"/>
+        </a:xfrm>
+      </p:grpSpPr>
       <p:sp>
         <p:nvSpPr>
           <p:cNvPr id="4" name="TextBox 3"/>
@@ -11646,7 +11003,7 @@
           <a:noFill/>
         </p:spPr>
         <p:txBody>
-          <a:bodyPr wrap="square" lIns="0" rIns="0" tIns="0" bIns="0" anchor="t">
+          <a:bodyPr wrap="square" lIns="0" tIns="0" rIns="0" bIns="0" anchor="t">
             <a:spAutoFit/>
           </a:bodyPr>
           <a:lstStyle/>
@@ -11681,7 +11038,7 @@
           <a:noFill/>
         </p:spPr>
         <p:txBody>
-          <a:bodyPr wrap="square" lIns="0" rIns="0" tIns="0" bIns="0" anchor="t">
+          <a:bodyPr wrap="square" lIns="0" tIns="0" rIns="0" bIns="0" anchor="t">
             <a:spAutoFit/>
           </a:bodyPr>
           <a:lstStyle/>
@@ -11740,6 +11097,7 @@
           <a:lstStyle/>
           <a:p>
             <a:pPr algn="ctr"/>
+            <a:endParaRPr/>
           </a:p>
         </p:txBody>
       </p:sp>
@@ -11784,6 +11142,7 @@
           <a:lstStyle/>
           <a:p>
             <a:pPr algn="ctr"/>
+            <a:endParaRPr/>
           </a:p>
         </p:txBody>
       </p:sp>
@@ -11804,7 +11163,7 @@
           <a:noFill/>
         </p:spPr>
         <p:txBody>
-          <a:bodyPr wrap="square" lIns="0" rIns="0" tIns="0" bIns="0" anchor="t">
+          <a:bodyPr wrap="square" lIns="0" tIns="0" rIns="0" bIns="0" anchor="t">
             <a:spAutoFit/>
           </a:bodyPr>
           <a:lstStyle/>
@@ -11839,7 +11198,7 @@
           <a:noFill/>
         </p:spPr>
         <p:txBody>
-          <a:bodyPr wrap="square" lIns="0" rIns="0" tIns="0" bIns="0" anchor="t">
+          <a:bodyPr wrap="square" lIns="0" tIns="0" rIns="0" bIns="0" anchor="t">
             <a:spAutoFit/>
           </a:bodyPr>
           <a:lstStyle/>
@@ -11874,7 +11233,7 @@
           <a:noFill/>
         </p:spPr>
         <p:txBody>
-          <a:bodyPr wrap="square" lIns="0" rIns="0" tIns="0" bIns="0" anchor="t">
+          <a:bodyPr wrap="square" lIns="0" tIns="0" rIns="0" bIns="0" anchor="t">
             <a:spAutoFit/>
           </a:bodyPr>
           <a:lstStyle/>
@@ -11933,6 +11292,7 @@
           <a:lstStyle/>
           <a:p>
             <a:pPr algn="ctr"/>
+            <a:endParaRPr/>
           </a:p>
         </p:txBody>
       </p:sp>
@@ -11977,6 +11337,7 @@
           <a:lstStyle/>
           <a:p>
             <a:pPr algn="ctr"/>
+            <a:endParaRPr/>
           </a:p>
         </p:txBody>
       </p:sp>
@@ -11997,7 +11358,7 @@
           <a:noFill/>
         </p:spPr>
         <p:txBody>
-          <a:bodyPr wrap="square" lIns="0" rIns="0" tIns="0" bIns="0" anchor="t">
+          <a:bodyPr wrap="square" lIns="0" tIns="0" rIns="0" bIns="0" anchor="t">
             <a:spAutoFit/>
           </a:bodyPr>
           <a:lstStyle/>
@@ -12032,7 +11393,7 @@
           <a:noFill/>
         </p:spPr>
         <p:txBody>
-          <a:bodyPr wrap="square" lIns="0" rIns="0" tIns="0" bIns="0" anchor="t">
+          <a:bodyPr wrap="square" lIns="0" tIns="0" rIns="0" bIns="0" anchor="t">
             <a:spAutoFit/>
           </a:bodyPr>
           <a:lstStyle/>
@@ -12067,7 +11428,7 @@
           <a:noFill/>
         </p:spPr>
         <p:txBody>
-          <a:bodyPr wrap="square" lIns="0" rIns="0" tIns="0" bIns="0" anchor="t">
+          <a:bodyPr wrap="square" lIns="0" tIns="0" rIns="0" bIns="0" anchor="t">
             <a:spAutoFit/>
           </a:bodyPr>
           <a:lstStyle/>
@@ -12126,6 +11487,7 @@
           <a:lstStyle/>
           <a:p>
             <a:pPr algn="ctr"/>
+            <a:endParaRPr/>
           </a:p>
         </p:txBody>
       </p:sp>
@@ -12170,6 +11532,7 @@
           <a:lstStyle/>
           <a:p>
             <a:pPr algn="ctr"/>
+            <a:endParaRPr/>
           </a:p>
         </p:txBody>
       </p:sp>
@@ -12190,7 +11553,7 @@
           <a:noFill/>
         </p:spPr>
         <p:txBody>
-          <a:bodyPr wrap="square" lIns="0" rIns="0" tIns="0" bIns="0" anchor="t">
+          <a:bodyPr wrap="square" lIns="0" tIns="0" rIns="0" bIns="0" anchor="t">
             <a:spAutoFit/>
           </a:bodyPr>
           <a:lstStyle/>
@@ -12225,7 +11588,7 @@
           <a:noFill/>
         </p:spPr>
         <p:txBody>
-          <a:bodyPr wrap="square" lIns="0" rIns="0" tIns="0" bIns="0" anchor="t">
+          <a:bodyPr wrap="square" lIns="0" tIns="0" rIns="0" bIns="0" anchor="t">
             <a:spAutoFit/>
           </a:bodyPr>
           <a:lstStyle/>
@@ -12260,7 +11623,7 @@
           <a:noFill/>
         </p:spPr>
         <p:txBody>
-          <a:bodyPr wrap="square" lIns="0" rIns="0" tIns="0" bIns="0" anchor="t">
+          <a:bodyPr wrap="square" lIns="0" tIns="0" rIns="0" bIns="0" anchor="t">
             <a:spAutoFit/>
           </a:bodyPr>
           <a:lstStyle/>
@@ -12319,6 +11682,7 @@
           <a:lstStyle/>
           <a:p>
             <a:pPr algn="ctr"/>
+            <a:endParaRPr/>
           </a:p>
         </p:txBody>
       </p:sp>
@@ -12363,6 +11727,7 @@
           <a:lstStyle/>
           <a:p>
             <a:pPr algn="ctr"/>
+            <a:endParaRPr/>
           </a:p>
         </p:txBody>
       </p:sp>
@@ -12383,7 +11748,7 @@
           <a:noFill/>
         </p:spPr>
         <p:txBody>
-          <a:bodyPr wrap="square" lIns="0" rIns="0" tIns="0" bIns="0" anchor="t">
+          <a:bodyPr wrap="square" lIns="0" tIns="0" rIns="0" bIns="0" anchor="t">
             <a:spAutoFit/>
           </a:bodyPr>
           <a:lstStyle/>
@@ -12418,7 +11783,7 @@
           <a:noFill/>
         </p:spPr>
         <p:txBody>
-          <a:bodyPr wrap="square" lIns="0" rIns="0" tIns="0" bIns="0" anchor="t">
+          <a:bodyPr wrap="square" lIns="0" tIns="0" rIns="0" bIns="0" anchor="t">
             <a:spAutoFit/>
           </a:bodyPr>
           <a:lstStyle/>
@@ -12453,7 +11818,7 @@
           <a:noFill/>
         </p:spPr>
         <p:txBody>
-          <a:bodyPr wrap="square" lIns="0" rIns="0" tIns="0" bIns="0" anchor="t">
+          <a:bodyPr wrap="square" lIns="0" tIns="0" rIns="0" bIns="0" anchor="t">
             <a:spAutoFit/>
           </a:bodyPr>
           <a:lstStyle/>
@@ -12473,14 +11838,20 @@
       </p:sp>
       <p:sp>
         <p:nvSpPr>
-          <p:cNvPr id="26" name="TextBox 25"/>
+          <p:cNvPr id="28" name="TextBox 27">
+            <a:extLst>
+              <a:ext uri="{FF2B5EF4-FFF2-40B4-BE49-F238E27FC236}">
+                <a16:creationId xmlns:a16="http://schemas.microsoft.com/office/drawing/2014/main" id="{5B5D63A5-9FC3-5281-D26B-F31EE9394D14}"/>
+              </a:ext>
+            </a:extLst>
+          </p:cNvPr>
           <p:cNvSpPr txBox="1"/>
           <p:nvPr/>
         </p:nvSpPr>
         <p:spPr>
           <a:xfrm>
-            <a:off x="11247120" y="6510528"/>
-            <a:ext cx="731520" cy="274320"/>
+            <a:off x="548640" y="411480"/>
+            <a:ext cx="6858000" cy="169277"/>
           </a:xfrm>
           <a:prstGeom prst="rect">
             <a:avLst/>
@@ -12488,21 +11859,27 @@
           <a:noFill/>
         </p:spPr>
         <p:txBody>
-          <a:bodyPr wrap="square" lIns="0" rIns="0" tIns="0" bIns="0" anchor="t">
+          <a:bodyPr wrap="square" lIns="0" tIns="0" rIns="0" bIns="0" anchor="t">
             <a:spAutoFit/>
           </a:bodyPr>
           <a:lstStyle/>
           <a:p>
-            <a:pPr algn="r"/>
-            <a:r>
-              <a:rPr sz="900" b="0" i="0">
-                <a:solidFill>
-                  <a:srgbClr val="656B75"/>
+            <a:pPr algn="l"/>
+            <a:r>
+              <a:rPr lang="en-US" sz="1100" b="1" i="0" dirty="0">
+                <a:solidFill>
+                  <a:srgbClr val="E07BAA"/>
                 </a:solidFill>
                 <a:latin typeface="Helvetica Neue"/>
               </a:rPr>
-              <a:t>8</a:t>
-            </a:r>
+              <a:t>ANALYSIS</a:t>
+            </a:r>
+            <a:endParaRPr sz="1100" b="1" i="0" dirty="0">
+              <a:solidFill>
+                <a:srgbClr val="E07BAA"/>
+              </a:solidFill>
+              <a:latin typeface="Helvetica Neue"/>
+            </a:endParaRPr>
           </a:p>
         </p:txBody>
       </p:sp>
@@ -12515,7 +11892,7 @@
 </file>
 
 <file path=ppt/slides/slide9.xml><?xml version="1.0" encoding="utf-8"?>
-<p:sld xmlns:a="http://schemas.openxmlformats.org/drawingml/2006/main" xmlns:p="http://schemas.openxmlformats.org/presentationml/2006/main" xmlns:r="http://schemas.openxmlformats.org/officeDocument/2006/relationships">
+<p:sld xmlns:a="http://schemas.openxmlformats.org/drawingml/2006/main" xmlns:r="http://schemas.openxmlformats.org/officeDocument/2006/relationships" xmlns:p="http://schemas.openxmlformats.org/presentationml/2006/main">
   <p:cSld>
     <p:bg>
       <p:bgPr>
@@ -12531,7 +11908,14 @@
         <p:cNvGrpSpPr/>
         <p:nvPr/>
       </p:nvGrpSpPr>
-      <p:grpSpPr/>
+      <p:grpSpPr>
+        <a:xfrm>
+          <a:off x="0" y="0"/>
+          <a:ext cx="0" cy="0"/>
+          <a:chOff x="0" y="0"/>
+          <a:chExt cx="0" cy="0"/>
+        </a:xfrm>
+      </p:grpSpPr>
       <p:sp>
         <p:nvSpPr>
           <p:cNvPr id="2" name="TextBox 1"/>
@@ -12541,7 +11925,7 @@
         <p:spPr>
           <a:xfrm>
             <a:off x="548640" y="411480"/>
-            <a:ext cx="6858000" cy="274320"/>
+            <a:ext cx="6858000" cy="169277"/>
           </a:xfrm>
           <a:prstGeom prst="rect">
             <a:avLst/>
@@ -12549,65 +11933,27 @@
           <a:noFill/>
         </p:spPr>
         <p:txBody>
-          <a:bodyPr wrap="square" lIns="0" rIns="0" tIns="0" bIns="0" anchor="t">
+          <a:bodyPr wrap="square" lIns="0" tIns="0" rIns="0" bIns="0" anchor="t">
             <a:spAutoFit/>
           </a:bodyPr>
           <a:lstStyle/>
           <a:p>
             <a:pPr algn="l"/>
             <a:r>
-              <a:rPr sz="1100" b="1" i="0">
+              <a:rPr lang="en-US" sz="1100" b="1" i="0" dirty="0">
                 <a:solidFill>
                   <a:srgbClr val="7BE0B4"/>
                 </a:solidFill>
                 <a:latin typeface="Helvetica Neue"/>
               </a:rPr>
-              <a:t>ACT III · IMPROVE</a:t>
-            </a:r>
-          </a:p>
-        </p:txBody>
-      </p:sp>
-      <p:sp>
-        <p:nvSpPr>
-          <p:cNvPr id="3" name="Rectangle 2"/>
-          <p:cNvSpPr/>
-          <p:nvPr/>
-        </p:nvSpPr>
-        <p:spPr>
-          <a:xfrm>
-            <a:off x="5120640" y="512064"/>
-            <a:ext cx="6583680" cy="9144"/>
-          </a:xfrm>
-          <a:prstGeom prst="rect">
-            <a:avLst/>
-          </a:prstGeom>
-          <a:solidFill>
-            <a:srgbClr val="282C35"/>
-          </a:solidFill>
-          <a:ln>
-            <a:noFill/>
-          </a:ln>
-          <a:effectLst/>
-        </p:spPr>
-        <p:style>
-          <a:lnRef idx="1">
-            <a:schemeClr val="accent1"/>
-          </a:lnRef>
-          <a:fillRef idx="3">
-            <a:schemeClr val="accent1"/>
-          </a:fillRef>
-          <a:effectRef idx="2">
-            <a:schemeClr val="accent1"/>
-          </a:effectRef>
-          <a:fontRef idx="minor">
-            <a:schemeClr val="lt1"/>
-          </a:fontRef>
-        </p:style>
-        <p:txBody>
-          <a:bodyPr rtlCol="0" anchor="ctr"/>
-          <a:lstStyle/>
-          <a:p>
-            <a:pPr algn="ctr"/>
+              <a:t>REDESIGN</a:t>
+            </a:r>
+            <a:endParaRPr sz="1100" b="1" i="0" dirty="0">
+              <a:solidFill>
+                <a:srgbClr val="7BE0B4"/>
+              </a:solidFill>
+              <a:latin typeface="Helvetica Neue"/>
+            </a:endParaRPr>
           </a:p>
         </p:txBody>
       </p:sp>
@@ -12628,7 +11974,7 @@
           <a:noFill/>
         </p:spPr>
         <p:txBody>
-          <a:bodyPr wrap="square" lIns="0" rIns="0" tIns="0" bIns="0" anchor="t">
+          <a:bodyPr wrap="square" lIns="0" tIns="0" rIns="0" bIns="0" anchor="t">
             <a:spAutoFit/>
           </a:bodyPr>
           <a:lstStyle/>
@@ -12663,7 +12009,7 @@
           <a:noFill/>
         </p:spPr>
         <p:txBody>
-          <a:bodyPr wrap="square" lIns="0" rIns="0" tIns="0" bIns="0" anchor="t">
+          <a:bodyPr wrap="square" lIns="0" tIns="0" rIns="0" bIns="0" anchor="t">
             <a:spAutoFit/>
           </a:bodyPr>
           <a:lstStyle/>
@@ -12690,7 +12036,7 @@
           <p:nvPr/>
         </p:nvPicPr>
         <p:blipFill>
-          <a:blip r:embed="rId2"/>
+          <a:blip r:embed="rId3"/>
           <a:stretch>
             <a:fillRect/>
           </a:stretch>
@@ -12714,7 +12060,7 @@
           <p:nvPr/>
         </p:nvPicPr>
         <p:blipFill>
-          <a:blip r:embed="rId3"/>
+          <a:blip r:embed="rId4"/>
           <a:stretch>
             <a:fillRect/>
           </a:stretch>
@@ -12770,6 +12116,7 @@
           <a:lstStyle/>
           <a:p>
             <a:pPr algn="ctr"/>
+            <a:endParaRPr/>
           </a:p>
         </p:txBody>
       </p:sp>
@@ -12814,6 +12161,7 @@
           <a:lstStyle/>
           <a:p>
             <a:pPr algn="ctr"/>
+            <a:endParaRPr/>
           </a:p>
         </p:txBody>
       </p:sp>
@@ -12834,7 +12182,7 @@
           <a:noFill/>
         </p:spPr>
         <p:txBody>
-          <a:bodyPr wrap="square" lIns="0" rIns="0" tIns="0" bIns="0" anchor="t">
+          <a:bodyPr wrap="square" lIns="0" tIns="0" rIns="0" bIns="0" anchor="t">
             <a:spAutoFit/>
           </a:bodyPr>
           <a:lstStyle/>
@@ -12869,7 +12217,7 @@
           <a:noFill/>
         </p:spPr>
         <p:txBody>
-          <a:bodyPr wrap="square" lIns="0" rIns="0" tIns="0" bIns="0" anchor="t">
+          <a:bodyPr wrap="square" lIns="0" tIns="0" rIns="0" bIns="0" anchor="t">
             <a:spAutoFit/>
           </a:bodyPr>
           <a:lstStyle/>
@@ -12928,6 +12276,7 @@
           <a:lstStyle/>
           <a:p>
             <a:pPr algn="ctr"/>
+            <a:endParaRPr/>
           </a:p>
         </p:txBody>
       </p:sp>
@@ -12972,6 +12321,7 @@
           <a:lstStyle/>
           <a:p>
             <a:pPr algn="ctr"/>
+            <a:endParaRPr/>
           </a:p>
         </p:txBody>
       </p:sp>
@@ -12992,7 +12342,7 @@
           <a:noFill/>
         </p:spPr>
         <p:txBody>
-          <a:bodyPr wrap="square" lIns="0" rIns="0" tIns="0" bIns="0" anchor="t">
+          <a:bodyPr wrap="square" lIns="0" tIns="0" rIns="0" bIns="0" anchor="t">
             <a:spAutoFit/>
           </a:bodyPr>
           <a:lstStyle/>
@@ -13027,7 +12377,7 @@
           <a:noFill/>
         </p:spPr>
         <p:txBody>
-          <a:bodyPr wrap="square" lIns="0" rIns="0" tIns="0" bIns="0" anchor="t">
+          <a:bodyPr wrap="square" lIns="0" tIns="0" rIns="0" bIns="0" anchor="t">
             <a:spAutoFit/>
           </a:bodyPr>
           <a:lstStyle/>
@@ -13086,6 +12436,7 @@
           <a:lstStyle/>
           <a:p>
             <a:pPr algn="ctr"/>
+            <a:endParaRPr/>
           </a:p>
         </p:txBody>
       </p:sp>
@@ -13130,6 +12481,7 @@
           <a:lstStyle/>
           <a:p>
             <a:pPr algn="ctr"/>
+            <a:endParaRPr/>
           </a:p>
         </p:txBody>
       </p:sp>
@@ -13150,7 +12502,7 @@
           <a:noFill/>
         </p:spPr>
         <p:txBody>
-          <a:bodyPr wrap="square" lIns="0" rIns="0" tIns="0" bIns="0" anchor="t">
+          <a:bodyPr wrap="square" lIns="0" tIns="0" rIns="0" bIns="0" anchor="t">
             <a:spAutoFit/>
           </a:bodyPr>
           <a:lstStyle/>
@@ -13185,7 +12537,7 @@
           <a:noFill/>
         </p:spPr>
         <p:txBody>
-          <a:bodyPr wrap="square" lIns="0" rIns="0" tIns="0" bIns="0" anchor="t">
+          <a:bodyPr wrap="square" lIns="0" tIns="0" rIns="0" bIns="0" anchor="t">
             <a:spAutoFit/>
           </a:bodyPr>
           <a:lstStyle/>
@@ -13199,76 +12551,6 @@
                 <a:latin typeface="Helvetica Neue"/>
               </a:rPr>
               <a:t>Geeslin and Long 2014. Real regional speech patterns matter.</a:t>
-            </a:r>
-          </a:p>
-        </p:txBody>
-      </p:sp>
-      <p:sp>
-        <p:nvSpPr>
-          <p:cNvPr id="20" name="TextBox 19"/>
-          <p:cNvSpPr txBox="1"/>
-          <p:nvPr/>
-        </p:nvSpPr>
-        <p:spPr>
-          <a:xfrm>
-            <a:off x="548640" y="6492240"/>
-            <a:ext cx="5486400" cy="274320"/>
-          </a:xfrm>
-          <a:prstGeom prst="rect">
-            <a:avLst/>
-          </a:prstGeom>
-          <a:noFill/>
-        </p:spPr>
-        <p:txBody>
-          <a:bodyPr wrap="square" lIns="0" rIns="0" tIns="0" bIns="0" anchor="t">
-            <a:spAutoFit/>
-          </a:bodyPr>
-          <a:lstStyle/>
-          <a:p>
-            <a:pPr algn="l"/>
-            <a:r>
-              <a:rPr sz="1000" b="0" i="1">
-                <a:solidFill>
-                  <a:srgbClr val="656B75"/>
-                </a:solidFill>
-                <a:latin typeface="Helvetica Neue"/>
-              </a:rPr>
-              <a:t>Carlos · Mexican Spanish.   Elena · Castilian Spanish.</a:t>
-            </a:r>
-          </a:p>
-        </p:txBody>
-      </p:sp>
-      <p:sp>
-        <p:nvSpPr>
-          <p:cNvPr id="21" name="TextBox 20"/>
-          <p:cNvSpPr txBox="1"/>
-          <p:nvPr/>
-        </p:nvSpPr>
-        <p:spPr>
-          <a:xfrm>
-            <a:off x="11247120" y="6510528"/>
-            <a:ext cx="731520" cy="274320"/>
-          </a:xfrm>
-          <a:prstGeom prst="rect">
-            <a:avLst/>
-          </a:prstGeom>
-          <a:noFill/>
-        </p:spPr>
-        <p:txBody>
-          <a:bodyPr wrap="square" lIns="0" rIns="0" tIns="0" bIns="0" anchor="t">
-            <a:spAutoFit/>
-          </a:bodyPr>
-          <a:lstStyle/>
-          <a:p>
-            <a:pPr algn="r"/>
-            <a:r>
-              <a:rPr sz="900" b="0" i="0">
-                <a:solidFill>
-                  <a:srgbClr val="656B75"/>
-                </a:solidFill>
-                <a:latin typeface="Helvetica Neue"/>
-              </a:rPr>
-              <a:t>9</a:t>
             </a:r>
           </a:p>
         </p:txBody>
@@ -13612,44 +12894,44 @@
         <a:sysClr val="window" lastClr="FFFFFF"/>
       </a:lt1>
       <a:dk2>
-        <a:srgbClr val="1F497D"/>
+        <a:srgbClr val="0E2841"/>
       </a:dk2>
       <a:lt2>
-        <a:srgbClr val="EEECE1"/>
+        <a:srgbClr val="E8E8E8"/>
       </a:lt2>
       <a:accent1>
-        <a:srgbClr val="4F81BD"/>
+        <a:srgbClr val="156082"/>
       </a:accent1>
       <a:accent2>
-        <a:srgbClr val="C0504D"/>
+        <a:srgbClr val="E97132"/>
       </a:accent2>
       <a:accent3>
-        <a:srgbClr val="9BBB59"/>
+        <a:srgbClr val="196B24"/>
       </a:accent3>
       <a:accent4>
-        <a:srgbClr val="8064A2"/>
+        <a:srgbClr val="0F9ED5"/>
       </a:accent4>
       <a:accent5>
-        <a:srgbClr val="4BACC6"/>
+        <a:srgbClr val="A02B93"/>
       </a:accent5>
       <a:accent6>
-        <a:srgbClr val="F79646"/>
+        <a:srgbClr val="4EA72E"/>
       </a:accent6>
       <a:hlink>
-        <a:srgbClr val="0000FF"/>
+        <a:srgbClr val="467886"/>
       </a:hlink>
       <a:folHlink>
-        <a:srgbClr val="800080"/>
+        <a:srgbClr val="96607D"/>
       </a:folHlink>
     </a:clrScheme>
     <a:fontScheme name="Office">
       <a:majorFont>
-        <a:latin typeface="Calibri"/>
+        <a:latin typeface="Aptos Display" panose="02110004020202020204"/>
         <a:ea typeface=""/>
         <a:cs typeface=""/>
-        <a:font script="Jpan" typeface="ＭＳ Ｐゴシック"/>
+        <a:font script="Jpan" typeface="游ゴシック Light"/>
         <a:font script="Hang" typeface="맑은 고딕"/>
-        <a:font script="Hans" typeface="宋体"/>
+        <a:font script="Hans" typeface="等线 Light"/>
         <a:font script="Hant" typeface="新細明體"/>
         <a:font script="Arab" typeface="Times New Roman"/>
         <a:font script="Hebr" typeface="Times New Roman"/>
@@ -13677,14 +12959,31 @@
         <a:font script="Viet" typeface="Times New Roman"/>
         <a:font script="Uigh" typeface="Microsoft Uighur"/>
         <a:font script="Geor" typeface="Sylfaen"/>
+        <a:font script="Armn" typeface="Arial"/>
+        <a:font script="Bugi" typeface="Leelawadee UI"/>
+        <a:font script="Bopo" typeface="Microsoft JhengHei"/>
+        <a:font script="Java" typeface="Javanese Text"/>
+        <a:font script="Lisu" typeface="Segoe UI"/>
+        <a:font script="Mymr" typeface="Myanmar Text"/>
+        <a:font script="Nkoo" typeface="Ebrima"/>
+        <a:font script="Olck" typeface="Nirmala UI"/>
+        <a:font script="Osma" typeface="Ebrima"/>
+        <a:font script="Phag" typeface="Phagspa"/>
+        <a:font script="Syrn" typeface="Estrangelo Edessa"/>
+        <a:font script="Syrj" typeface="Estrangelo Edessa"/>
+        <a:font script="Syre" typeface="Estrangelo Edessa"/>
+        <a:font script="Sora" typeface="Nirmala UI"/>
+        <a:font script="Tale" typeface="Microsoft Tai Le"/>
+        <a:font script="Talu" typeface="Microsoft New Tai Lue"/>
+        <a:font script="Tfng" typeface="Ebrima"/>
       </a:majorFont>
       <a:minorFont>
-        <a:latin typeface="Calibri"/>
+        <a:latin typeface="Aptos" panose="02110004020202020204"/>
         <a:ea typeface=""/>
         <a:cs typeface=""/>
-        <a:font script="Jpan" typeface="ＭＳ Ｐゴシック"/>
+        <a:font script="Jpan" typeface="游ゴシック"/>
         <a:font script="Hang" typeface="맑은 고딕"/>
-        <a:font script="Hans" typeface="宋体"/>
+        <a:font script="Hans" typeface="等线"/>
         <a:font script="Hant" typeface="新細明體"/>
         <a:font script="Arab" typeface="Arial"/>
         <a:font script="Hebr" typeface="Arial"/>
@@ -13712,6 +13011,23 @@
         <a:font script="Viet" typeface="Arial"/>
         <a:font script="Uigh" typeface="Microsoft Uighur"/>
         <a:font script="Geor" typeface="Sylfaen"/>
+        <a:font script="Armn" typeface="Arial"/>
+        <a:font script="Bugi" typeface="Leelawadee UI"/>
+        <a:font script="Bopo" typeface="Microsoft JhengHei"/>
+        <a:font script="Java" typeface="Javanese Text"/>
+        <a:font script="Lisu" typeface="Segoe UI"/>
+        <a:font script="Mymr" typeface="Myanmar Text"/>
+        <a:font script="Nkoo" typeface="Ebrima"/>
+        <a:font script="Olck" typeface="Nirmala UI"/>
+        <a:font script="Osma" typeface="Ebrima"/>
+        <a:font script="Phag" typeface="Phagspa"/>
+        <a:font script="Syrn" typeface="Estrangelo Edessa"/>
+        <a:font script="Syrj" typeface="Estrangelo Edessa"/>
+        <a:font script="Syre" typeface="Estrangelo Edessa"/>
+        <a:font script="Sora" typeface="Nirmala UI"/>
+        <a:font script="Tale" typeface="Microsoft Tai Le"/>
+        <a:font script="Talu" typeface="Microsoft New Tai Lue"/>
+        <a:font script="Tfng" typeface="Ebrima"/>
       </a:minorFont>
     </a:fontScheme>
     <a:fmtScheme name="Office">
@@ -13723,180 +13039,136 @@
           <a:gsLst>
             <a:gs pos="0">
               <a:schemeClr val="phClr">
-                <a:tint val="50000"/>
-                <a:satMod val="300000"/>
+                <a:lumMod val="110000"/>
+                <a:satMod val="105000"/>
+                <a:tint val="67000"/>
               </a:schemeClr>
             </a:gs>
-            <a:gs pos="35000">
+            <a:gs pos="50000">
               <a:schemeClr val="phClr">
-                <a:tint val="37000"/>
-                <a:satMod val="300000"/>
+                <a:lumMod val="105000"/>
+                <a:satMod val="103000"/>
+                <a:tint val="73000"/>
               </a:schemeClr>
             </a:gs>
             <a:gs pos="100000">
               <a:schemeClr val="phClr">
-                <a:tint val="15000"/>
-                <a:satMod val="350000"/>
+                <a:lumMod val="105000"/>
+                <a:satMod val="109000"/>
+                <a:tint val="81000"/>
               </a:schemeClr>
             </a:gs>
           </a:gsLst>
-          <a:lin ang="16200000" scaled="1"/>
+          <a:lin ang="5400000" scaled="0"/>
         </a:gradFill>
         <a:gradFill rotWithShape="1">
           <a:gsLst>
             <a:gs pos="0">
               <a:schemeClr val="phClr">
-                <a:tint val="100000"/>
+                <a:satMod val="103000"/>
+                <a:lumMod val="102000"/>
+                <a:tint val="94000"/>
+              </a:schemeClr>
+            </a:gs>
+            <a:gs pos="50000">
+              <a:schemeClr val="phClr">
+                <a:satMod val="110000"/>
+                <a:lumMod val="100000"/>
                 <a:shade val="100000"/>
-                <a:satMod val="130000"/>
               </a:schemeClr>
             </a:gs>
             <a:gs pos="100000">
               <a:schemeClr val="phClr">
-                <a:tint val="50000"/>
-                <a:shade val="100000"/>
-                <a:satMod val="350000"/>
+                <a:lumMod val="99000"/>
+                <a:satMod val="120000"/>
+                <a:shade val="78000"/>
               </a:schemeClr>
             </a:gs>
           </a:gsLst>
-          <a:lin ang="16200000" scaled="0"/>
+          <a:lin ang="5400000" scaled="0"/>
         </a:gradFill>
       </a:fillStyleLst>
       <a:lnStyleLst>
-        <a:ln w="9525" cap="flat" cmpd="sng" algn="ctr">
+        <a:ln w="12700" cap="flat" cmpd="sng" algn="ctr">
           <a:solidFill>
-            <a:schemeClr val="phClr">
-              <a:shade val="95000"/>
-              <a:satMod val="105000"/>
-            </a:schemeClr>
+            <a:schemeClr val="phClr"/>
           </a:solidFill>
           <a:prstDash val="solid"/>
+          <a:miter lim="800000"/>
+        </a:ln>
+        <a:ln w="19050" cap="flat" cmpd="sng" algn="ctr">
+          <a:solidFill>
+            <a:schemeClr val="phClr"/>
+          </a:solidFill>
+          <a:prstDash val="solid"/>
+          <a:miter lim="800000"/>
         </a:ln>
         <a:ln w="25400" cap="flat" cmpd="sng" algn="ctr">
           <a:solidFill>
             <a:schemeClr val="phClr"/>
           </a:solidFill>
           <a:prstDash val="solid"/>
-        </a:ln>
-        <a:ln w="38100" cap="flat" cmpd="sng" algn="ctr">
-          <a:solidFill>
-            <a:schemeClr val="phClr"/>
-          </a:solidFill>
-          <a:prstDash val="solid"/>
+          <a:miter lim="800000"/>
         </a:ln>
       </a:lnStyleLst>
       <a:effectStyleLst>
         <a:effectStyle>
+          <a:effectLst/>
+        </a:effectStyle>
+        <a:effectStyle>
+          <a:effectLst/>
+        </a:effectStyle>
+        <a:effectStyle>
           <a:effectLst>
-            <a:outerShdw blurRad="40000" dist="20000" dir="5400000" rotWithShape="0">
+            <a:outerShdw blurRad="57150" dist="19050" dir="5400000" algn="ctr" rotWithShape="0">
               <a:srgbClr val="000000">
-                <a:alpha val="38000"/>
+                <a:alpha val="63000"/>
               </a:srgbClr>
             </a:outerShdw>
           </a:effectLst>
-        </a:effectStyle>
-        <a:effectStyle>
-          <a:effectLst>
-            <a:outerShdw blurRad="40000" dist="23000" dir="5400000" rotWithShape="0">
-              <a:srgbClr val="000000">
-                <a:alpha val="35000"/>
-              </a:srgbClr>
-            </a:outerShdw>
-          </a:effectLst>
-        </a:effectStyle>
-        <a:effectStyle>
-          <a:effectLst>
-            <a:outerShdw blurRad="40000" dist="23000" dir="5400000" rotWithShape="0">
-              <a:srgbClr val="000000">
-                <a:alpha val="35000"/>
-              </a:srgbClr>
-            </a:outerShdw>
-          </a:effectLst>
-          <a:scene3d>
-            <a:camera prst="orthographicFront">
-              <a:rot lat="0" lon="0" rev="0"/>
-            </a:camera>
-            <a:lightRig rig="threePt" dir="t">
-              <a:rot lat="0" lon="0" rev="1200000"/>
-            </a:lightRig>
-          </a:scene3d>
-          <a:sp3d>
-            <a:bevelT w="63500" h="25400"/>
-          </a:sp3d>
         </a:effectStyle>
       </a:effectStyleLst>
       <a:bgFillStyleLst>
         <a:solidFill>
           <a:schemeClr val="phClr"/>
         </a:solidFill>
+        <a:solidFill>
+          <a:schemeClr val="phClr">
+            <a:tint val="95000"/>
+            <a:satMod val="170000"/>
+          </a:schemeClr>
+        </a:solidFill>
         <a:gradFill rotWithShape="1">
           <a:gsLst>
             <a:gs pos="0">
               <a:schemeClr val="phClr">
-                <a:tint val="40000"/>
-                <a:satMod val="350000"/>
+                <a:tint val="93000"/>
+                <a:satMod val="150000"/>
+                <a:shade val="98000"/>
+                <a:lumMod val="102000"/>
               </a:schemeClr>
             </a:gs>
-            <a:gs pos="40000">
+            <a:gs pos="50000">
               <a:schemeClr val="phClr">
-                <a:tint val="45000"/>
-                <a:shade val="99000"/>
-                <a:satMod val="350000"/>
+                <a:tint val="98000"/>
+                <a:satMod val="130000"/>
+                <a:shade val="90000"/>
+                <a:lumMod val="103000"/>
               </a:schemeClr>
             </a:gs>
             <a:gs pos="100000">
               <a:schemeClr val="phClr">
-                <a:shade val="20000"/>
-                <a:satMod val="255000"/>
+                <a:shade val="63000"/>
+                <a:satMod val="120000"/>
               </a:schemeClr>
             </a:gs>
           </a:gsLst>
-          <a:path path="circle">
-            <a:fillToRect l="50000" t="-80000" r="50000" b="180000"/>
-          </a:path>
-        </a:gradFill>
-        <a:gradFill rotWithShape="1">
-          <a:gsLst>
-            <a:gs pos="0">
-              <a:schemeClr val="phClr">
-                <a:tint val="80000"/>
-                <a:satMod val="300000"/>
-              </a:schemeClr>
-            </a:gs>
-            <a:gs pos="100000">
-              <a:schemeClr val="phClr">
-                <a:shade val="30000"/>
-                <a:satMod val="200000"/>
-              </a:schemeClr>
-            </a:gs>
-          </a:gsLst>
-          <a:path path="circle">
-            <a:fillToRect l="50000" t="50000" r="50000" b="50000"/>
-          </a:path>
+          <a:lin ang="5400000" scaled="0"/>
         </a:gradFill>
       </a:bgFillStyleLst>
     </a:fmtScheme>
   </a:themeElements>
   <a:objectDefaults>
-    <a:spDef>
-      <a:spPr/>
-      <a:bodyPr/>
-      <a:lstStyle/>
-      <a:style>
-        <a:lnRef idx="1">
-          <a:schemeClr val="accent1"/>
-        </a:lnRef>
-        <a:fillRef idx="3">
-          <a:schemeClr val="accent1"/>
-        </a:fillRef>
-        <a:effectRef idx="2">
-          <a:schemeClr val="accent1"/>
-        </a:effectRef>
-        <a:fontRef idx="minor">
-          <a:schemeClr val="lt1"/>
-        </a:fontRef>
-      </a:style>
-    </a:spDef>
     <a:lnDef>
       <a:spPr/>
       <a:bodyPr/>
@@ -13918,5 +13190,10 @@
     </a:lnDef>
   </a:objectDefaults>
   <a:extraClrSchemeLst/>
+  <a:extLst>
+    <a:ext uri="{05A4C25C-085E-4340-85A3-A5531E510DB2}">
+      <thm15:themeFamily xmlns:thm15="http://schemas.microsoft.com/office/thememl/2012/main" name="Office Theme" id="{2E142A2C-CD16-42D6-873A-C26D2A0506FA}" vid="{1BDDFF52-6CD6-40A5-AB3C-68EB2F1E4D0A}"/>
+    </a:ext>
+  </a:extLst>
 </a:theme>
 </file>